--- a/talks/DT_General_Mathematical_Models.pptx
+++ b/talks/DT_General_Mathematical_Models.pptx
@@ -137,14 +137,14 @@
   <p:extLst>
     <p:ext uri="{521415D9-36F7-43E2-AB2F-B90AF26B5E84}">
       <p14:sectionLst xmlns:p14="http://schemas.microsoft.com/office/powerpoint/2010/main">
-        <p14:section name="Introduction" id="{b53f72d9-6666-05e8-74f9-6116b47e18a3}">
+        <p14:section name="Introduction" id="{cbdfbb3f-6e2e-52ce-9316-881bf1ecbfd3}">
           <p14:sldIdLst>
             <p14:sldId id="256"/>
             <p14:sldId id="257"/>
             <p14:sldId id="258"/>
           </p14:sldIdLst>
         </p14:section>
-        <p14:section name="Dynamics and physiology" id="{c75e11f9-9830-3a23-1d4c-3f5601a8f8a0}">
+        <p14:section name="Dynamics and physiology" id="{6340ae0c-fdca-611f-6d61-1d3c9b94cb03}">
           <p14:sldIdLst>
             <p14:sldId id="259"/>
             <p14:sldId id="260"/>
@@ -158,7 +158,7 @@
             <p14:sldId id="268"/>
           </p14:sldIdLst>
         </p14:section>
-        <p14:section name="Statistics and data" id="{e3a7eccd-ea9a-85f3-3702-e9fef11106b8}">
+        <p14:section name="Statistics and data" id="{e5943db9-7b81-7c78-130c-5be905a59960}">
           <p14:sldIdLst>
             <p14:sldId id="269"/>
             <p14:sldId id="270"/>
@@ -170,7 +170,7 @@
             <p14:sldId id="276"/>
           </p14:sldIdLst>
         </p14:section>
-        <p14:section name="Virtual trials and decisions" id="{307bc3af-c8fa-a2e1-f750-057b8e4a32f6}">
+        <p14:section name="Virtual trials and decisions" id="{a4b36b35-b0a0-9393-dbdf-55fa68bdc691}">
           <p14:sldIdLst>
             <p14:sldId id="277"/>
             <p14:sldId id="278"/>
@@ -182,7 +182,7 @@
             <p14:sldId id="284"/>
           </p14:sldIdLst>
         </p14:section>
-        <p14:section name="Conclusion" id="{2719ac14-488e-f4a2-1172-8b834548e655}">
+        <p14:section name="Conclusion" id="{160af0be-7a4a-624e-e31e-1a4deb86d087}">
           <p14:sldIdLst>
             <p14:sldId id="285"/>
             <p14:sldId id="286"/>
@@ -5073,7 +5073,7 @@
     <p:bg>
       <p:bgPr>
         <a:solidFill>
-          <a:schemeClr val="tx2"/>
+          <a:srgbClr val="0B3C49"/>
         </a:solidFill>
       </p:bgPr>
     </p:bg>
@@ -5117,7 +5117,7 @@
               <a:buNone/>
               <a:defRPr lang="en-US" sz="1600" b="1" dirty="0">
                 <a:solidFill>
-                  <a:schemeClr val="accent1"/>
+                  <a:srgbClr val="F2A541"/>
                 </a:solidFill>
               </a:defRPr>
             </a:lvl1pPr>
@@ -5156,7 +5156,7 @@
               <a:buNone/>
               <a:defRPr lang="en-US" sz="4400" b="1" dirty="0">
                 <a:solidFill>
-                  <a:schemeClr val="bg1"/>
+                  <a:srgbClr val="FFFFFF"/>
                 </a:solidFill>
               </a:defRPr>
             </a:lvl1pPr>
@@ -5195,7 +5195,7 @@
               <a:buNone/>
               <a:defRPr lang="en-US" sz="1800" dirty="0">
                 <a:solidFill>
-                  <a:schemeClr val="bg2"/>
+                  <a:srgbClr val="EEF4F5"/>
                 </a:solidFill>
               </a:defRPr>
             </a:lvl1pPr>
@@ -5234,7 +5234,7 @@
               <a:buNone/>
               <a:defRPr lang="en-US" sz="1600" dirty="0">
                 <a:solidFill>
-                  <a:schemeClr val="accent1"/>
+                  <a:srgbClr val="F2A541"/>
                 </a:solidFill>
               </a:defRPr>
             </a:lvl1pPr>
@@ -5261,7 +5261,7 @@
     <p:bg>
       <p:bgPr>
         <a:solidFill>
-          <a:schemeClr val="tx2"/>
+          <a:srgbClr val="0B3C49"/>
         </a:solidFill>
       </p:bgPr>
     </p:bg>
@@ -5305,7 +5305,7 @@
               <a:buNone/>
               <a:defRPr lang="en-US" sz="1600" b="1" dirty="0">
                 <a:solidFill>
-                  <a:schemeClr val="accent1"/>
+                  <a:srgbClr val="F2A541"/>
                 </a:solidFill>
               </a:defRPr>
             </a:lvl1pPr>
@@ -5344,7 +5344,7 @@
               <a:buNone/>
               <a:defRPr lang="en-US" sz="4000" b="1" dirty="0">
                 <a:solidFill>
-                  <a:schemeClr val="bg1"/>
+                  <a:srgbClr val="FFFFFF"/>
                 </a:solidFill>
               </a:defRPr>
             </a:lvl1pPr>
@@ -5383,7 +5383,7 @@
               <a:buNone/>
               <a:defRPr lang="en-US" sz="1800" dirty="0">
                 <a:solidFill>
-                  <a:schemeClr val="bg2"/>
+                  <a:srgbClr val="EEF4F5"/>
                 </a:solidFill>
               </a:defRPr>
             </a:lvl1pPr>
@@ -5426,7 +5426,7 @@
             <a:lvl1pPr>
               <a:defRPr sz="1000">
                 <a:solidFill>
-                  <a:schemeClr val="bg2"/>
+                  <a:srgbClr val="EEF4F5"/>
                 </a:solidFill>
               </a:defRPr>
             </a:lvl1pPr>
@@ -5455,7 +5455,7 @@
     <p:bg>
       <p:bgPr>
         <a:solidFill>
-          <a:schemeClr val="bg1"/>
+          <a:srgbClr val="FFFFFF"/>
         </a:solidFill>
       </p:bgPr>
     </p:bg>
@@ -5499,7 +5499,7 @@
               <a:buNone/>
               <a:defRPr lang="en-US" sz="1300" b="1" dirty="0">
                 <a:solidFill>
-                  <a:schemeClr val="accent2"/>
+                  <a:srgbClr val="1F7A70"/>
                 </a:solidFill>
               </a:defRPr>
             </a:lvl1pPr>
@@ -5538,7 +5538,7 @@
               <a:buNone/>
               <a:defRPr lang="en-US" sz="3600" b="1" dirty="0">
                 <a:solidFill>
-                  <a:schemeClr val="tx2"/>
+                  <a:srgbClr val="0B3C49"/>
                 </a:solidFill>
               </a:defRPr>
             </a:lvl1pPr>
@@ -5578,7 +5578,7 @@
             <a:r>
               <a:rPr lang="en-US" sz="1000" dirty="0">
                 <a:solidFill>
-                  <a:schemeClr val="accent6"/>
+                  <a:srgbClr val="5F6B76"/>
                 </a:solidFill>
               </a:rPr>
               <a:t>Digital twins &amp; virtual trials  ·  general model catalogue</a:t>
@@ -5617,7 +5617,7 @@
             <a:lvl1pPr>
               <a:defRPr sz="1000">
                 <a:solidFill>
-                  <a:schemeClr val="accent6"/>
+                  <a:srgbClr val="5F6B76"/>
                 </a:solidFill>
               </a:defRPr>
             </a:lvl1pPr>
@@ -5687,7 +5687,7 @@
             <a:lvl1pPr>
               <a:defRPr sz="1000">
                 <a:solidFill>
-                  <a:schemeClr val="bg2"/>
+                  <a:srgbClr val="EEF4F5"/>
                 </a:solidFill>
               </a:defRPr>
             </a:lvl1pPr>
@@ -6011,7 +6011,7 @@
             <a:r>
               <a:rPr lang="en-US" sz="1600" b="1" dirty="0">
                 <a:solidFill>
-                  <a:schemeClr val="accent1"/>
+                  <a:srgbClr val="F2A541"/>
                 </a:solidFill>
               </a:rPr>
               <a:t>GENERAL MODEL CATALOGUE  ·  OCTOBER 2026</a:t>
@@ -6049,7 +6049,7 @@
             <a:r>
               <a:rPr lang="en-US" sz="4400" b="1" dirty="0">
                 <a:solidFill>
-                  <a:schemeClr val="bg1"/>
+                  <a:srgbClr val="FFFFFF"/>
                 </a:solidFill>
               </a:rPr>
               <a:t>Mathematical Models for Digital Twins and Virtual Trials</a:t>
@@ -6087,7 +6087,7 @@
             <a:r>
               <a:rPr lang="en-US" sz="1800" dirty="0">
                 <a:solidFill>
-                  <a:schemeClr val="bg2"/>
+                  <a:srgbClr val="EEF4F5"/>
                 </a:solidFill>
               </a:rPr>
               <a:t>A field-independent reference: about 90 models across dynamics, physiology, statistics, data assimilation, uncertainty, surrogates, virtual populations, trial design, control and validation</a:t>
@@ -6125,7 +6125,7 @@
             <a:r>
               <a:rPr lang="en-US" sz="1600" dirty="0">
                 <a:solidFill>
-                  <a:schemeClr val="accent1"/>
+                  <a:srgbClr val="F2A541"/>
                 </a:solidFill>
               </a:rPr>
               <a:t>Hamid Abdollahi, PhD</a:t>
@@ -6188,7 +6188,7 @@
             <a:r>
               <a:rPr lang="en-US" sz="1300" b="1" dirty="0">
                 <a:solidFill>
-                  <a:schemeClr val="accent2"/>
+                  <a:srgbClr val="1F7A70"/>
                 </a:solidFill>
               </a:rPr>
               <a:t>FAMILY 4 · DISEASE DYNAMICS</a:t>
@@ -6226,7 +6226,7 @@
             <a:r>
               <a:rPr lang="en-US" sz="3600" b="1" dirty="0">
                 <a:solidFill>
-                  <a:schemeClr val="tx2"/>
+                  <a:srgbClr val="0B3C49"/>
                 </a:solidFill>
               </a:rPr>
               <a:t>Growth models and treatment effect</a:t>
@@ -6246,17 +6246,17 @@
             <a:off x="548640" y="1554480"/>
             <a:ext cx="5394960" cy="2240280"/>
           </a:xfrm>
-          <a:prstGeom prst="roundRect">
+          <a:prstGeom prst="rect">
             <a:avLst>
               <a:gd name="adj" fmla="val 3265"/>
             </a:avLst>
           </a:prstGeom>
           <a:solidFill>
-            <a:schemeClr val="bg2"/>
+            <a:srgbClr val="EEF4F5"/>
           </a:solidFill>
           <a:ln w="12700">
             <a:solidFill>
-              <a:schemeClr val="bg2"/>
+              <a:srgbClr val="EEF4F5"/>
             </a:solidFill>
             <a:prstDash val="solid"/>
           </a:ln>
@@ -6289,7 +6289,7 @@
             <a:r>
               <a:rPr lang="en-US" sz="1600" b="1" dirty="0">
                 <a:solidFill>
-                  <a:schemeClr val="tx2"/>
+                  <a:srgbClr val="0B3C49"/>
                 </a:solidFill>
               </a:rPr>
               <a:t>Growth laws</a:t>
@@ -6313,7 +6313,7 @@
             <a:avLst/>
           </a:prstGeom>
           <a:solidFill>
-            <a:schemeClr val="bg1"/>
+            <a:srgbClr val="FFFFFF"/>
           </a:solidFill>
           <a:ln/>
         </p:spPr>
@@ -6327,7 +6327,7 @@
             <a:r>
               <a:rPr lang="en-US" sz="1500" dirty="0">
                 <a:solidFill>
-                  <a:schemeClr val="accent4"/>
+                  <a:srgbClr val="264653"/>
                 </a:solidFill>
                 <a:latin typeface="+mj-lt" pitchFamily="34" charset="0"/>
                 <a:ea typeface="+mj-lt" pitchFamily="34" charset="-122"/>
@@ -6344,7 +6344,7 @@
             <a:r>
               <a:rPr lang="en-US" sz="1500" dirty="0">
                 <a:solidFill>
-                  <a:schemeClr val="accent4"/>
+                  <a:srgbClr val="264653"/>
                 </a:solidFill>
                 <a:latin typeface="+mj-lt" pitchFamily="34" charset="0"/>
                 <a:ea typeface="+mj-lt" pitchFamily="34" charset="-122"/>
@@ -6361,7 +6361,7 @@
             <a:r>
               <a:rPr lang="en-US" sz="1500" dirty="0">
                 <a:solidFill>
-                  <a:schemeClr val="accent4"/>
+                  <a:srgbClr val="264653"/>
                 </a:solidFill>
                 <a:latin typeface="+mj-lt" pitchFamily="34" charset="0"/>
                 <a:ea typeface="+mj-lt" pitchFamily="34" charset="-122"/>
@@ -6400,7 +6400,7 @@
             <a:r>
               <a:rPr lang="en-US" sz="1400" dirty="0">
                 <a:solidFill>
-                  <a:schemeClr val="tx1"/>
+                  <a:srgbClr val="1B2430"/>
                 </a:solidFill>
               </a:rPr>
               <a:t>Tumours, bacteria, cell cultures; K = carrying capacity.</a:t>
@@ -6420,17 +6420,17 @@
             <a:off x="548640" y="3977640"/>
             <a:ext cx="5394960" cy="2148840"/>
           </a:xfrm>
-          <a:prstGeom prst="roundRect">
+          <a:prstGeom prst="rect">
             <a:avLst>
               <a:gd name="adj" fmla="val 3404"/>
             </a:avLst>
           </a:prstGeom>
           <a:solidFill>
-            <a:schemeClr val="bg2"/>
+            <a:srgbClr val="EEF4F5"/>
           </a:solidFill>
           <a:ln w="12700">
             <a:solidFill>
-              <a:schemeClr val="bg2"/>
+              <a:srgbClr val="EEF4F5"/>
             </a:solidFill>
             <a:prstDash val="solid"/>
           </a:ln>
@@ -6463,7 +6463,7 @@
             <a:r>
               <a:rPr lang="en-US" sz="1600" b="1" dirty="0">
                 <a:solidFill>
-                  <a:schemeClr val="tx2"/>
+                  <a:srgbClr val="0B3C49"/>
                 </a:solidFill>
               </a:rPr>
               <a:t>Treatment effect (log-kill, TGI)</a:t>
@@ -6487,7 +6487,7 @@
             <a:avLst/>
           </a:prstGeom>
           <a:solidFill>
-            <a:schemeClr val="bg1"/>
+            <a:srgbClr val="FFFFFF"/>
           </a:solidFill>
           <a:ln/>
         </p:spPr>
@@ -6501,7 +6501,7 @@
             <a:r>
               <a:rPr lang="en-US" sz="1500" dirty="0">
                 <a:solidFill>
-                  <a:schemeClr val="accent4"/>
+                  <a:srgbClr val="264653"/>
                 </a:solidFill>
                 <a:latin typeface="+mj-lt" pitchFamily="34" charset="0"/>
                 <a:ea typeface="+mj-lt" pitchFamily="34" charset="-122"/>
@@ -6518,7 +6518,7 @@
             <a:r>
               <a:rPr lang="en-US" sz="1500" dirty="0">
                 <a:solidFill>
-                  <a:schemeClr val="accent4"/>
+                  <a:srgbClr val="264653"/>
                 </a:solidFill>
                 <a:latin typeface="+mj-lt" pitchFamily="34" charset="0"/>
                 <a:ea typeface="+mj-lt" pitchFamily="34" charset="-122"/>
@@ -6557,7 +6557,7 @@
             <a:r>
               <a:rPr lang="en-US" sz="1400" dirty="0">
                 <a:solidFill>
-                  <a:schemeClr val="tx1"/>
+                  <a:srgbClr val="1B2430"/>
                 </a:solidFill>
               </a:rPr>
               <a:t>Drug kill proportional to exposure; tumour-growth-inhibition models (e.g. Simeoni) add delay compartments.</a:t>
@@ -6609,7 +6609,7 @@
             <a:r>
               <a:rPr lang="en-US" sz="1200" i="1" dirty="0">
                 <a:solidFill>
-                  <a:schemeClr val="accent6"/>
+                  <a:srgbClr val="5F6B76"/>
                 </a:solidFill>
               </a:rPr>
               <a:t>Exponential growth is unbounded; logistic and Gompertz saturate at K. Fit all three and compare by AIC.</a:t>
@@ -6648,7 +6648,7 @@
             <a:lvl1pPr>
               <a:defRPr sz="1000">
                 <a:solidFill>
-                  <a:schemeClr val="accent6"/>
+                  <a:srgbClr val="5F6B76"/>
                 </a:solidFill>
               </a:defRPr>
             </a:lvl1pPr>
@@ -6717,7 +6717,7 @@
             <a:r>
               <a:rPr lang="en-US" sz="1300" b="1" dirty="0">
                 <a:solidFill>
-                  <a:schemeClr val="accent2"/>
+                  <a:srgbClr val="1F7A70"/>
                 </a:solidFill>
               </a:rPr>
               <a:t>FAMILY 4 · POPULATION SPREAD AND PROGRESSION</a:t>
@@ -6755,7 +6755,7 @@
             <a:r>
               <a:rPr lang="en-US" sz="3600" b="1" dirty="0">
                 <a:solidFill>
-                  <a:schemeClr val="tx2"/>
+                  <a:srgbClr val="0B3C49"/>
                 </a:solidFill>
               </a:rPr>
               <a:t>Epidemics and chronic disease over time</a:t>
@@ -6775,17 +6775,17 @@
             <a:off x="548640" y="1554480"/>
             <a:ext cx="5394960" cy="2240280"/>
           </a:xfrm>
-          <a:prstGeom prst="roundRect">
+          <a:prstGeom prst="rect">
             <a:avLst>
               <a:gd name="adj" fmla="val 3265"/>
             </a:avLst>
           </a:prstGeom>
           <a:solidFill>
-            <a:schemeClr val="bg2"/>
+            <a:srgbClr val="EEF4F5"/>
           </a:solidFill>
           <a:ln w="12700">
             <a:solidFill>
-              <a:schemeClr val="bg2"/>
+              <a:srgbClr val="EEF4F5"/>
             </a:solidFill>
             <a:prstDash val="solid"/>
           </a:ln>
@@ -6818,7 +6818,7 @@
             <a:r>
               <a:rPr lang="en-US" sz="1600" b="1" dirty="0">
                 <a:solidFill>
-                  <a:schemeClr val="tx2"/>
+                  <a:srgbClr val="0B3C49"/>
                 </a:solidFill>
               </a:rPr>
               <a:t>SIR / SEIR epidemic model</a:t>
@@ -6842,7 +6842,7 @@
             <a:avLst/>
           </a:prstGeom>
           <a:solidFill>
-            <a:schemeClr val="bg1"/>
+            <a:srgbClr val="FFFFFF"/>
           </a:solidFill>
           <a:ln/>
         </p:spPr>
@@ -6856,7 +6856,7 @@
             <a:r>
               <a:rPr lang="en-US" sz="1600" dirty="0">
                 <a:solidFill>
-                  <a:schemeClr val="accent4"/>
+                  <a:srgbClr val="264653"/>
                 </a:solidFill>
                 <a:latin typeface="+mj-lt" pitchFamily="34" charset="0"/>
                 <a:ea typeface="+mj-lt" pitchFamily="34" charset="-122"/>
@@ -6873,7 +6873,7 @@
             <a:r>
               <a:rPr lang="en-US" sz="1600" dirty="0">
                 <a:solidFill>
-                  <a:schemeClr val="accent4"/>
+                  <a:srgbClr val="264653"/>
                 </a:solidFill>
                 <a:latin typeface="+mj-lt" pitchFamily="34" charset="0"/>
                 <a:ea typeface="+mj-lt" pitchFamily="34" charset="-122"/>
@@ -6912,7 +6912,7 @@
             <a:r>
               <a:rPr lang="en-US" sz="1400" dirty="0">
                 <a:solidFill>
-                  <a:schemeClr val="tx1"/>
+                  <a:srgbClr val="1B2430"/>
                 </a:solidFill>
               </a:rPr>
               <a:t>Compartments of susceptible, infected, recovered; SEIR adds an exposed stage. Vaccination and contact changes as controls.</a:t>
@@ -6932,17 +6932,17 @@
             <a:off x="6217920" y="1554480"/>
             <a:ext cx="5394960" cy="2240280"/>
           </a:xfrm>
-          <a:prstGeom prst="roundRect">
+          <a:prstGeom prst="rect">
             <a:avLst>
               <a:gd name="adj" fmla="val 3265"/>
             </a:avLst>
           </a:prstGeom>
           <a:solidFill>
-            <a:schemeClr val="bg2"/>
+            <a:srgbClr val="EEF4F5"/>
           </a:solidFill>
           <a:ln w="12700">
             <a:solidFill>
-              <a:schemeClr val="bg2"/>
+              <a:srgbClr val="EEF4F5"/>
             </a:solidFill>
             <a:prstDash val="solid"/>
           </a:ln>
@@ -6975,7 +6975,7 @@
             <a:r>
               <a:rPr lang="en-US" sz="1600" b="1" dirty="0">
                 <a:solidFill>
-                  <a:schemeClr val="tx2"/>
+                  <a:srgbClr val="0B3C49"/>
                 </a:solidFill>
               </a:rPr>
               <a:t>Disease-progression model</a:t>
@@ -6999,7 +6999,7 @@
             <a:avLst/>
           </a:prstGeom>
           <a:solidFill>
-            <a:schemeClr val="bg1"/>
+            <a:srgbClr val="FFFFFF"/>
           </a:solidFill>
           <a:ln/>
         </p:spPr>
@@ -7013,7 +7013,7 @@
             <a:r>
               <a:rPr lang="en-US" sz="1500" dirty="0">
                 <a:solidFill>
-                  <a:schemeClr val="accent4"/>
+                  <a:srgbClr val="264653"/>
                 </a:solidFill>
                 <a:latin typeface="+mj-lt" pitchFamily="34" charset="0"/>
                 <a:ea typeface="+mj-lt" pitchFamily="34" charset="-122"/>
@@ -7052,7 +7052,7 @@
             <a:r>
               <a:rPr lang="en-US" sz="1400" dirty="0">
                 <a:solidFill>
-                  <a:schemeClr val="tx1"/>
+                  <a:srgbClr val="1B2430"/>
                 </a:solidFill>
               </a:rPr>
               <a:t>Natural decline of a clinical score; drug either offsets the score or slows the slope α.</a:t>
@@ -7072,17 +7072,17 @@
             <a:off x="548640" y="4023360"/>
             <a:ext cx="5394960" cy="2240280"/>
           </a:xfrm>
-          <a:prstGeom prst="roundRect">
+          <a:prstGeom prst="rect">
             <a:avLst>
               <a:gd name="adj" fmla="val 3265"/>
             </a:avLst>
           </a:prstGeom>
           <a:solidFill>
-            <a:schemeClr val="bg2"/>
+            <a:srgbClr val="EEF4F5"/>
           </a:solidFill>
           <a:ln w="12700">
             <a:solidFill>
-              <a:schemeClr val="bg2"/>
+              <a:srgbClr val="EEF4F5"/>
             </a:solidFill>
             <a:prstDash val="solid"/>
           </a:ln>
@@ -7115,7 +7115,7 @@
             <a:r>
               <a:rPr lang="en-US" sz="1600" b="1" dirty="0">
                 <a:solidFill>
-                  <a:schemeClr val="tx2"/>
+                  <a:srgbClr val="0B3C49"/>
                 </a:solidFill>
               </a:rPr>
               <a:t>Multistate (illness–death)</a:t>
@@ -7139,7 +7139,7 @@
             <a:avLst/>
           </a:prstGeom>
           <a:solidFill>
-            <a:schemeClr val="bg1"/>
+            <a:srgbClr val="FFFFFF"/>
           </a:solidFill>
           <a:ln/>
         </p:spPr>
@@ -7153,7 +7153,7 @@
             <a:r>
               <a:rPr lang="en-US" sz="1600" dirty="0">
                 <a:solidFill>
-                  <a:schemeClr val="accent4"/>
+                  <a:srgbClr val="264653"/>
                 </a:solidFill>
                 <a:latin typeface="+mj-lt" pitchFamily="34" charset="0"/>
                 <a:ea typeface="+mj-lt" pitchFamily="34" charset="-122"/>
@@ -7192,7 +7192,7 @@
             <a:r>
               <a:rPr lang="en-US" sz="1400" dirty="0">
                 <a:solidFill>
-                  <a:schemeClr val="tx1"/>
+                  <a:srgbClr val="1B2430"/>
                 </a:solidFill>
               </a:rPr>
               <a:t>Transition hazards between healthy, ill and dead states; generalises survival analysis.</a:t>
@@ -7212,17 +7212,17 @@
             <a:off x="6217920" y="4023360"/>
             <a:ext cx="5394960" cy="2240280"/>
           </a:xfrm>
-          <a:prstGeom prst="roundRect">
+          <a:prstGeom prst="rect">
             <a:avLst>
               <a:gd name="adj" fmla="val 3265"/>
             </a:avLst>
           </a:prstGeom>
           <a:solidFill>
-            <a:schemeClr val="bg2"/>
+            <a:srgbClr val="EEF4F5"/>
           </a:solidFill>
           <a:ln w="12700">
             <a:solidFill>
-              <a:schemeClr val="bg2"/>
+              <a:srgbClr val="EEF4F5"/>
             </a:solidFill>
             <a:prstDash val="solid"/>
           </a:ln>
@@ -7255,7 +7255,7 @@
             <a:r>
               <a:rPr lang="en-US" sz="1600" b="1" dirty="0">
                 <a:solidFill>
-                  <a:schemeClr val="tx2"/>
+                  <a:srgbClr val="0B3C49"/>
                 </a:solidFill>
               </a:rPr>
               <a:t>Pharmacometric time to event</a:t>
@@ -7279,7 +7279,7 @@
             <a:avLst/>
           </a:prstGeom>
           <a:solidFill>
-            <a:schemeClr val="bg1"/>
+            <a:srgbClr val="FFFFFF"/>
           </a:solidFill>
           <a:ln/>
         </p:spPr>
@@ -7293,7 +7293,7 @@
             <a:r>
               <a:rPr lang="en-US" sz="1600" dirty="0">
                 <a:solidFill>
-                  <a:schemeClr val="accent4"/>
+                  <a:srgbClr val="264653"/>
                 </a:solidFill>
                 <a:latin typeface="+mj-lt" pitchFamily="34" charset="0"/>
                 <a:ea typeface="+mj-lt" pitchFamily="34" charset="-122"/>
@@ -7332,7 +7332,7 @@
             <a:r>
               <a:rPr lang="en-US" sz="1400" dirty="0">
                 <a:solidFill>
-                  <a:schemeClr val="tx1"/>
+                  <a:srgbClr val="1B2430"/>
                 </a:solidFill>
               </a:rPr>
               <a:t>Event hazard driven by a model-predicted, time-varying exposure or biomarker E(s).</a:t>
@@ -7371,7 +7371,7 @@
             <a:lvl1pPr>
               <a:defRPr sz="1000">
                 <a:solidFill>
-                  <a:schemeClr val="accent6"/>
+                  <a:srgbClr val="5F6B76"/>
                 </a:solidFill>
               </a:defRPr>
             </a:lvl1pPr>
@@ -7440,7 +7440,7 @@
             <a:r>
               <a:rPr lang="en-US" sz="1300" b="1" dirty="0">
                 <a:solidFill>
-                  <a:schemeClr val="accent2"/>
+                  <a:srgbClr val="1F7A70"/>
                 </a:solidFill>
               </a:rPr>
               <a:t>FAMILY 5 · ORGAN PHYSIOLOGY</a:t>
@@ -7478,7 +7478,7 @@
             <a:r>
               <a:rPr lang="en-US" sz="3600" b="1" dirty="0">
                 <a:solidFill>
-                  <a:schemeClr val="tx2"/>
+                  <a:srgbClr val="0B3C49"/>
                 </a:solidFill>
               </a:rPr>
               <a:t>Classic physiological twins</a:t>
@@ -7498,17 +7498,17 @@
             <a:off x="548640" y="1554480"/>
             <a:ext cx="5394960" cy="2240280"/>
           </a:xfrm>
-          <a:prstGeom prst="roundRect">
+          <a:prstGeom prst="rect">
             <a:avLst>
               <a:gd name="adj" fmla="val 3265"/>
             </a:avLst>
           </a:prstGeom>
           <a:solidFill>
-            <a:schemeClr val="bg2"/>
+            <a:srgbClr val="EEF4F5"/>
           </a:solidFill>
           <a:ln w="12700">
             <a:solidFill>
-              <a:schemeClr val="bg2"/>
+              <a:srgbClr val="EEF4F5"/>
             </a:solidFill>
             <a:prstDash val="solid"/>
           </a:ln>
@@ -7541,7 +7541,7 @@
             <a:r>
               <a:rPr lang="en-US" sz="1600" b="1" dirty="0">
                 <a:solidFill>
-                  <a:schemeClr val="tx2"/>
+                  <a:srgbClr val="0B3C49"/>
                 </a:solidFill>
               </a:rPr>
               <a:t>Windkessel (circulation)</a:t>
@@ -7565,7 +7565,7 @@
             <a:avLst/>
           </a:prstGeom>
           <a:solidFill>
-            <a:schemeClr val="bg1"/>
+            <a:srgbClr val="FFFFFF"/>
           </a:solidFill>
           <a:ln/>
         </p:spPr>
@@ -7579,7 +7579,7 @@
             <a:r>
               <a:rPr lang="en-US" sz="1600" dirty="0">
                 <a:solidFill>
-                  <a:schemeClr val="accent4"/>
+                  <a:srgbClr val="264653"/>
                 </a:solidFill>
                 <a:latin typeface="+mj-lt" pitchFamily="34" charset="0"/>
                 <a:ea typeface="+mj-lt" pitchFamily="34" charset="-122"/>
@@ -7596,7 +7596,7 @@
             <a:r>
               <a:rPr lang="en-US" sz="1600" dirty="0">
                 <a:solidFill>
-                  <a:schemeClr val="accent4"/>
+                  <a:srgbClr val="264653"/>
                 </a:solidFill>
                 <a:latin typeface="+mj-lt" pitchFamily="34" charset="0"/>
                 <a:ea typeface="+mj-lt" pitchFamily="34" charset="-122"/>
@@ -7635,7 +7635,7 @@
             <a:r>
               <a:rPr lang="en-US" sz="1400" dirty="0">
                 <a:solidFill>
-                  <a:schemeClr val="tx1"/>
+                  <a:srgbClr val="1B2430"/>
                 </a:solidFill>
               </a:rPr>
               <a:t>Arterial pressure P from inflow Q, compliance C and resistance R. Lumped 0-D cardiovascular twin.</a:t>
@@ -7655,17 +7655,17 @@
             <a:off x="6217920" y="1554480"/>
             <a:ext cx="5394960" cy="2240280"/>
           </a:xfrm>
-          <a:prstGeom prst="roundRect">
+          <a:prstGeom prst="rect">
             <a:avLst>
               <a:gd name="adj" fmla="val 3265"/>
             </a:avLst>
           </a:prstGeom>
           <a:solidFill>
-            <a:schemeClr val="bg2"/>
+            <a:srgbClr val="EEF4F5"/>
           </a:solidFill>
           <a:ln w="12700">
             <a:solidFill>
-              <a:schemeClr val="bg2"/>
+              <a:srgbClr val="EEF4F5"/>
             </a:solidFill>
             <a:prstDash val="solid"/>
           </a:ln>
@@ -7698,7 +7698,7 @@
             <a:r>
               <a:rPr lang="en-US" sz="1600" b="1" dirty="0">
                 <a:solidFill>
-                  <a:schemeClr val="tx2"/>
+                  <a:srgbClr val="0B3C49"/>
                 </a:solidFill>
               </a:rPr>
               <a:t>Cell excitation (Hodgkin–Huxley)</a:t>
@@ -7722,7 +7722,7 @@
             <a:avLst/>
           </a:prstGeom>
           <a:solidFill>
-            <a:schemeClr val="bg1"/>
+            <a:srgbClr val="FFFFFF"/>
           </a:solidFill>
           <a:ln/>
         </p:spPr>
@@ -7736,7 +7736,7 @@
             <a:r>
               <a:rPr lang="en-US" sz="1600" dirty="0">
                 <a:solidFill>
-                  <a:schemeClr val="accent4"/>
+                  <a:srgbClr val="264653"/>
                 </a:solidFill>
                 <a:latin typeface="+mj-lt" pitchFamily="34" charset="0"/>
                 <a:ea typeface="+mj-lt" pitchFamily="34" charset="-122"/>
@@ -7753,7 +7753,7 @@
             <a:r>
               <a:rPr lang="en-US" sz="1600" dirty="0">
                 <a:solidFill>
-                  <a:schemeClr val="accent4"/>
+                  <a:srgbClr val="264653"/>
                 </a:solidFill>
                 <a:latin typeface="+mj-lt" pitchFamily="34" charset="0"/>
                 <a:ea typeface="+mj-lt" pitchFamily="34" charset="-122"/>
@@ -7792,7 +7792,7 @@
             <a:r>
               <a:rPr lang="en-US" sz="1400" dirty="0">
                 <a:solidFill>
-                  <a:schemeClr val="tx1"/>
+                  <a:srgbClr val="1B2430"/>
                 </a:solidFill>
               </a:rPr>
               <a:t>Action potentials from ion-channel conductances; basis of cardiac and neural electrophysiology twins.</a:t>
@@ -7812,17 +7812,17 @@
             <a:off x="548640" y="4023360"/>
             <a:ext cx="5394960" cy="2240280"/>
           </a:xfrm>
-          <a:prstGeom prst="roundRect">
+          <a:prstGeom prst="rect">
             <a:avLst>
               <a:gd name="adj" fmla="val 3265"/>
             </a:avLst>
           </a:prstGeom>
           <a:solidFill>
-            <a:schemeClr val="bg2"/>
+            <a:srgbClr val="EEF4F5"/>
           </a:solidFill>
           <a:ln w="12700">
             <a:solidFill>
-              <a:schemeClr val="bg2"/>
+              <a:srgbClr val="EEF4F5"/>
             </a:solidFill>
             <a:prstDash val="solid"/>
           </a:ln>
@@ -7855,7 +7855,7 @@
             <a:r>
               <a:rPr lang="en-US" sz="1600" b="1" dirty="0">
                 <a:solidFill>
-                  <a:schemeClr val="tx2"/>
+                  <a:srgbClr val="0B3C49"/>
                 </a:solidFill>
               </a:rPr>
               <a:t>Glucose–insulin (Bergman minimal)</a:t>
@@ -7879,7 +7879,7 @@
             <a:avLst/>
           </a:prstGeom>
           <a:solidFill>
-            <a:schemeClr val="bg1"/>
+            <a:srgbClr val="FFFFFF"/>
           </a:solidFill>
           <a:ln/>
         </p:spPr>
@@ -7893,7 +7893,7 @@
             <a:r>
               <a:rPr lang="en-US" sz="1600" dirty="0">
                 <a:solidFill>
-                  <a:schemeClr val="accent4"/>
+                  <a:srgbClr val="264653"/>
                 </a:solidFill>
                 <a:latin typeface="+mj-lt" pitchFamily="34" charset="0"/>
                 <a:ea typeface="+mj-lt" pitchFamily="34" charset="-122"/>
@@ -7910,7 +7910,7 @@
             <a:r>
               <a:rPr lang="en-US" sz="1600" dirty="0">
                 <a:solidFill>
-                  <a:schemeClr val="accent4"/>
+                  <a:srgbClr val="264653"/>
                 </a:solidFill>
                 <a:latin typeface="+mj-lt" pitchFamily="34" charset="0"/>
                 <a:ea typeface="+mj-lt" pitchFamily="34" charset="-122"/>
@@ -7949,7 +7949,7 @@
             <a:r>
               <a:rPr lang="en-US" sz="1400" dirty="0">
                 <a:solidFill>
-                  <a:schemeClr val="tx1"/>
+                  <a:srgbClr val="1B2430"/>
                 </a:solidFill>
               </a:rPr>
               <a:t>Insulin sensitivity S_I = p₃/p₂ from a glucose tolerance test; artificial-pancreas twins.</a:t>
@@ -7969,17 +7969,17 @@
             <a:off x="6217920" y="4023360"/>
             <a:ext cx="5394960" cy="2240280"/>
           </a:xfrm>
-          <a:prstGeom prst="roundRect">
+          <a:prstGeom prst="rect">
             <a:avLst>
               <a:gd name="adj" fmla="val 3265"/>
             </a:avLst>
           </a:prstGeom>
           <a:solidFill>
-            <a:schemeClr val="bg2"/>
+            <a:srgbClr val="EEF4F5"/>
           </a:solidFill>
           <a:ln w="12700">
             <a:solidFill>
-              <a:schemeClr val="bg2"/>
+              <a:srgbClr val="EEF4F5"/>
             </a:solidFill>
             <a:prstDash val="solid"/>
           </a:ln>
@@ -8012,7 +8012,7 @@
             <a:r>
               <a:rPr lang="en-US" sz="1600" b="1" dirty="0">
                 <a:solidFill>
-                  <a:schemeClr val="tx2"/>
+                  <a:srgbClr val="0B3C49"/>
                 </a:solidFill>
               </a:rPr>
               <a:t>Respiratory mechanics</a:t>
@@ -8036,7 +8036,7 @@
             <a:avLst/>
           </a:prstGeom>
           <a:solidFill>
-            <a:schemeClr val="bg1"/>
+            <a:srgbClr val="FFFFFF"/>
           </a:solidFill>
           <a:ln/>
         </p:spPr>
@@ -8050,7 +8050,7 @@
             <a:r>
               <a:rPr lang="en-US" sz="1600" dirty="0">
                 <a:solidFill>
-                  <a:schemeClr val="accent4"/>
+                  <a:srgbClr val="264653"/>
                 </a:solidFill>
                 <a:latin typeface="+mj-lt" pitchFamily="34" charset="0"/>
                 <a:ea typeface="+mj-lt" pitchFamily="34" charset="-122"/>
@@ -8089,7 +8089,7 @@
             <a:r>
               <a:rPr lang="en-US" sz="1400" dirty="0">
                 <a:solidFill>
-                  <a:schemeClr val="tx1"/>
+                  <a:srgbClr val="1B2430"/>
                 </a:solidFill>
               </a:rPr>
               <a:t>Airway pressure from flow, volume, resistance R and compliance C; ventilator-setting twins.</a:t>
@@ -8128,7 +8128,7 @@
             <a:lvl1pPr>
               <a:defRPr sz="1000">
                 <a:solidFill>
-                  <a:schemeClr val="accent6"/>
+                  <a:srgbClr val="5F6B76"/>
                 </a:solidFill>
               </a:defRPr>
             </a:lvl1pPr>
@@ -8197,7 +8197,7 @@
             <a:r>
               <a:rPr lang="en-US" sz="1300" b="1" dirty="0">
                 <a:solidFill>
-                  <a:schemeClr val="accent2"/>
+                  <a:srgbClr val="1F7A70"/>
                 </a:solidFill>
               </a:rPr>
               <a:t>FAMILY 6 · CONTINUUM PHYSICS</a:t>
@@ -8235,7 +8235,7 @@
             <a:r>
               <a:rPr lang="en-US" sz="3600" b="1" dirty="0">
                 <a:solidFill>
-                  <a:schemeClr val="tx2"/>
+                  <a:srgbClr val="0B3C49"/>
                 </a:solidFill>
               </a:rPr>
               <a:t>Space-resolved mechanics, flow and transport</a:t>
@@ -8255,17 +8255,17 @@
             <a:off x="548640" y="1554480"/>
             <a:ext cx="5394960" cy="2240280"/>
           </a:xfrm>
-          <a:prstGeom prst="roundRect">
+          <a:prstGeom prst="rect">
             <a:avLst>
               <a:gd name="adj" fmla="val 3265"/>
             </a:avLst>
           </a:prstGeom>
           <a:solidFill>
-            <a:schemeClr val="bg2"/>
+            <a:srgbClr val="EEF4F5"/>
           </a:solidFill>
           <a:ln w="12700">
             <a:solidFill>
-              <a:schemeClr val="bg2"/>
+              <a:srgbClr val="EEF4F5"/>
             </a:solidFill>
             <a:prstDash val="solid"/>
           </a:ln>
@@ -8298,7 +8298,7 @@
             <a:r>
               <a:rPr lang="en-US" sz="1600" b="1" dirty="0">
                 <a:solidFill>
-                  <a:schemeClr val="tx2"/>
+                  <a:srgbClr val="0B3C49"/>
                 </a:solidFill>
               </a:rPr>
               <a:t>Solid mechanics (FEM)</a:t>
@@ -8322,7 +8322,7 @@
             <a:avLst/>
           </a:prstGeom>
           <a:solidFill>
-            <a:schemeClr val="bg1"/>
+            <a:srgbClr val="FFFFFF"/>
           </a:solidFill>
           <a:ln/>
         </p:spPr>
@@ -8336,7 +8336,7 @@
             <a:r>
               <a:rPr lang="en-US" sz="1600" dirty="0">
                 <a:solidFill>
-                  <a:schemeClr val="accent4"/>
+                  <a:srgbClr val="264653"/>
                 </a:solidFill>
                 <a:latin typeface="+mj-lt" pitchFamily="34" charset="0"/>
                 <a:ea typeface="+mj-lt" pitchFamily="34" charset="-122"/>
@@ -8353,7 +8353,7 @@
             <a:r>
               <a:rPr lang="en-US" sz="1600" dirty="0">
                 <a:solidFill>
-                  <a:schemeClr val="accent4"/>
+                  <a:srgbClr val="264653"/>
                 </a:solidFill>
                 <a:latin typeface="+mj-lt" pitchFamily="34" charset="0"/>
                 <a:ea typeface="+mj-lt" pitchFamily="34" charset="-122"/>
@@ -8392,7 +8392,7 @@
             <a:r>
               <a:rPr lang="en-US" sz="1400" dirty="0">
                 <a:solidFill>
-                  <a:schemeClr val="tx1"/>
+                  <a:srgbClr val="1B2430"/>
                 </a:solidFill>
               </a:rPr>
               <a:t>Tissue, bone, implants and devices. Hyperelastic laws for soft tissue.</a:t>
@@ -8412,17 +8412,17 @@
             <a:off x="6217920" y="1554480"/>
             <a:ext cx="5394960" cy="2240280"/>
           </a:xfrm>
-          <a:prstGeom prst="roundRect">
+          <a:prstGeom prst="rect">
             <a:avLst>
               <a:gd name="adj" fmla="val 3265"/>
             </a:avLst>
           </a:prstGeom>
           <a:solidFill>
-            <a:schemeClr val="bg2"/>
+            <a:srgbClr val="EEF4F5"/>
           </a:solidFill>
           <a:ln w="12700">
             <a:solidFill>
-              <a:schemeClr val="bg2"/>
+              <a:srgbClr val="EEF4F5"/>
             </a:solidFill>
             <a:prstDash val="solid"/>
           </a:ln>
@@ -8455,7 +8455,7 @@
             <a:r>
               <a:rPr lang="en-US" sz="1600" b="1" dirty="0">
                 <a:solidFill>
-                  <a:schemeClr val="tx2"/>
+                  <a:srgbClr val="0B3C49"/>
                 </a:solidFill>
               </a:rPr>
               <a:t>Fluid flow (Navier–Stokes)</a:t>
@@ -8479,7 +8479,7 @@
             <a:avLst/>
           </a:prstGeom>
           <a:solidFill>
-            <a:schemeClr val="bg1"/>
+            <a:srgbClr val="FFFFFF"/>
           </a:solidFill>
           <a:ln/>
         </p:spPr>
@@ -8493,7 +8493,7 @@
             <a:r>
               <a:rPr lang="en-US" sz="1500" dirty="0">
                 <a:solidFill>
-                  <a:schemeClr val="accent4"/>
+                  <a:srgbClr val="264653"/>
                 </a:solidFill>
                 <a:latin typeface="+mj-lt" pitchFamily="34" charset="0"/>
                 <a:ea typeface="+mj-lt" pitchFamily="34" charset="-122"/>
@@ -8510,7 +8510,7 @@
             <a:r>
               <a:rPr lang="en-US" sz="1500" dirty="0">
                 <a:solidFill>
-                  <a:schemeClr val="accent4"/>
+                  <a:srgbClr val="264653"/>
                 </a:solidFill>
                 <a:latin typeface="+mj-lt" pitchFamily="34" charset="0"/>
                 <a:ea typeface="+mj-lt" pitchFamily="34" charset="-122"/>
@@ -8549,7 +8549,7 @@
             <a:r>
               <a:rPr lang="en-US" sz="1400" dirty="0">
                 <a:solidFill>
-                  <a:schemeClr val="tx1"/>
+                  <a:srgbClr val="1B2430"/>
                 </a:solidFill>
               </a:rPr>
               <a:t>Blood flow, airflow, CSF; fluid–structure interaction couples it to mechanics.</a:t>
@@ -8569,17 +8569,17 @@
             <a:off x="548640" y="4023360"/>
             <a:ext cx="5394960" cy="2240280"/>
           </a:xfrm>
-          <a:prstGeom prst="roundRect">
+          <a:prstGeom prst="rect">
             <a:avLst>
               <a:gd name="adj" fmla="val 3265"/>
             </a:avLst>
           </a:prstGeom>
           <a:solidFill>
-            <a:schemeClr val="bg2"/>
+            <a:srgbClr val="EEF4F5"/>
           </a:solidFill>
           <a:ln w="12700">
             <a:solidFill>
-              <a:schemeClr val="bg2"/>
+              <a:srgbClr val="EEF4F5"/>
             </a:solidFill>
             <a:prstDash val="solid"/>
           </a:ln>
@@ -8612,7 +8612,7 @@
             <a:r>
               <a:rPr lang="en-US" sz="1600" b="1" dirty="0">
                 <a:solidFill>
-                  <a:schemeClr val="tx2"/>
+                  <a:srgbClr val="0B3C49"/>
                 </a:solidFill>
               </a:rPr>
               <a:t>Advection–diffusion–reaction</a:t>
@@ -8636,7 +8636,7 @@
             <a:avLst/>
           </a:prstGeom>
           <a:solidFill>
-            <a:schemeClr val="bg1"/>
+            <a:srgbClr val="FFFFFF"/>
           </a:solidFill>
           <a:ln/>
         </p:spPr>
@@ -8650,7 +8650,7 @@
             <a:r>
               <a:rPr lang="en-US" sz="1600" dirty="0">
                 <a:solidFill>
-                  <a:schemeClr val="accent4"/>
+                  <a:srgbClr val="264653"/>
                 </a:solidFill>
                 <a:latin typeface="+mj-lt" pitchFamily="34" charset="0"/>
                 <a:ea typeface="+mj-lt" pitchFamily="34" charset="-122"/>
@@ -8689,7 +8689,7 @@
             <a:r>
               <a:rPr lang="en-US" sz="1400" dirty="0">
                 <a:solidFill>
-                  <a:schemeClr val="tx1"/>
+                  <a:srgbClr val="1B2430"/>
                 </a:solidFill>
               </a:rPr>
               <a:t>Drug, oxygen or nutrient transport in tissue; reaction–diffusion for invading cells (Fisher–KPP).</a:t>
@@ -8709,17 +8709,17 @@
             <a:off x="6217920" y="4023360"/>
             <a:ext cx="5394960" cy="2240280"/>
           </a:xfrm>
-          <a:prstGeom prst="roundRect">
+          <a:prstGeom prst="rect">
             <a:avLst>
               <a:gd name="adj" fmla="val 3265"/>
             </a:avLst>
           </a:prstGeom>
           <a:solidFill>
-            <a:schemeClr val="bg2"/>
+            <a:srgbClr val="EEF4F5"/>
           </a:solidFill>
           <a:ln w="12700">
             <a:solidFill>
-              <a:schemeClr val="bg2"/>
+              <a:srgbClr val="EEF4F5"/>
             </a:solidFill>
             <a:prstDash val="solid"/>
           </a:ln>
@@ -8752,7 +8752,7 @@
             <a:r>
               <a:rPr lang="en-US" sz="1600" b="1" dirty="0">
                 <a:solidFill>
-                  <a:schemeClr val="tx2"/>
+                  <a:srgbClr val="0B3C49"/>
                 </a:solidFill>
               </a:rPr>
               <a:t>Heat transfer (Pennes bioheat)</a:t>
@@ -8776,7 +8776,7 @@
             <a:avLst/>
           </a:prstGeom>
           <a:solidFill>
-            <a:schemeClr val="bg1"/>
+            <a:srgbClr val="FFFFFF"/>
           </a:solidFill>
           <a:ln/>
         </p:spPr>
@@ -8790,7 +8790,7 @@
             <a:r>
               <a:rPr lang="en-US" sz="1500" dirty="0">
                 <a:solidFill>
-                  <a:schemeClr val="accent4"/>
+                  <a:srgbClr val="264653"/>
                 </a:solidFill>
                 <a:latin typeface="+mj-lt" pitchFamily="34" charset="0"/>
                 <a:ea typeface="+mj-lt" pitchFamily="34" charset="-122"/>
@@ -8829,7 +8829,7 @@
             <a:r>
               <a:rPr lang="en-US" sz="1400" dirty="0">
                 <a:solidFill>
-                  <a:schemeClr val="tx1"/>
+                  <a:srgbClr val="1B2430"/>
                 </a:solidFill>
               </a:rPr>
               <a:t>Tissue temperature with blood perfusion ω_b; ablation, hyperthermia and device-safety twins.</a:t>
@@ -8868,7 +8868,7 @@
             <a:lvl1pPr>
               <a:defRPr sz="1000">
                 <a:solidFill>
-                  <a:schemeClr val="accent6"/>
+                  <a:srgbClr val="5F6B76"/>
                 </a:solidFill>
               </a:defRPr>
             </a:lvl1pPr>
@@ -8937,7 +8937,7 @@
             <a:r>
               <a:rPr lang="en-US" sz="1600" b="1" dirty="0">
                 <a:solidFill>
-                  <a:schemeClr val="accent1"/>
+                  <a:srgbClr val="F2A541"/>
                 </a:solidFill>
               </a:rPr>
               <a:t>PART II</a:t>
@@ -8975,7 +8975,7 @@
             <a:r>
               <a:rPr lang="en-US" sz="4000" b="1" dirty="0">
                 <a:solidFill>
-                  <a:schemeClr val="bg1"/>
+                  <a:srgbClr val="FFFFFF"/>
                 </a:solidFill>
               </a:rPr>
               <a:t>Models of variability and of the data</a:t>
@@ -9013,7 +9013,7 @@
             <a:r>
               <a:rPr lang="en-US" sz="1800" dirty="0">
                 <a:solidFill>
-                  <a:schemeClr val="bg2"/>
+                  <a:srgbClr val="EEF4F5"/>
                 </a:solidFill>
               </a:rPr>
               <a:t>Families 7–10: population statistics, data assimilation, uncertainty and sensitivity, and surrogate models</a:t>
@@ -9052,7 +9052,7 @@
             <a:lvl1pPr>
               <a:defRPr sz="1000">
                 <a:solidFill>
-                  <a:schemeClr val="bg2"/>
+                  <a:srgbClr val="EEF4F5"/>
                 </a:solidFill>
               </a:defRPr>
             </a:lvl1pPr>
@@ -9121,7 +9121,7 @@
             <a:r>
               <a:rPr lang="en-US" sz="1300" b="1" dirty="0">
                 <a:solidFill>
-                  <a:schemeClr val="accent2"/>
+                  <a:srgbClr val="1F7A70"/>
                 </a:solidFill>
               </a:rPr>
               <a:t>FAMILY 7 · POPULATION MODELS</a:t>
@@ -9159,7 +9159,7 @@
             <a:r>
               <a:rPr lang="en-US" sz="3600" b="1" dirty="0">
                 <a:solidFill>
-                  <a:schemeClr val="tx2"/>
+                  <a:srgbClr val="0B3C49"/>
                 </a:solidFill>
               </a:rPr>
               <a:t>Variability between and within individuals</a:t>
@@ -9179,17 +9179,17 @@
             <a:off x="548640" y="1554480"/>
             <a:ext cx="5394960" cy="2240280"/>
           </a:xfrm>
-          <a:prstGeom prst="roundRect">
+          <a:prstGeom prst="rect">
             <a:avLst>
               <a:gd name="adj" fmla="val 3265"/>
             </a:avLst>
           </a:prstGeom>
           <a:solidFill>
-            <a:schemeClr val="bg2"/>
+            <a:srgbClr val="EEF4F5"/>
           </a:solidFill>
           <a:ln w="12700">
             <a:solidFill>
-              <a:schemeClr val="bg2"/>
+              <a:srgbClr val="EEF4F5"/>
             </a:solidFill>
             <a:prstDash val="solid"/>
           </a:ln>
@@ -9222,7 +9222,7 @@
             <a:r>
               <a:rPr lang="en-US" sz="1600" b="1" dirty="0">
                 <a:solidFill>
-                  <a:schemeClr val="tx2"/>
+                  <a:srgbClr val="0B3C49"/>
                 </a:solidFill>
               </a:rPr>
               <a:t>Nonlinear mixed effects (NLME)</a:t>
@@ -9246,7 +9246,7 @@
             <a:avLst/>
           </a:prstGeom>
           <a:solidFill>
-            <a:schemeClr val="bg1"/>
+            <a:srgbClr val="FFFFFF"/>
           </a:solidFill>
           <a:ln/>
         </p:spPr>
@@ -9260,7 +9260,7 @@
             <a:r>
               <a:rPr lang="en-US" sz="1500" dirty="0">
                 <a:solidFill>
-                  <a:schemeClr val="accent4"/>
+                  <a:srgbClr val="264653"/>
                 </a:solidFill>
                 <a:latin typeface="+mj-lt" pitchFamily="34" charset="0"/>
                 <a:ea typeface="+mj-lt" pitchFamily="34" charset="-122"/>
@@ -9277,7 +9277,7 @@
             <a:r>
               <a:rPr lang="en-US" sz="1500" dirty="0">
                 <a:solidFill>
-                  <a:schemeClr val="accent4"/>
+                  <a:srgbClr val="264653"/>
                 </a:solidFill>
                 <a:latin typeface="+mj-lt" pitchFamily="34" charset="0"/>
                 <a:ea typeface="+mj-lt" pitchFamily="34" charset="-122"/>
@@ -9316,7 +9316,7 @@
             <a:r>
               <a:rPr lang="en-US" sz="1400" dirty="0">
                 <a:solidFill>
-                  <a:schemeClr val="tx1"/>
+                  <a:srgbClr val="1B2430"/>
                 </a:solidFill>
               </a:rPr>
               <a:t>The core population model: typical value, covariate effects, between-subject variability Ω.</a:t>
@@ -9336,17 +9336,17 @@
             <a:off x="6217920" y="1554480"/>
             <a:ext cx="5394960" cy="2240280"/>
           </a:xfrm>
-          <a:prstGeom prst="roundRect">
+          <a:prstGeom prst="rect">
             <a:avLst>
               <a:gd name="adj" fmla="val 3265"/>
             </a:avLst>
           </a:prstGeom>
           <a:solidFill>
-            <a:schemeClr val="bg2"/>
+            <a:srgbClr val="EEF4F5"/>
           </a:solidFill>
           <a:ln w="12700">
             <a:solidFill>
-              <a:schemeClr val="bg2"/>
+              <a:srgbClr val="EEF4F5"/>
             </a:solidFill>
             <a:prstDash val="solid"/>
           </a:ln>
@@ -9379,7 +9379,7 @@
             <a:r>
               <a:rPr lang="en-US" sz="1600" b="1" dirty="0">
                 <a:solidFill>
-                  <a:schemeClr val="tx2"/>
+                  <a:srgbClr val="0B3C49"/>
                 </a:solidFill>
               </a:rPr>
               <a:t>Linear mixed model</a:t>
@@ -9403,7 +9403,7 @@
             <a:avLst/>
           </a:prstGeom>
           <a:solidFill>
-            <a:schemeClr val="bg1"/>
+            <a:srgbClr val="FFFFFF"/>
           </a:solidFill>
           <a:ln/>
         </p:spPr>
@@ -9417,7 +9417,7 @@
             <a:r>
               <a:rPr lang="en-US" sz="1600" dirty="0">
                 <a:solidFill>
-                  <a:schemeClr val="accent4"/>
+                  <a:srgbClr val="264653"/>
                 </a:solidFill>
                 <a:latin typeface="+mj-lt" pitchFamily="34" charset="0"/>
                 <a:ea typeface="+mj-lt" pitchFamily="34" charset="-122"/>
@@ -9456,7 +9456,7 @@
             <a:r>
               <a:rPr lang="en-US" sz="1400" dirty="0">
                 <a:solidFill>
-                  <a:schemeClr val="tx1"/>
+                  <a:srgbClr val="1B2430"/>
                 </a:solidFill>
               </a:rPr>
               <a:t>Fixed effects β and random effects b for repeated measures; longitudinal biomarkers.</a:t>
@@ -9476,17 +9476,17 @@
             <a:off x="548640" y="4023360"/>
             <a:ext cx="5394960" cy="2240280"/>
           </a:xfrm>
-          <a:prstGeom prst="roundRect">
+          <a:prstGeom prst="rect">
             <a:avLst>
               <a:gd name="adj" fmla="val 3265"/>
             </a:avLst>
           </a:prstGeom>
           <a:solidFill>
-            <a:schemeClr val="bg2"/>
+            <a:srgbClr val="EEF4F5"/>
           </a:solidFill>
           <a:ln w="12700">
             <a:solidFill>
-              <a:schemeClr val="bg2"/>
+              <a:srgbClr val="EEF4F5"/>
             </a:solidFill>
             <a:prstDash val="solid"/>
           </a:ln>
@@ -9519,7 +9519,7 @@
             <a:r>
               <a:rPr lang="en-US" sz="1600" b="1" dirty="0">
                 <a:solidFill>
-                  <a:schemeClr val="tx2"/>
+                  <a:srgbClr val="0B3C49"/>
                 </a:solidFill>
               </a:rPr>
               <a:t>Generalised linear models</a:t>
@@ -9543,7 +9543,7 @@
             <a:avLst/>
           </a:prstGeom>
           <a:solidFill>
-            <a:schemeClr val="bg1"/>
+            <a:srgbClr val="FFFFFF"/>
           </a:solidFill>
           <a:ln/>
         </p:spPr>
@@ -9557,7 +9557,7 @@
             <a:r>
               <a:rPr lang="en-US" sz="1600" dirty="0">
                 <a:solidFill>
-                  <a:schemeClr val="accent4"/>
+                  <a:srgbClr val="264653"/>
                 </a:solidFill>
                 <a:latin typeface="+mj-lt" pitchFamily="34" charset="0"/>
                 <a:ea typeface="+mj-lt" pitchFamily="34" charset="-122"/>
@@ -9574,7 +9574,7 @@
             <a:r>
               <a:rPr lang="en-US" sz="1600" dirty="0">
                 <a:solidFill>
-                  <a:schemeClr val="accent4"/>
+                  <a:srgbClr val="264653"/>
                 </a:solidFill>
                 <a:latin typeface="+mj-lt" pitchFamily="34" charset="0"/>
                 <a:ea typeface="+mj-lt" pitchFamily="34" charset="-122"/>
@@ -9613,7 +9613,7 @@
             <a:r>
               <a:rPr lang="en-US" sz="1400" dirty="0">
                 <a:solidFill>
-                  <a:schemeClr val="tx1"/>
+                  <a:srgbClr val="1B2430"/>
                 </a:solidFill>
               </a:rPr>
               <a:t>Binary, count and rate outcomes; dose–response with logit or probit links.</a:t>
@@ -9633,17 +9633,17 @@
             <a:off x="6217920" y="4023360"/>
             <a:ext cx="5394960" cy="2240280"/>
           </a:xfrm>
-          <a:prstGeom prst="roundRect">
+          <a:prstGeom prst="rect">
             <a:avLst>
               <a:gd name="adj" fmla="val 3265"/>
             </a:avLst>
           </a:prstGeom>
           <a:solidFill>
-            <a:schemeClr val="bg2"/>
+            <a:srgbClr val="EEF4F5"/>
           </a:solidFill>
           <a:ln w="12700">
             <a:solidFill>
-              <a:schemeClr val="bg2"/>
+              <a:srgbClr val="EEF4F5"/>
             </a:solidFill>
             <a:prstDash val="solid"/>
           </a:ln>
@@ -9676,7 +9676,7 @@
             <a:r>
               <a:rPr lang="en-US" sz="1600" b="1" dirty="0">
                 <a:solidFill>
-                  <a:schemeClr val="tx2"/>
+                  <a:srgbClr val="0B3C49"/>
                 </a:solidFill>
               </a:rPr>
               <a:t>Bayesian hierarchical model</a:t>
@@ -9700,7 +9700,7 @@
             <a:avLst/>
           </a:prstGeom>
           <a:solidFill>
-            <a:schemeClr val="bg1"/>
+            <a:srgbClr val="FFFFFF"/>
           </a:solidFill>
           <a:ln/>
         </p:spPr>
@@ -9714,7 +9714,7 @@
             <a:r>
               <a:rPr lang="en-US" sz="1500" dirty="0">
                 <a:solidFill>
-                  <a:schemeClr val="accent4"/>
+                  <a:srgbClr val="264653"/>
                 </a:solidFill>
                 <a:latin typeface="+mj-lt" pitchFamily="34" charset="0"/>
                 <a:ea typeface="+mj-lt" pitchFamily="34" charset="-122"/>
@@ -9731,7 +9731,7 @@
             <a:r>
               <a:rPr lang="en-US" sz="1500" dirty="0">
                 <a:solidFill>
-                  <a:schemeClr val="accent4"/>
+                  <a:srgbClr val="264653"/>
                 </a:solidFill>
                 <a:latin typeface="+mj-lt" pitchFamily="34" charset="0"/>
                 <a:ea typeface="+mj-lt" pitchFamily="34" charset="-122"/>
@@ -9770,7 +9770,7 @@
             <a:r>
               <a:rPr lang="en-US" sz="1400" dirty="0">
                 <a:solidFill>
-                  <a:schemeClr val="tx1"/>
+                  <a:srgbClr val="1B2430"/>
                 </a:solidFill>
               </a:rPr>
               <a:t>Borrow strength across patients, sites or studies; priors encode prior knowledge.</a:t>
@@ -9809,7 +9809,7 @@
             <a:lvl1pPr>
               <a:defRPr sz="1000">
                 <a:solidFill>
-                  <a:schemeClr val="accent6"/>
+                  <a:srgbClr val="5F6B76"/>
                 </a:solidFill>
               </a:defRPr>
             </a:lvl1pPr>
@@ -9878,7 +9878,7 @@
             <a:r>
               <a:rPr lang="en-US" sz="1300" b="1" dirty="0">
                 <a:solidFill>
-                  <a:schemeClr val="accent2"/>
+                  <a:srgbClr val="1F7A70"/>
                 </a:solidFill>
               </a:rPr>
               <a:t>FAMILY 7 · TIME-TO-EVENT MODELS</a:t>
@@ -9916,7 +9916,7 @@
             <a:r>
               <a:rPr lang="en-US" sz="3600" b="1" dirty="0">
                 <a:solidFill>
-                  <a:schemeClr val="tx2"/>
+                  <a:srgbClr val="0B3C49"/>
                 </a:solidFill>
               </a:rPr>
               <a:t>Survival and event endpoints</a:t>
@@ -9936,17 +9936,17 @@
             <a:off x="548640" y="1554480"/>
             <a:ext cx="5394960" cy="2240280"/>
           </a:xfrm>
-          <a:prstGeom prst="roundRect">
+          <a:prstGeom prst="rect">
             <a:avLst>
               <a:gd name="adj" fmla="val 3265"/>
             </a:avLst>
           </a:prstGeom>
           <a:solidFill>
-            <a:schemeClr val="bg2"/>
+            <a:srgbClr val="EEF4F5"/>
           </a:solidFill>
           <a:ln w="12700">
             <a:solidFill>
-              <a:schemeClr val="bg2"/>
+              <a:srgbClr val="EEF4F5"/>
             </a:solidFill>
             <a:prstDash val="solid"/>
           </a:ln>
@@ -9979,7 +9979,7 @@
             <a:r>
               <a:rPr lang="en-US" sz="1600" b="1" dirty="0">
                 <a:solidFill>
-                  <a:schemeClr val="tx2"/>
+                  <a:srgbClr val="0B3C49"/>
                 </a:solidFill>
               </a:rPr>
               <a:t>Kaplan–Meier estimator</a:t>
@@ -10003,7 +10003,7 @@
             <a:avLst/>
           </a:prstGeom>
           <a:solidFill>
-            <a:schemeClr val="bg1"/>
+            <a:srgbClr val="FFFFFF"/>
           </a:solidFill>
           <a:ln/>
         </p:spPr>
@@ -10017,7 +10017,7 @@
             <a:r>
               <a:rPr lang="en-US" sz="1600" dirty="0">
                 <a:solidFill>
-                  <a:schemeClr val="accent4"/>
+                  <a:srgbClr val="264653"/>
                 </a:solidFill>
                 <a:latin typeface="+mj-lt" pitchFamily="34" charset="0"/>
                 <a:ea typeface="+mj-lt" pitchFamily="34" charset="-122"/>
@@ -10056,7 +10056,7 @@
             <a:r>
               <a:rPr lang="en-US" sz="1400" dirty="0">
                 <a:solidFill>
-                  <a:schemeClr val="tx1"/>
+                  <a:srgbClr val="1B2430"/>
                 </a:solidFill>
               </a:rPr>
               <a:t>Non-parametric survival with censoring; dᵢ events among nᵢ at risk. Compared with the log-rank test.</a:t>
@@ -10076,17 +10076,17 @@
             <a:off x="6217920" y="1554480"/>
             <a:ext cx="5394960" cy="2240280"/>
           </a:xfrm>
-          <a:prstGeom prst="roundRect">
+          <a:prstGeom prst="rect">
             <a:avLst>
               <a:gd name="adj" fmla="val 3265"/>
             </a:avLst>
           </a:prstGeom>
           <a:solidFill>
-            <a:schemeClr val="bg2"/>
+            <a:srgbClr val="EEF4F5"/>
           </a:solidFill>
           <a:ln w="12700">
             <a:solidFill>
-              <a:schemeClr val="bg2"/>
+              <a:srgbClr val="EEF4F5"/>
             </a:solidFill>
             <a:prstDash val="solid"/>
           </a:ln>
@@ -10119,7 +10119,7 @@
             <a:r>
               <a:rPr lang="en-US" sz="1600" b="1" dirty="0">
                 <a:solidFill>
-                  <a:schemeClr val="tx2"/>
+                  <a:srgbClr val="0B3C49"/>
                 </a:solidFill>
               </a:rPr>
               <a:t>Cox proportional hazards</a:t>
@@ -10143,7 +10143,7 @@
             <a:avLst/>
           </a:prstGeom>
           <a:solidFill>
-            <a:schemeClr val="bg1"/>
+            <a:srgbClr val="FFFFFF"/>
           </a:solidFill>
           <a:ln/>
         </p:spPr>
@@ -10157,7 +10157,7 @@
             <a:r>
               <a:rPr lang="en-US" sz="1600" dirty="0">
                 <a:solidFill>
-                  <a:schemeClr val="accent4"/>
+                  <a:srgbClr val="264653"/>
                 </a:solidFill>
                 <a:latin typeface="+mj-lt" pitchFamily="34" charset="0"/>
                 <a:ea typeface="+mj-lt" pitchFamily="34" charset="-122"/>
@@ -10196,7 +10196,7 @@
             <a:r>
               <a:rPr lang="en-US" sz="1400" dirty="0">
                 <a:solidFill>
-                  <a:schemeClr val="tx1"/>
+                  <a:srgbClr val="1B2430"/>
                 </a:solidFill>
               </a:rPr>
               <a:t>Covariate effects as hazard ratios without specifying h₀; check proportional hazards.</a:t>
@@ -10216,17 +10216,17 @@
             <a:off x="548640" y="4023360"/>
             <a:ext cx="5394960" cy="2240280"/>
           </a:xfrm>
-          <a:prstGeom prst="roundRect">
+          <a:prstGeom prst="rect">
             <a:avLst>
               <a:gd name="adj" fmla="val 3265"/>
             </a:avLst>
           </a:prstGeom>
           <a:solidFill>
-            <a:schemeClr val="bg2"/>
+            <a:srgbClr val="EEF4F5"/>
           </a:solidFill>
           <a:ln w="12700">
             <a:solidFill>
-              <a:schemeClr val="bg2"/>
+              <a:srgbClr val="EEF4F5"/>
             </a:solidFill>
             <a:prstDash val="solid"/>
           </a:ln>
@@ -10259,7 +10259,7 @@
             <a:r>
               <a:rPr lang="en-US" sz="1600" b="1" dirty="0">
                 <a:solidFill>
-                  <a:schemeClr val="tx2"/>
+                  <a:srgbClr val="0B3C49"/>
                 </a:solidFill>
               </a:rPr>
               <a:t>Parametric survival (Weibull, AFT)</a:t>
@@ -10283,7 +10283,7 @@
             <a:avLst/>
           </a:prstGeom>
           <a:solidFill>
-            <a:schemeClr val="bg1"/>
+            <a:srgbClr val="FFFFFF"/>
           </a:solidFill>
           <a:ln/>
         </p:spPr>
@@ -10297,7 +10297,7 @@
             <a:r>
               <a:rPr lang="en-US" sz="1600" dirty="0">
                 <a:solidFill>
-                  <a:schemeClr val="accent4"/>
+                  <a:srgbClr val="264653"/>
                 </a:solidFill>
                 <a:latin typeface="+mj-lt" pitchFamily="34" charset="0"/>
                 <a:ea typeface="+mj-lt" pitchFamily="34" charset="-122"/>
@@ -10314,7 +10314,7 @@
             <a:r>
               <a:rPr lang="en-US" sz="1600" dirty="0">
                 <a:solidFill>
-                  <a:schemeClr val="accent4"/>
+                  <a:srgbClr val="264653"/>
                 </a:solidFill>
                 <a:latin typeface="+mj-lt" pitchFamily="34" charset="0"/>
                 <a:ea typeface="+mj-lt" pitchFamily="34" charset="-122"/>
@@ -10353,7 +10353,7 @@
             <a:r>
               <a:rPr lang="en-US" sz="1400" dirty="0">
                 <a:solidFill>
-                  <a:schemeClr val="tx1"/>
+                  <a:srgbClr val="1B2430"/>
                 </a:solidFill>
               </a:rPr>
               <a:t>Needed to extrapolate beyond follow-up and to simulate event times in virtual trials.</a:t>
@@ -10373,17 +10373,17 @@
             <a:off x="6217920" y="4023360"/>
             <a:ext cx="5394960" cy="2240280"/>
           </a:xfrm>
-          <a:prstGeom prst="roundRect">
+          <a:prstGeom prst="rect">
             <a:avLst>
               <a:gd name="adj" fmla="val 3265"/>
             </a:avLst>
           </a:prstGeom>
           <a:solidFill>
-            <a:schemeClr val="bg2"/>
+            <a:srgbClr val="EEF4F5"/>
           </a:solidFill>
           <a:ln w="12700">
             <a:solidFill>
-              <a:schemeClr val="bg2"/>
+              <a:srgbClr val="EEF4F5"/>
             </a:solidFill>
             <a:prstDash val="solid"/>
           </a:ln>
@@ -10416,7 +10416,7 @@
             <a:r>
               <a:rPr lang="en-US" sz="1600" b="1" dirty="0">
                 <a:solidFill>
-                  <a:schemeClr val="tx2"/>
+                  <a:srgbClr val="0B3C49"/>
                 </a:solidFill>
               </a:rPr>
               <a:t>Joint longitudinal–survival model</a:t>
@@ -10440,7 +10440,7 @@
             <a:avLst/>
           </a:prstGeom>
           <a:solidFill>
-            <a:schemeClr val="bg1"/>
+            <a:srgbClr val="FFFFFF"/>
           </a:solidFill>
           <a:ln/>
         </p:spPr>
@@ -10454,7 +10454,7 @@
             <a:r>
               <a:rPr lang="en-US" sz="1500" dirty="0">
                 <a:solidFill>
-                  <a:schemeClr val="accent4"/>
+                  <a:srgbClr val="264653"/>
                 </a:solidFill>
                 <a:latin typeface="+mj-lt" pitchFamily="34" charset="0"/>
                 <a:ea typeface="+mj-lt" pitchFamily="34" charset="-122"/>
@@ -10493,7 +10493,7 @@
             <a:r>
               <a:rPr lang="en-US" sz="1400" dirty="0">
                 <a:solidFill>
-                  <a:schemeClr val="tx1"/>
+                  <a:srgbClr val="1B2430"/>
                 </a:solidFill>
               </a:rPr>
               <a:t>Links a biomarker trajectory mᵢ(t) to event risk; dynamic individual predictions for twins.</a:t>
@@ -10532,7 +10532,7 @@
             <a:lvl1pPr>
               <a:defRPr sz="1000">
                 <a:solidFill>
-                  <a:schemeClr val="accent6"/>
+                  <a:srgbClr val="5F6B76"/>
                 </a:solidFill>
               </a:defRPr>
             </a:lvl1pPr>
@@ -10601,7 +10601,7 @@
             <a:r>
               <a:rPr lang="en-US" sz="1300" b="1" dirty="0">
                 <a:solidFill>
-                  <a:schemeClr val="accent2"/>
+                  <a:srgbClr val="1F7A70"/>
                 </a:solidFill>
               </a:rPr>
               <a:t>FAMILY 8 · DATA ASSIMILATION</a:t>
@@ -10639,7 +10639,7 @@
             <a:r>
               <a:rPr lang="en-US" sz="3600" b="1" dirty="0">
                 <a:solidFill>
-                  <a:schemeClr val="tx2"/>
+                  <a:srgbClr val="0B3C49"/>
                 </a:solidFill>
               </a:rPr>
               <a:t>Keeping the twin synchronised with reality</a:t>
@@ -10659,17 +10659,17 @@
             <a:off x="548640" y="1554480"/>
             <a:ext cx="5394960" cy="2240280"/>
           </a:xfrm>
-          <a:prstGeom prst="roundRect">
+          <a:prstGeom prst="rect">
             <a:avLst>
               <a:gd name="adj" fmla="val 3265"/>
             </a:avLst>
           </a:prstGeom>
           <a:solidFill>
-            <a:schemeClr val="bg2"/>
+            <a:srgbClr val="EEF4F5"/>
           </a:solidFill>
           <a:ln w="12700">
             <a:solidFill>
-              <a:schemeClr val="bg2"/>
+              <a:srgbClr val="EEF4F5"/>
             </a:solidFill>
             <a:prstDash val="solid"/>
           </a:ln>
@@ -10702,7 +10702,7 @@
             <a:r>
               <a:rPr lang="en-US" sz="1600" b="1" dirty="0">
                 <a:solidFill>
-                  <a:schemeClr val="tx2"/>
+                  <a:srgbClr val="0B3C49"/>
                 </a:solidFill>
               </a:rPr>
               <a:t>Kalman filter (linear Gaussian)</a:t>
@@ -10726,7 +10726,7 @@
             <a:avLst/>
           </a:prstGeom>
           <a:solidFill>
-            <a:schemeClr val="bg1"/>
+            <a:srgbClr val="FFFFFF"/>
           </a:solidFill>
           <a:ln/>
         </p:spPr>
@@ -10740,7 +10740,7 @@
             <a:r>
               <a:rPr lang="en-US" sz="1400" dirty="0">
                 <a:solidFill>
-                  <a:schemeClr val="accent4"/>
+                  <a:srgbClr val="264653"/>
                 </a:solidFill>
                 <a:latin typeface="+mj-lt" pitchFamily="34" charset="0"/>
                 <a:ea typeface="+mj-lt" pitchFamily="34" charset="-122"/>
@@ -10757,7 +10757,7 @@
             <a:r>
               <a:rPr lang="en-US" sz="1400" dirty="0">
                 <a:solidFill>
-                  <a:schemeClr val="accent4"/>
+                  <a:srgbClr val="264653"/>
                 </a:solidFill>
                 <a:latin typeface="+mj-lt" pitchFamily="34" charset="0"/>
                 <a:ea typeface="+mj-lt" pitchFamily="34" charset="-122"/>
@@ -10796,7 +10796,7 @@
             <a:r>
               <a:rPr lang="en-US" sz="1400" dirty="0">
                 <a:solidFill>
-                  <a:schemeClr val="tx1"/>
+                  <a:srgbClr val="1B2430"/>
                 </a:solidFill>
               </a:rPr>
               <a:t>Optimal state estimate; gain K weighs model against measurement uncertainty.</a:t>
@@ -10816,17 +10816,17 @@
             <a:off x="6217920" y="1554480"/>
             <a:ext cx="5394960" cy="2240280"/>
           </a:xfrm>
-          <a:prstGeom prst="roundRect">
+          <a:prstGeom prst="rect">
             <a:avLst>
               <a:gd name="adj" fmla="val 3265"/>
             </a:avLst>
           </a:prstGeom>
           <a:solidFill>
-            <a:schemeClr val="bg2"/>
+            <a:srgbClr val="EEF4F5"/>
           </a:solidFill>
           <a:ln w="12700">
             <a:solidFill>
-              <a:schemeClr val="bg2"/>
+              <a:srgbClr val="EEF4F5"/>
             </a:solidFill>
             <a:prstDash val="solid"/>
           </a:ln>
@@ -10859,7 +10859,7 @@
             <a:r>
               <a:rPr lang="en-US" sz="1600" b="1" dirty="0">
                 <a:solidFill>
-                  <a:schemeClr val="tx2"/>
+                  <a:srgbClr val="0B3C49"/>
                 </a:solidFill>
               </a:rPr>
               <a:t>Extended / unscented / ensemble KF</a:t>
@@ -10883,7 +10883,7 @@
             <a:avLst/>
           </a:prstGeom>
           <a:solidFill>
-            <a:schemeClr val="bg1"/>
+            <a:srgbClr val="FFFFFF"/>
           </a:solidFill>
           <a:ln/>
         </p:spPr>
@@ -10897,7 +10897,7 @@
             <a:r>
               <a:rPr lang="en-US" sz="1500" dirty="0">
                 <a:solidFill>
-                  <a:schemeClr val="accent4"/>
+                  <a:srgbClr val="264653"/>
                 </a:solidFill>
                 <a:latin typeface="+mj-lt" pitchFamily="34" charset="0"/>
                 <a:ea typeface="+mj-lt" pitchFamily="34" charset="-122"/>
@@ -10914,7 +10914,7 @@
             <a:r>
               <a:rPr lang="en-US" sz="1500" dirty="0">
                 <a:solidFill>
-                  <a:schemeClr val="accent4"/>
+                  <a:srgbClr val="264653"/>
                 </a:solidFill>
                 <a:latin typeface="+mj-lt" pitchFamily="34" charset="0"/>
                 <a:ea typeface="+mj-lt" pitchFamily="34" charset="-122"/>
@@ -10953,7 +10953,7 @@
             <a:r>
               <a:rPr lang="en-US" sz="1400" dirty="0">
                 <a:solidFill>
-                  <a:schemeClr val="tx1"/>
+                  <a:srgbClr val="1B2430"/>
                 </a:solidFill>
               </a:rPr>
               <a:t>Nonlinear and high-dimensional systems; also estimates parameters by augmenting the state.</a:t>
@@ -10973,17 +10973,17 @@
             <a:off x="548640" y="4023360"/>
             <a:ext cx="5394960" cy="2240280"/>
           </a:xfrm>
-          <a:prstGeom prst="roundRect">
+          <a:prstGeom prst="rect">
             <a:avLst>
               <a:gd name="adj" fmla="val 3265"/>
             </a:avLst>
           </a:prstGeom>
           <a:solidFill>
-            <a:schemeClr val="bg2"/>
+            <a:srgbClr val="EEF4F5"/>
           </a:solidFill>
           <a:ln w="12700">
             <a:solidFill>
-              <a:schemeClr val="bg2"/>
+              <a:srgbClr val="EEF4F5"/>
             </a:solidFill>
             <a:prstDash val="solid"/>
           </a:ln>
@@ -11016,7 +11016,7 @@
             <a:r>
               <a:rPr lang="en-US" sz="1600" b="1" dirty="0">
                 <a:solidFill>
-                  <a:schemeClr val="tx2"/>
+                  <a:srgbClr val="0B3C49"/>
                 </a:solidFill>
               </a:rPr>
               <a:t>Particle filter</a:t>
@@ -11040,7 +11040,7 @@
             <a:avLst/>
           </a:prstGeom>
           <a:solidFill>
-            <a:schemeClr val="bg1"/>
+            <a:srgbClr val="FFFFFF"/>
           </a:solidFill>
           <a:ln/>
         </p:spPr>
@@ -11054,7 +11054,7 @@
             <a:r>
               <a:rPr lang="en-US" sz="1400" dirty="0">
                 <a:solidFill>
-                  <a:schemeClr val="accent4"/>
+                  <a:srgbClr val="264653"/>
                 </a:solidFill>
                 <a:latin typeface="+mj-lt" pitchFamily="34" charset="0"/>
                 <a:ea typeface="+mj-lt" pitchFamily="34" charset="-122"/>
@@ -11071,7 +11071,7 @@
             <a:r>
               <a:rPr lang="en-US" sz="1400" dirty="0">
                 <a:solidFill>
-                  <a:schemeClr val="accent4"/>
+                  <a:srgbClr val="264653"/>
                 </a:solidFill>
                 <a:latin typeface="+mj-lt" pitchFamily="34" charset="0"/>
                 <a:ea typeface="+mj-lt" pitchFamily="34" charset="-122"/>
@@ -11110,7 +11110,7 @@
             <a:r>
               <a:rPr lang="en-US" sz="1400" dirty="0">
                 <a:solidFill>
-                  <a:schemeClr val="tx1"/>
+                  <a:srgbClr val="1B2430"/>
                 </a:solidFill>
               </a:rPr>
               <a:t>Sequential Monte Carlo; any nonlinearity or noise distribution.</a:t>
@@ -11130,17 +11130,17 @@
             <a:off x="6217920" y="4023360"/>
             <a:ext cx="5394960" cy="2240280"/>
           </a:xfrm>
-          <a:prstGeom prst="roundRect">
+          <a:prstGeom prst="rect">
             <a:avLst>
               <a:gd name="adj" fmla="val 3265"/>
             </a:avLst>
           </a:prstGeom>
           <a:solidFill>
-            <a:schemeClr val="bg2"/>
+            <a:srgbClr val="EEF4F5"/>
           </a:solidFill>
           <a:ln w="12700">
             <a:solidFill>
-              <a:schemeClr val="bg2"/>
+              <a:srgbClr val="EEF4F5"/>
             </a:solidFill>
             <a:prstDash val="solid"/>
           </a:ln>
@@ -11173,7 +11173,7 @@
             <a:r>
               <a:rPr lang="en-US" sz="1600" b="1" dirty="0">
                 <a:solidFill>
-                  <a:schemeClr val="tx2"/>
+                  <a:srgbClr val="0B3C49"/>
                 </a:solidFill>
               </a:rPr>
               <a:t>Variational assimilation (4D-Var)</a:t>
@@ -11197,7 +11197,7 @@
             <a:avLst/>
           </a:prstGeom>
           <a:solidFill>
-            <a:schemeClr val="bg1"/>
+            <a:srgbClr val="FFFFFF"/>
           </a:solidFill>
           <a:ln/>
         </p:spPr>
@@ -11211,7 +11211,7 @@
             <a:r>
               <a:rPr lang="en-US" sz="1400" dirty="0">
                 <a:solidFill>
-                  <a:schemeClr val="accent4"/>
+                  <a:srgbClr val="264653"/>
                 </a:solidFill>
                 <a:latin typeface="+mj-lt" pitchFamily="34" charset="0"/>
                 <a:ea typeface="+mj-lt" pitchFamily="34" charset="-122"/>
@@ -11250,7 +11250,7 @@
             <a:r>
               <a:rPr lang="en-US" sz="1400" dirty="0">
                 <a:solidFill>
-                  <a:schemeClr val="tx1"/>
+                  <a:srgbClr val="1B2430"/>
                 </a:solidFill>
               </a:rPr>
               <a:t>Fit the initial state over a time window by optimisation with adjoints; weather-forecast heritage.</a:t>
@@ -11289,7 +11289,7 @@
             <a:lvl1pPr>
               <a:defRPr sz="1000">
                 <a:solidFill>
-                  <a:schemeClr val="accent6"/>
+                  <a:srgbClr val="5F6B76"/>
                 </a:solidFill>
               </a:defRPr>
             </a:lvl1pPr>
@@ -11358,7 +11358,7 @@
             <a:r>
               <a:rPr lang="en-US" sz="1300" b="1" dirty="0">
                 <a:solidFill>
-                  <a:schemeClr val="accent2"/>
+                  <a:srgbClr val="1F7A70"/>
                 </a:solidFill>
               </a:rPr>
               <a:t>FAMILY 8 · CALIBRATION AND IDENTIFIABILITY</a:t>
@@ -11396,7 +11396,7 @@
             <a:r>
               <a:rPr lang="en-US" sz="3600" b="1" dirty="0">
                 <a:solidFill>
-                  <a:schemeClr val="tx2"/>
+                  <a:srgbClr val="0B3C49"/>
                 </a:solidFill>
               </a:rPr>
               <a:t>Estimating parameters, and knowing when you can</a:t>
@@ -11416,17 +11416,17 @@
             <a:off x="548640" y="1554480"/>
             <a:ext cx="5394960" cy="2240280"/>
           </a:xfrm>
-          <a:prstGeom prst="roundRect">
+          <a:prstGeom prst="rect">
             <a:avLst>
               <a:gd name="adj" fmla="val 3265"/>
             </a:avLst>
           </a:prstGeom>
           <a:solidFill>
-            <a:schemeClr val="bg2"/>
+            <a:srgbClr val="EEF4F5"/>
           </a:solidFill>
           <a:ln w="12700">
             <a:solidFill>
-              <a:schemeClr val="bg2"/>
+              <a:srgbClr val="EEF4F5"/>
             </a:solidFill>
             <a:prstDash val="solid"/>
           </a:ln>
@@ -11459,7 +11459,7 @@
             <a:r>
               <a:rPr lang="en-US" sz="1600" b="1" dirty="0">
                 <a:solidFill>
-                  <a:schemeClr val="tx2"/>
+                  <a:srgbClr val="0B3C49"/>
                 </a:solidFill>
               </a:rPr>
               <a:t>Least squares and likelihood</a:t>
@@ -11483,7 +11483,7 @@
             <a:avLst/>
           </a:prstGeom>
           <a:solidFill>
-            <a:schemeClr val="bg1"/>
+            <a:srgbClr val="FFFFFF"/>
           </a:solidFill>
           <a:ln/>
         </p:spPr>
@@ -11497,7 +11497,7 @@
             <a:r>
               <a:rPr lang="en-US" sz="1600" dirty="0">
                 <a:solidFill>
-                  <a:schemeClr val="accent4"/>
+                  <a:srgbClr val="264653"/>
                 </a:solidFill>
                 <a:latin typeface="+mj-lt" pitchFamily="34" charset="0"/>
                 <a:ea typeface="+mj-lt" pitchFamily="34" charset="-122"/>
@@ -11514,7 +11514,7 @@
             <a:r>
               <a:rPr lang="en-US" sz="1600" dirty="0">
                 <a:solidFill>
-                  <a:schemeClr val="accent4"/>
+                  <a:srgbClr val="264653"/>
                 </a:solidFill>
                 <a:latin typeface="+mj-lt" pitchFamily="34" charset="0"/>
                 <a:ea typeface="+mj-lt" pitchFamily="34" charset="-122"/>
@@ -11553,7 +11553,7 @@
             <a:r>
               <a:rPr lang="en-US" sz="1400" dirty="0">
                 <a:solidFill>
-                  <a:schemeClr val="tx1"/>
+                  <a:srgbClr val="1B2430"/>
                 </a:solidFill>
               </a:rPr>
               <a:t>Standard fitting; weighted least squares equals MLE for Gaussian noise.</a:t>
@@ -11573,17 +11573,17 @@
             <a:off x="6217920" y="1554480"/>
             <a:ext cx="5394960" cy="2240280"/>
           </a:xfrm>
-          <a:prstGeom prst="roundRect">
+          <a:prstGeom prst="rect">
             <a:avLst>
               <a:gd name="adj" fmla="val 3265"/>
             </a:avLst>
           </a:prstGeom>
           <a:solidFill>
-            <a:schemeClr val="bg2"/>
+            <a:srgbClr val="EEF4F5"/>
           </a:solidFill>
           <a:ln w="12700">
             <a:solidFill>
-              <a:schemeClr val="bg2"/>
+              <a:srgbClr val="EEF4F5"/>
             </a:solidFill>
             <a:prstDash val="solid"/>
           </a:ln>
@@ -11616,7 +11616,7 @@
             <a:r>
               <a:rPr lang="en-US" sz="1600" b="1" dirty="0">
                 <a:solidFill>
-                  <a:schemeClr val="tx2"/>
+                  <a:srgbClr val="0B3C49"/>
                 </a:solidFill>
               </a:rPr>
               <a:t>Bayesian inference (MCMC)</a:t>
@@ -11640,7 +11640,7 @@
             <a:avLst/>
           </a:prstGeom>
           <a:solidFill>
-            <a:schemeClr val="bg1"/>
+            <a:srgbClr val="FFFFFF"/>
           </a:solidFill>
           <a:ln/>
         </p:spPr>
@@ -11654,7 +11654,7 @@
             <a:r>
               <a:rPr lang="en-US" sz="1500" dirty="0">
                 <a:solidFill>
-                  <a:schemeClr val="accent4"/>
+                  <a:srgbClr val="264653"/>
                 </a:solidFill>
                 <a:latin typeface="+mj-lt" pitchFamily="34" charset="0"/>
                 <a:ea typeface="+mj-lt" pitchFamily="34" charset="-122"/>
@@ -11671,7 +11671,7 @@
             <a:r>
               <a:rPr lang="en-US" sz="1500" dirty="0">
                 <a:solidFill>
-                  <a:schemeClr val="accent4"/>
+                  <a:srgbClr val="264653"/>
                 </a:solidFill>
                 <a:latin typeface="+mj-lt" pitchFamily="34" charset="0"/>
                 <a:ea typeface="+mj-lt" pitchFamily="34" charset="-122"/>
@@ -11710,7 +11710,7 @@
             <a:r>
               <a:rPr lang="en-US" sz="1400" dirty="0">
                 <a:solidFill>
-                  <a:schemeClr val="tx1"/>
+                  <a:srgbClr val="1B2430"/>
                 </a:solidFill>
               </a:rPr>
               <a:t>Full posterior for parameters and predictions; Hamiltonian MC (Stan) for many parameters.</a:t>
@@ -11730,17 +11730,17 @@
             <a:off x="548640" y="4023360"/>
             <a:ext cx="5394960" cy="2240280"/>
           </a:xfrm>
-          <a:prstGeom prst="roundRect">
+          <a:prstGeom prst="rect">
             <a:avLst>
               <a:gd name="adj" fmla="val 3265"/>
             </a:avLst>
           </a:prstGeom>
           <a:solidFill>
-            <a:schemeClr val="bg2"/>
+            <a:srgbClr val="EEF4F5"/>
           </a:solidFill>
           <a:ln w="12700">
             <a:solidFill>
-              <a:schemeClr val="bg2"/>
+              <a:srgbClr val="EEF4F5"/>
             </a:solidFill>
             <a:prstDash val="solid"/>
           </a:ln>
@@ -11773,7 +11773,7 @@
             <a:r>
               <a:rPr lang="en-US" sz="1600" b="1" dirty="0">
                 <a:solidFill>
-                  <a:schemeClr val="tx2"/>
+                  <a:srgbClr val="0B3C49"/>
                 </a:solidFill>
               </a:rPr>
               <a:t>Fisher information, Cramér–Rao</a:t>
@@ -11797,7 +11797,7 @@
             <a:avLst/>
           </a:prstGeom>
           <a:solidFill>
-            <a:schemeClr val="bg1"/>
+            <a:srgbClr val="FFFFFF"/>
           </a:solidFill>
           <a:ln/>
         </p:spPr>
@@ -11811,7 +11811,7 @@
             <a:r>
               <a:rPr lang="en-US" sz="1600" dirty="0">
                 <a:solidFill>
-                  <a:schemeClr val="accent4"/>
+                  <a:srgbClr val="264653"/>
                 </a:solidFill>
                 <a:latin typeface="+mj-lt" pitchFamily="34" charset="0"/>
                 <a:ea typeface="+mj-lt" pitchFamily="34" charset="-122"/>
@@ -11828,7 +11828,7 @@
             <a:r>
               <a:rPr lang="en-US" sz="1600" dirty="0">
                 <a:solidFill>
-                  <a:schemeClr val="accent4"/>
+                  <a:srgbClr val="264653"/>
                 </a:solidFill>
                 <a:latin typeface="+mj-lt" pitchFamily="34" charset="0"/>
                 <a:ea typeface="+mj-lt" pitchFamily="34" charset="-122"/>
@@ -11867,7 +11867,7 @@
             <a:r>
               <a:rPr lang="en-US" sz="1400" dirty="0">
                 <a:solidFill>
-                  <a:schemeClr val="tx1"/>
+                  <a:srgbClr val="1B2430"/>
                 </a:solidFill>
               </a:rPr>
               <a:t>Practical identifiability and optimal experimental design (D-optimal: maximise det FIM).</a:t>
@@ -11887,17 +11887,17 @@
             <a:off x="6217920" y="4023360"/>
             <a:ext cx="5394960" cy="2240280"/>
           </a:xfrm>
-          <a:prstGeom prst="roundRect">
+          <a:prstGeom prst="rect">
             <a:avLst>
               <a:gd name="adj" fmla="val 3265"/>
             </a:avLst>
           </a:prstGeom>
           <a:solidFill>
-            <a:schemeClr val="bg2"/>
+            <a:srgbClr val="EEF4F5"/>
           </a:solidFill>
           <a:ln w="12700">
             <a:solidFill>
-              <a:schemeClr val="bg2"/>
+              <a:srgbClr val="EEF4F5"/>
             </a:solidFill>
             <a:prstDash val="solid"/>
           </a:ln>
@@ -11930,7 +11930,7 @@
             <a:r>
               <a:rPr lang="en-US" sz="1600" b="1" dirty="0">
                 <a:solidFill>
-                  <a:schemeClr val="tx2"/>
+                  <a:srgbClr val="0B3C49"/>
                 </a:solidFill>
               </a:rPr>
               <a:t>Approximate Bayesian computation</a:t>
@@ -11954,7 +11954,7 @@
             <a:avLst/>
           </a:prstGeom>
           <a:solidFill>
-            <a:schemeClr val="bg1"/>
+            <a:srgbClr val="FFFFFF"/>
           </a:solidFill>
           <a:ln/>
         </p:spPr>
@@ -11968,7 +11968,7 @@
             <a:r>
               <a:rPr lang="en-US" sz="1600" dirty="0">
                 <a:solidFill>
-                  <a:schemeClr val="accent4"/>
+                  <a:srgbClr val="264653"/>
                 </a:solidFill>
                 <a:latin typeface="+mj-lt" pitchFamily="34" charset="0"/>
                 <a:ea typeface="+mj-lt" pitchFamily="34" charset="-122"/>
@@ -12007,7 +12007,7 @@
             <a:r>
               <a:rPr lang="en-US" sz="1400" dirty="0">
                 <a:solidFill>
-                  <a:schemeClr val="tx1"/>
+                  <a:srgbClr val="1B2430"/>
                 </a:solidFill>
               </a:rPr>
               <a:t>Likelihood-free calibration with summary statistics s; for agent-based and stochastic models.</a:t>
@@ -12046,7 +12046,7 @@
             <a:lvl1pPr>
               <a:defRPr sz="1000">
                 <a:solidFill>
-                  <a:schemeClr val="accent6"/>
+                  <a:srgbClr val="5F6B76"/>
                 </a:solidFill>
               </a:defRPr>
             </a:lvl1pPr>
@@ -12115,7 +12115,7 @@
             <a:r>
               <a:rPr lang="en-US" sz="1300" b="1" dirty="0">
                 <a:solidFill>
-                  <a:schemeClr val="accent2"/>
+                  <a:srgbClr val="1F7A70"/>
                 </a:solidFill>
               </a:rPr>
               <a:t>FAMILY 9 · UNCERTAINTY QUANTIFICATION</a:t>
@@ -12153,7 +12153,7 @@
             <a:r>
               <a:rPr lang="en-US" sz="3600" b="1" dirty="0">
                 <a:solidFill>
-                  <a:schemeClr val="tx2"/>
+                  <a:srgbClr val="0B3C49"/>
                 </a:solidFill>
               </a:rPr>
               <a:t>Propagating what we do not know</a:t>
@@ -12173,17 +12173,17 @@
             <a:off x="548640" y="1554480"/>
             <a:ext cx="5394960" cy="2240280"/>
           </a:xfrm>
-          <a:prstGeom prst="roundRect">
+          <a:prstGeom prst="rect">
             <a:avLst>
               <a:gd name="adj" fmla="val 3265"/>
             </a:avLst>
           </a:prstGeom>
           <a:solidFill>
-            <a:schemeClr val="bg2"/>
+            <a:srgbClr val="EEF4F5"/>
           </a:solidFill>
           <a:ln w="12700">
             <a:solidFill>
-              <a:schemeClr val="bg2"/>
+              <a:srgbClr val="EEF4F5"/>
             </a:solidFill>
             <a:prstDash val="solid"/>
           </a:ln>
@@ -12216,7 +12216,7 @@
             <a:r>
               <a:rPr lang="en-US" sz="1600" b="1" dirty="0">
                 <a:solidFill>
-                  <a:schemeClr val="tx2"/>
+                  <a:srgbClr val="0B3C49"/>
                 </a:solidFill>
               </a:rPr>
               <a:t>Monte Carlo propagation</a:t>
@@ -12240,7 +12240,7 @@
             <a:avLst/>
           </a:prstGeom>
           <a:solidFill>
-            <a:schemeClr val="bg1"/>
+            <a:srgbClr val="FFFFFF"/>
           </a:solidFill>
           <a:ln/>
         </p:spPr>
@@ -12254,7 +12254,7 @@
             <a:r>
               <a:rPr lang="en-US" sz="1600" dirty="0">
                 <a:solidFill>
-                  <a:schemeClr val="accent4"/>
+                  <a:srgbClr val="264653"/>
                 </a:solidFill>
                 <a:latin typeface="+mj-lt" pitchFamily="34" charset="0"/>
                 <a:ea typeface="+mj-lt" pitchFamily="34" charset="-122"/>
@@ -12271,7 +12271,7 @@
             <a:r>
               <a:rPr lang="en-US" sz="1600" dirty="0">
                 <a:solidFill>
-                  <a:schemeClr val="accent4"/>
+                  <a:srgbClr val="264653"/>
                 </a:solidFill>
                 <a:latin typeface="+mj-lt" pitchFamily="34" charset="0"/>
                 <a:ea typeface="+mj-lt" pitchFamily="34" charset="-122"/>
@@ -12310,7 +12310,7 @@
             <a:r>
               <a:rPr lang="en-US" sz="1400" dirty="0">
                 <a:solidFill>
-                  <a:schemeClr val="tx1"/>
+                  <a:srgbClr val="1B2430"/>
                 </a:solidFill>
               </a:rPr>
               <a:t>Simple and general; Latin hypercube sampling reduces variance for the same N.</a:t>
@@ -12330,17 +12330,17 @@
             <a:off x="6217920" y="1554480"/>
             <a:ext cx="5394960" cy="2240280"/>
           </a:xfrm>
-          <a:prstGeom prst="roundRect">
+          <a:prstGeom prst="rect">
             <a:avLst>
               <a:gd name="adj" fmla="val 3265"/>
             </a:avLst>
           </a:prstGeom>
           <a:solidFill>
-            <a:schemeClr val="bg2"/>
+            <a:srgbClr val="EEF4F5"/>
           </a:solidFill>
           <a:ln w="12700">
             <a:solidFill>
-              <a:schemeClr val="bg2"/>
+              <a:srgbClr val="EEF4F5"/>
             </a:solidFill>
             <a:prstDash val="solid"/>
           </a:ln>
@@ -12373,7 +12373,7 @@
             <a:r>
               <a:rPr lang="en-US" sz="1600" b="1" dirty="0">
                 <a:solidFill>
-                  <a:schemeClr val="tx2"/>
+                  <a:srgbClr val="0B3C49"/>
                 </a:solidFill>
               </a:rPr>
               <a:t>Polynomial chaos expansion</a:t>
@@ -12397,7 +12397,7 @@
             <a:avLst/>
           </a:prstGeom>
           <a:solidFill>
-            <a:schemeClr val="bg1"/>
+            <a:srgbClr val="FFFFFF"/>
           </a:solidFill>
           <a:ln/>
         </p:spPr>
@@ -12411,7 +12411,7 @@
             <a:r>
               <a:rPr lang="en-US" sz="1600" dirty="0">
                 <a:solidFill>
-                  <a:schemeClr val="accent4"/>
+                  <a:srgbClr val="264653"/>
                 </a:solidFill>
                 <a:latin typeface="+mj-lt" pitchFamily="34" charset="0"/>
                 <a:ea typeface="+mj-lt" pitchFamily="34" charset="-122"/>
@@ -12450,7 +12450,7 @@
             <a:r>
               <a:rPr lang="en-US" sz="1400" dirty="0">
                 <a:solidFill>
-                  <a:schemeClr val="tx1"/>
+                  <a:srgbClr val="1B2430"/>
                 </a:solidFill>
               </a:rPr>
               <a:t>Orthogonal polynomials in random inputs ξ; mean and variance come straight from the coefficients.</a:t>
@@ -12470,17 +12470,17 @@
             <a:off x="548640" y="4023360"/>
             <a:ext cx="5394960" cy="2240280"/>
           </a:xfrm>
-          <a:prstGeom prst="roundRect">
+          <a:prstGeom prst="rect">
             <a:avLst>
               <a:gd name="adj" fmla="val 3265"/>
             </a:avLst>
           </a:prstGeom>
           <a:solidFill>
-            <a:schemeClr val="bg2"/>
+            <a:srgbClr val="EEF4F5"/>
           </a:solidFill>
           <a:ln w="12700">
             <a:solidFill>
-              <a:schemeClr val="bg2"/>
+              <a:srgbClr val="EEF4F5"/>
             </a:solidFill>
             <a:prstDash val="solid"/>
           </a:ln>
@@ -12513,7 +12513,7 @@
             <a:r>
               <a:rPr lang="en-US" sz="1600" b="1" dirty="0">
                 <a:solidFill>
-                  <a:schemeClr val="tx2"/>
+                  <a:srgbClr val="0B3C49"/>
                 </a:solidFill>
               </a:rPr>
               <a:t>Bayesian calibration (Kennedy–O'Hagan)</a:t>
@@ -12537,7 +12537,7 @@
             <a:avLst/>
           </a:prstGeom>
           <a:solidFill>
-            <a:schemeClr val="bg1"/>
+            <a:srgbClr val="FFFFFF"/>
           </a:solidFill>
           <a:ln/>
         </p:spPr>
@@ -12551,7 +12551,7 @@
             <a:r>
               <a:rPr lang="en-US" sz="1600" dirty="0">
                 <a:solidFill>
-                  <a:schemeClr val="accent4"/>
+                  <a:srgbClr val="264653"/>
                 </a:solidFill>
                 <a:latin typeface="+mj-lt" pitchFamily="34" charset="0"/>
                 <a:ea typeface="+mj-lt" pitchFamily="34" charset="-122"/>
@@ -12590,7 +12590,7 @@
             <a:r>
               <a:rPr lang="en-US" sz="1400" dirty="0">
                 <a:solidFill>
-                  <a:schemeClr val="tx1"/>
+                  <a:srgbClr val="1B2430"/>
                 </a:solidFill>
               </a:rPr>
               <a:t>Simulator η, model discrepancy δ (a GP) and noise ε, so the model is not assumed perfect.</a:t>
@@ -12610,17 +12610,17 @@
             <a:off x="6217920" y="4023360"/>
             <a:ext cx="5394960" cy="2240280"/>
           </a:xfrm>
-          <a:prstGeom prst="roundRect">
+          <a:prstGeom prst="rect">
             <a:avLst>
               <a:gd name="adj" fmla="val 3265"/>
             </a:avLst>
           </a:prstGeom>
           <a:solidFill>
-            <a:schemeClr val="bg2"/>
+            <a:srgbClr val="EEF4F5"/>
           </a:solidFill>
           <a:ln w="12700">
             <a:solidFill>
-              <a:schemeClr val="bg2"/>
+              <a:srgbClr val="EEF4F5"/>
             </a:solidFill>
             <a:prstDash val="solid"/>
           </a:ln>
@@ -12653,7 +12653,7 @@
             <a:r>
               <a:rPr lang="en-US" sz="1600" b="1" dirty="0">
                 <a:solidFill>
-                  <a:schemeClr val="tx2"/>
+                  <a:srgbClr val="0B3C49"/>
                 </a:solidFill>
               </a:rPr>
               <a:t>Aleatory vs epistemic</a:t>
@@ -12677,7 +12677,7 @@
             <a:avLst/>
           </a:prstGeom>
           <a:solidFill>
-            <a:schemeClr val="bg1"/>
+            <a:srgbClr val="FFFFFF"/>
           </a:solidFill>
           <a:ln/>
         </p:spPr>
@@ -12691,7 +12691,7 @@
             <a:r>
               <a:rPr lang="en-US" sz="1600" dirty="0">
                 <a:solidFill>
-                  <a:schemeClr val="accent4"/>
+                  <a:srgbClr val="264653"/>
                 </a:solidFill>
                 <a:latin typeface="+mj-lt" pitchFamily="34" charset="0"/>
                 <a:ea typeface="+mj-lt" pitchFamily="34" charset="-122"/>
@@ -12730,7 +12730,7 @@
             <a:r>
               <a:rPr lang="en-US" sz="1400" dirty="0">
                 <a:solidFill>
-                  <a:schemeClr val="tx1"/>
+                  <a:srgbClr val="1B2430"/>
                 </a:solidFill>
               </a:rPr>
               <a:t>Law of total variance splits natural variability from lack of knowledge about θ.</a:t>
@@ -12769,7 +12769,7 @@
             <a:lvl1pPr>
               <a:defRPr sz="1000">
                 <a:solidFill>
-                  <a:schemeClr val="accent6"/>
+                  <a:srgbClr val="5F6B76"/>
                 </a:solidFill>
               </a:defRPr>
             </a:lvl1pPr>
@@ -12838,7 +12838,7 @@
             <a:r>
               <a:rPr lang="en-US" sz="1300" b="1" dirty="0">
                 <a:solidFill>
-                  <a:schemeClr val="accent2"/>
+                  <a:srgbClr val="1F7A70"/>
                 </a:solidFill>
               </a:rPr>
               <a:t>OVERVIEW</a:t>
@@ -12876,7 +12876,7 @@
             <a:r>
               <a:rPr lang="en-US" sz="3600" b="1" dirty="0">
                 <a:solidFill>
-                  <a:schemeClr val="tx2"/>
+                  <a:srgbClr val="0B3C49"/>
                 </a:solidFill>
               </a:rPr>
               <a:t>Twelve families of models</a:t>
@@ -12884,35 +12884,10 @@
             <a:endParaRPr lang="en-US" sz="3600" dirty="0"/>
           </a:p>
         </p:txBody>
-      </p:sp>
-      <p:sp>
-        <p:nvSpPr>
-          <p:cNvPr id="4" name="icon circle"/>
-          <p:cNvSpPr/>
-          <p:nvPr/>
-        </p:nvSpPr>
-        <p:spPr>
-          <a:xfrm>
-            <a:off x="548640" y="1655064"/>
-            <a:ext cx="548640" cy="548640"/>
-          </a:xfrm>
-          <a:prstGeom prst="ellipse">
-            <a:avLst/>
-          </a:prstGeom>
-          <a:solidFill>
-            <a:schemeClr val="accent2"/>
-          </a:solidFill>
-          <a:ln w="12700">
-            <a:solidFill>
-              <a:schemeClr val="accent2"/>
-            </a:solidFill>
-            <a:prstDash val="solid"/>
-          </a:ln>
-        </p:spPr>
       </p:sp>
       <p:pic>
         <p:nvPicPr>
-          <p:cNvPr id="5" name="icon" descr="preencoded.png">    </p:cNvPr>
+          <p:cNvPr id="4" name="icon circle" descr="preencoded.png">    </p:cNvPr>
           <p:cNvPicPr>
             <a:picLocks noChangeAspect="1"/>
           </p:cNvPicPr>
@@ -12926,114 +12901,17 @@
         </p:blipFill>
         <p:spPr>
           <a:xfrm>
-            <a:off x="669341" y="1775765"/>
-            <a:ext cx="307238" cy="307238"/>
+            <a:off x="548640" y="1655064"/>
+            <a:ext cx="548640" cy="548640"/>
           </a:xfrm>
           <a:prstGeom prst="rect">
             <a:avLst/>
           </a:prstGeom>
         </p:spPr>
       </p:pic>
-      <p:sp>
-        <p:nvSpPr>
-          <p:cNvPr id="6" name="Text 3"/>
-          <p:cNvSpPr txBox="1"/>
-          <p:nvPr/>
-        </p:nvSpPr>
-        <p:spPr>
-          <a:xfrm>
-            <a:off x="1261872" y="1600200"/>
-            <a:ext cx="2926080" cy="384048"/>
-          </a:xfrm>
-          <a:prstGeom prst="rect">
-            <a:avLst/>
-          </a:prstGeom>
-          <a:noFill/>
-          <a:ln/>
-        </p:spPr>
-        <p:txBody>
-          <a:bodyPr wrap="square" lIns="0" tIns="0" rIns="0" bIns="0" rtlCol="0" anchor="t"/>
-          <a:lstStyle/>
-          <a:p>
-            <a:pPr indent="0" marL="0">
-              <a:buNone/>
-            </a:pPr>
-            <a:r>
-              <a:rPr lang="en-US" sz="1600" b="1" dirty="0">
-                <a:solidFill>
-                  <a:schemeClr val="tx2"/>
-                </a:solidFill>
-              </a:rPr>
-              <a:t>1 · Digital-twin formalism</a:t>
-            </a:r>
-            <a:endParaRPr lang="en-US" sz="1600" dirty="0"/>
-          </a:p>
-        </p:txBody>
-      </p:sp>
-      <p:sp>
-        <p:nvSpPr>
-          <p:cNvPr id="7" name="Text 4"/>
-          <p:cNvSpPr txBox="1"/>
-          <p:nvPr/>
-        </p:nvSpPr>
-        <p:spPr>
-          <a:xfrm>
-            <a:off x="1261872" y="2002536"/>
-            <a:ext cx="2926080" cy="457200"/>
-          </a:xfrm>
-          <a:prstGeom prst="rect">
-            <a:avLst/>
-          </a:prstGeom>
-          <a:noFill/>
-          <a:ln/>
-        </p:spPr>
-        <p:txBody>
-          <a:bodyPr wrap="square" lIns="0" tIns="0" rIns="0" bIns="0" rtlCol="0" anchor="t"/>
-          <a:lstStyle/>
-          <a:p>
-            <a:pPr indent="0" marL="0">
-              <a:buNone/>
-            </a:pPr>
-            <a:r>
-              <a:rPr lang="en-US" sz="1400" dirty="0">
-                <a:solidFill>
-                  <a:schemeClr val="tx1"/>
-                </a:solidFill>
-              </a:rPr>
-              <a:t>state space, ODE, SDE, PDE, discrete</a:t>
-            </a:r>
-            <a:endParaRPr lang="en-US" sz="1400" dirty="0"/>
-          </a:p>
-        </p:txBody>
-      </p:sp>
-      <p:sp>
-        <p:nvSpPr>
-          <p:cNvPr id="8" name="icon circle"/>
-          <p:cNvSpPr/>
-          <p:nvPr/>
-        </p:nvSpPr>
-        <p:spPr>
-          <a:xfrm>
-            <a:off x="4297680" y="1655064"/>
-            <a:ext cx="548640" cy="548640"/>
-          </a:xfrm>
-          <a:prstGeom prst="ellipse">
-            <a:avLst/>
-          </a:prstGeom>
-          <a:solidFill>
-            <a:schemeClr val="accent2"/>
-          </a:solidFill>
-          <a:ln w="12700">
-            <a:solidFill>
-              <a:schemeClr val="accent2"/>
-            </a:solidFill>
-            <a:prstDash val="solid"/>
-          </a:ln>
-        </p:spPr>
-      </p:sp>
       <p:pic>
         <p:nvPicPr>
-          <p:cNvPr id="9" name="icon" descr="preencoded.png">    </p:cNvPr>
+          <p:cNvPr id="5" name="icon" descr="preencoded.png">    </p:cNvPr>
           <p:cNvPicPr>
             <a:picLocks noChangeAspect="1"/>
           </p:cNvPicPr>
@@ -13047,7 +12925,7 @@
         </p:blipFill>
         <p:spPr>
           <a:xfrm>
-            <a:off x="4418381" y="1775765"/>
+            <a:off x="669341" y="1775765"/>
             <a:ext cx="307238" cy="307238"/>
           </a:xfrm>
           <a:prstGeom prst="rect">
@@ -13057,13 +12935,13 @@
       </p:pic>
       <p:sp>
         <p:nvSpPr>
-          <p:cNvPr id="10" name="Text 6"/>
-          <p:cNvSpPr txBox="1"/>
-          <p:nvPr/>
-        </p:nvSpPr>
-        <p:spPr>
-          <a:xfrm>
-            <a:off x="5010912" y="1600200"/>
+          <p:cNvPr id="6" name="Text 2"/>
+          <p:cNvSpPr txBox="1"/>
+          <p:nvPr/>
+        </p:nvSpPr>
+        <p:spPr>
+          <a:xfrm>
+            <a:off x="1261872" y="1600200"/>
             <a:ext cx="2926080" cy="384048"/>
           </a:xfrm>
           <a:prstGeom prst="rect">
@@ -13082,10 +12960,10 @@
             <a:r>
               <a:rPr lang="en-US" sz="1600" b="1" dirty="0">
                 <a:solidFill>
-                  <a:schemeClr val="tx2"/>
-                </a:solidFill>
-              </a:rPr>
-              <a:t>2 · Pharmacokinetics</a:t>
+                  <a:srgbClr val="0B3C49"/>
+                </a:solidFill>
+              </a:rPr>
+              <a:t>1 · Digital-twin formalism</a:t>
             </a:r>
             <a:endParaRPr lang="en-US" sz="1600" dirty="0"/>
           </a:p>
@@ -13093,13 +12971,13 @@
       </p:sp>
       <p:sp>
         <p:nvSpPr>
-          <p:cNvPr id="11" name="Text 7"/>
-          <p:cNvSpPr txBox="1"/>
-          <p:nvPr/>
-        </p:nvSpPr>
-        <p:spPr>
-          <a:xfrm>
-            <a:off x="5010912" y="2002536"/>
+          <p:cNvPr id="7" name="Text 3"/>
+          <p:cNvSpPr txBox="1"/>
+          <p:nvPr/>
+        </p:nvSpPr>
+        <p:spPr>
+          <a:xfrm>
+            <a:off x="1261872" y="2002536"/>
             <a:ext cx="2926080" cy="457200"/>
           </a:xfrm>
           <a:prstGeom prst="rect">
@@ -13118,43 +12996,18 @@
             <a:r>
               <a:rPr lang="en-US" sz="1400" dirty="0">
                 <a:solidFill>
-                  <a:schemeClr val="tx1"/>
-                </a:solidFill>
-              </a:rPr>
-              <a:t>compartments, absorption, PBPK</a:t>
+                  <a:srgbClr val="1B2430"/>
+                </a:solidFill>
+              </a:rPr>
+              <a:t>state space, ODE, SDE, PDE, discrete</a:t>
             </a:r>
             <a:endParaRPr lang="en-US" sz="1400" dirty="0"/>
           </a:p>
         </p:txBody>
-      </p:sp>
-      <p:sp>
-        <p:nvSpPr>
-          <p:cNvPr id="12" name="icon circle"/>
-          <p:cNvSpPr/>
-          <p:nvPr/>
-        </p:nvSpPr>
-        <p:spPr>
-          <a:xfrm>
-            <a:off x="8046720" y="1655064"/>
-            <a:ext cx="548640" cy="548640"/>
-          </a:xfrm>
-          <a:prstGeom prst="ellipse">
-            <a:avLst/>
-          </a:prstGeom>
-          <a:solidFill>
-            <a:schemeClr val="accent2"/>
-          </a:solidFill>
-          <a:ln w="12700">
-            <a:solidFill>
-              <a:schemeClr val="accent2"/>
-            </a:solidFill>
-            <a:prstDash val="solid"/>
-          </a:ln>
-        </p:spPr>
       </p:sp>
       <p:pic>
         <p:nvPicPr>
-          <p:cNvPr id="13" name="icon" descr="preencoded.png">    </p:cNvPr>
+          <p:cNvPr id="8" name="icon circle" descr="preencoded.png">    </p:cNvPr>
           <p:cNvPicPr>
             <a:picLocks noChangeAspect="1"/>
           </p:cNvPicPr>
@@ -13168,114 +13021,17 @@
         </p:blipFill>
         <p:spPr>
           <a:xfrm>
-            <a:off x="8167421" y="1775765"/>
-            <a:ext cx="307238" cy="307238"/>
+            <a:off x="4297680" y="1655064"/>
+            <a:ext cx="548640" cy="548640"/>
           </a:xfrm>
           <a:prstGeom prst="rect">
             <a:avLst/>
           </a:prstGeom>
         </p:spPr>
       </p:pic>
-      <p:sp>
-        <p:nvSpPr>
-          <p:cNvPr id="14" name="Text 9"/>
-          <p:cNvSpPr txBox="1"/>
-          <p:nvPr/>
-        </p:nvSpPr>
-        <p:spPr>
-          <a:xfrm>
-            <a:off x="8759952" y="1600200"/>
-            <a:ext cx="2926080" cy="384048"/>
-          </a:xfrm>
-          <a:prstGeom prst="rect">
-            <a:avLst/>
-          </a:prstGeom>
-          <a:noFill/>
-          <a:ln/>
-        </p:spPr>
-        <p:txBody>
-          <a:bodyPr wrap="square" lIns="0" tIns="0" rIns="0" bIns="0" rtlCol="0" anchor="t"/>
-          <a:lstStyle/>
-          <a:p>
-            <a:pPr indent="0" marL="0">
-              <a:buNone/>
-            </a:pPr>
-            <a:r>
-              <a:rPr lang="en-US" sz="1600" b="1" dirty="0">
-                <a:solidFill>
-                  <a:schemeClr val="tx2"/>
-                </a:solidFill>
-              </a:rPr>
-              <a:t>3 · Pharmacodynamics, QSP</a:t>
-            </a:r>
-            <a:endParaRPr lang="en-US" sz="1600" dirty="0"/>
-          </a:p>
-        </p:txBody>
-      </p:sp>
-      <p:sp>
-        <p:nvSpPr>
-          <p:cNvPr id="15" name="Text 10"/>
-          <p:cNvSpPr txBox="1"/>
-          <p:nvPr/>
-        </p:nvSpPr>
-        <p:spPr>
-          <a:xfrm>
-            <a:off x="8759952" y="2002536"/>
-            <a:ext cx="2926080" cy="457200"/>
-          </a:xfrm>
-          <a:prstGeom prst="rect">
-            <a:avLst/>
-          </a:prstGeom>
-          <a:noFill/>
-          <a:ln/>
-        </p:spPr>
-        <p:txBody>
-          <a:bodyPr wrap="square" lIns="0" tIns="0" rIns="0" bIns="0" rtlCol="0" anchor="t"/>
-          <a:lstStyle/>
-          <a:p>
-            <a:pPr indent="0" marL="0">
-              <a:buNone/>
-            </a:pPr>
-            <a:r>
-              <a:rPr lang="en-US" sz="1400" dirty="0">
-                <a:solidFill>
-                  <a:schemeClr val="tx1"/>
-                </a:solidFill>
-              </a:rPr>
-              <a:t>Emax, indirect response, kinetics</a:t>
-            </a:r>
-            <a:endParaRPr lang="en-US" sz="1400" dirty="0"/>
-          </a:p>
-        </p:txBody>
-      </p:sp>
-      <p:sp>
-        <p:nvSpPr>
-          <p:cNvPr id="16" name="icon circle"/>
-          <p:cNvSpPr/>
-          <p:nvPr/>
-        </p:nvSpPr>
-        <p:spPr>
-          <a:xfrm>
-            <a:off x="548640" y="2752344"/>
-            <a:ext cx="548640" cy="548640"/>
-          </a:xfrm>
-          <a:prstGeom prst="ellipse">
-            <a:avLst/>
-          </a:prstGeom>
-          <a:solidFill>
-            <a:schemeClr val="accent2"/>
-          </a:solidFill>
-          <a:ln w="12700">
-            <a:solidFill>
-              <a:schemeClr val="accent2"/>
-            </a:solidFill>
-            <a:prstDash val="solid"/>
-          </a:ln>
-        </p:spPr>
-      </p:sp>
       <p:pic>
         <p:nvPicPr>
-          <p:cNvPr id="17" name="icon" descr="preencoded.png">    </p:cNvPr>
+          <p:cNvPr id="9" name="icon" descr="preencoded.png">    </p:cNvPr>
           <p:cNvPicPr>
             <a:picLocks noChangeAspect="1"/>
           </p:cNvPicPr>
@@ -13289,7 +13045,7 @@
         </p:blipFill>
         <p:spPr>
           <a:xfrm>
-            <a:off x="669341" y="2873045"/>
+            <a:off x="4418381" y="1775765"/>
             <a:ext cx="307238" cy="307238"/>
           </a:xfrm>
           <a:prstGeom prst="rect">
@@ -13299,13 +13055,13 @@
       </p:pic>
       <p:sp>
         <p:nvSpPr>
-          <p:cNvPr id="18" name="Text 12"/>
-          <p:cNvSpPr txBox="1"/>
-          <p:nvPr/>
-        </p:nvSpPr>
-        <p:spPr>
-          <a:xfrm>
-            <a:off x="1261872" y="2697480"/>
+          <p:cNvPr id="10" name="Text 4"/>
+          <p:cNvSpPr txBox="1"/>
+          <p:nvPr/>
+        </p:nvSpPr>
+        <p:spPr>
+          <a:xfrm>
+            <a:off x="5010912" y="1600200"/>
             <a:ext cx="2926080" cy="384048"/>
           </a:xfrm>
           <a:prstGeom prst="rect">
@@ -13324,10 +13080,10 @@
             <a:r>
               <a:rPr lang="en-US" sz="1600" b="1" dirty="0">
                 <a:solidFill>
-                  <a:schemeClr val="tx2"/>
-                </a:solidFill>
-              </a:rPr>
-              <a:t>4 · Disease dynamics</a:t>
+                  <a:srgbClr val="0B3C49"/>
+                </a:solidFill>
+              </a:rPr>
+              <a:t>2 · Pharmacokinetics</a:t>
             </a:r>
             <a:endParaRPr lang="en-US" sz="1600" dirty="0"/>
           </a:p>
@@ -13335,13 +13091,13 @@
       </p:sp>
       <p:sp>
         <p:nvSpPr>
-          <p:cNvPr id="19" name="Text 13"/>
-          <p:cNvSpPr txBox="1"/>
-          <p:nvPr/>
-        </p:nvSpPr>
-        <p:spPr>
-          <a:xfrm>
-            <a:off x="1261872" y="3099816"/>
+          <p:cNvPr id="11" name="Text 5"/>
+          <p:cNvSpPr txBox="1"/>
+          <p:nvPr/>
+        </p:nvSpPr>
+        <p:spPr>
+          <a:xfrm>
+            <a:off x="5010912" y="2002536"/>
             <a:ext cx="2926080" cy="457200"/>
           </a:xfrm>
           <a:prstGeom prst="rect">
@@ -13360,43 +13116,18 @@
             <a:r>
               <a:rPr lang="en-US" sz="1400" dirty="0">
                 <a:solidFill>
-                  <a:schemeClr val="tx1"/>
-                </a:solidFill>
-              </a:rPr>
-              <a:t>growth, epidemics, progression</a:t>
+                  <a:srgbClr val="1B2430"/>
+                </a:solidFill>
+              </a:rPr>
+              <a:t>compartments, absorption, PBPK</a:t>
             </a:r>
             <a:endParaRPr lang="en-US" sz="1400" dirty="0"/>
           </a:p>
         </p:txBody>
-      </p:sp>
-      <p:sp>
-        <p:nvSpPr>
-          <p:cNvPr id="20" name="icon circle"/>
-          <p:cNvSpPr/>
-          <p:nvPr/>
-        </p:nvSpPr>
-        <p:spPr>
-          <a:xfrm>
-            <a:off x="4297680" y="2752344"/>
-            <a:ext cx="548640" cy="548640"/>
-          </a:xfrm>
-          <a:prstGeom prst="ellipse">
-            <a:avLst/>
-          </a:prstGeom>
-          <a:solidFill>
-            <a:schemeClr val="accent2"/>
-          </a:solidFill>
-          <a:ln w="12700">
-            <a:solidFill>
-              <a:schemeClr val="accent2"/>
-            </a:solidFill>
-            <a:prstDash val="solid"/>
-          </a:ln>
-        </p:spPr>
       </p:sp>
       <p:pic>
         <p:nvPicPr>
-          <p:cNvPr id="21" name="icon" descr="preencoded.png">    </p:cNvPr>
+          <p:cNvPr id="12" name="icon circle" descr="preencoded.png">    </p:cNvPr>
           <p:cNvPicPr>
             <a:picLocks noChangeAspect="1"/>
           </p:cNvPicPr>
@@ -13410,114 +13141,17 @@
         </p:blipFill>
         <p:spPr>
           <a:xfrm>
-            <a:off x="4418381" y="2873045"/>
-            <a:ext cx="307238" cy="307238"/>
+            <a:off x="8046720" y="1655064"/>
+            <a:ext cx="548640" cy="548640"/>
           </a:xfrm>
           <a:prstGeom prst="rect">
             <a:avLst/>
           </a:prstGeom>
         </p:spPr>
       </p:pic>
-      <p:sp>
-        <p:nvSpPr>
-          <p:cNvPr id="22" name="Text 15"/>
-          <p:cNvSpPr txBox="1"/>
-          <p:nvPr/>
-        </p:nvSpPr>
-        <p:spPr>
-          <a:xfrm>
-            <a:off x="5010912" y="2697480"/>
-            <a:ext cx="2926080" cy="384048"/>
-          </a:xfrm>
-          <a:prstGeom prst="rect">
-            <a:avLst/>
-          </a:prstGeom>
-          <a:noFill/>
-          <a:ln/>
-        </p:spPr>
-        <p:txBody>
-          <a:bodyPr wrap="square" lIns="0" tIns="0" rIns="0" bIns="0" rtlCol="0" anchor="t"/>
-          <a:lstStyle/>
-          <a:p>
-            <a:pPr indent="0" marL="0">
-              <a:buNone/>
-            </a:pPr>
-            <a:r>
-              <a:rPr lang="en-US" sz="1600" b="1" dirty="0">
-                <a:solidFill>
-                  <a:schemeClr val="tx2"/>
-                </a:solidFill>
-              </a:rPr>
-              <a:t>5 · Organ physiology</a:t>
-            </a:r>
-            <a:endParaRPr lang="en-US" sz="1600" dirty="0"/>
-          </a:p>
-        </p:txBody>
-      </p:sp>
-      <p:sp>
-        <p:nvSpPr>
-          <p:cNvPr id="23" name="Text 16"/>
-          <p:cNvSpPr txBox="1"/>
-          <p:nvPr/>
-        </p:nvSpPr>
-        <p:spPr>
-          <a:xfrm>
-            <a:off x="5010912" y="3099816"/>
-            <a:ext cx="2926080" cy="457200"/>
-          </a:xfrm>
-          <a:prstGeom prst="rect">
-            <a:avLst/>
-          </a:prstGeom>
-          <a:noFill/>
-          <a:ln/>
-        </p:spPr>
-        <p:txBody>
-          <a:bodyPr wrap="square" lIns="0" tIns="0" rIns="0" bIns="0" rtlCol="0" anchor="t"/>
-          <a:lstStyle/>
-          <a:p>
-            <a:pPr indent="0" marL="0">
-              <a:buNone/>
-            </a:pPr>
-            <a:r>
-              <a:rPr lang="en-US" sz="1400" dirty="0">
-                <a:solidFill>
-                  <a:schemeClr val="tx1"/>
-                </a:solidFill>
-              </a:rPr>
-              <a:t>heart, cells, glucose, lungs</a:t>
-            </a:r>
-            <a:endParaRPr lang="en-US" sz="1400" dirty="0"/>
-          </a:p>
-        </p:txBody>
-      </p:sp>
-      <p:sp>
-        <p:nvSpPr>
-          <p:cNvPr id="24" name="icon circle"/>
-          <p:cNvSpPr/>
-          <p:nvPr/>
-        </p:nvSpPr>
-        <p:spPr>
-          <a:xfrm>
-            <a:off x="8046720" y="2752344"/>
-            <a:ext cx="548640" cy="548640"/>
-          </a:xfrm>
-          <a:prstGeom prst="ellipse">
-            <a:avLst/>
-          </a:prstGeom>
-          <a:solidFill>
-            <a:schemeClr val="accent2"/>
-          </a:solidFill>
-          <a:ln w="12700">
-            <a:solidFill>
-              <a:schemeClr val="accent2"/>
-            </a:solidFill>
-            <a:prstDash val="solid"/>
-          </a:ln>
-        </p:spPr>
-      </p:sp>
       <p:pic>
         <p:nvPicPr>
-          <p:cNvPr id="25" name="icon" descr="preencoded.png">    </p:cNvPr>
+          <p:cNvPr id="13" name="icon" descr="preencoded.png">    </p:cNvPr>
           <p:cNvPicPr>
             <a:picLocks noChangeAspect="1"/>
           </p:cNvPicPr>
@@ -13531,7 +13165,7 @@
         </p:blipFill>
         <p:spPr>
           <a:xfrm>
-            <a:off x="8167421" y="2873045"/>
+            <a:off x="8167421" y="1775765"/>
             <a:ext cx="307238" cy="307238"/>
           </a:xfrm>
           <a:prstGeom prst="rect">
@@ -13541,13 +13175,13 @@
       </p:pic>
       <p:sp>
         <p:nvSpPr>
-          <p:cNvPr id="26" name="Text 18"/>
-          <p:cNvSpPr txBox="1"/>
-          <p:nvPr/>
-        </p:nvSpPr>
-        <p:spPr>
-          <a:xfrm>
-            <a:off x="8759952" y="2697480"/>
+          <p:cNvPr id="14" name="Text 6"/>
+          <p:cNvSpPr txBox="1"/>
+          <p:nvPr/>
+        </p:nvSpPr>
+        <p:spPr>
+          <a:xfrm>
+            <a:off x="8759952" y="1600200"/>
             <a:ext cx="2926080" cy="384048"/>
           </a:xfrm>
           <a:prstGeom prst="rect">
@@ -13566,10 +13200,10 @@
             <a:r>
               <a:rPr lang="en-US" sz="1600" b="1" dirty="0">
                 <a:solidFill>
-                  <a:schemeClr val="tx2"/>
-                </a:solidFill>
-              </a:rPr>
-              <a:t>6 · Continuum physics</a:t>
+                  <a:srgbClr val="0B3C49"/>
+                </a:solidFill>
+              </a:rPr>
+              <a:t>3 · Pharmacodynamics, QSP</a:t>
             </a:r>
             <a:endParaRPr lang="en-US" sz="1600" dirty="0"/>
           </a:p>
@@ -13577,13 +13211,13 @@
       </p:sp>
       <p:sp>
         <p:nvSpPr>
-          <p:cNvPr id="27" name="Text 19"/>
-          <p:cNvSpPr txBox="1"/>
-          <p:nvPr/>
-        </p:nvSpPr>
-        <p:spPr>
-          <a:xfrm>
-            <a:off x="8759952" y="3099816"/>
+          <p:cNvPr id="15" name="Text 7"/>
+          <p:cNvSpPr txBox="1"/>
+          <p:nvPr/>
+        </p:nvSpPr>
+        <p:spPr>
+          <a:xfrm>
+            <a:off x="8759952" y="2002536"/>
             <a:ext cx="2926080" cy="457200"/>
           </a:xfrm>
           <a:prstGeom prst="rect">
@@ -13602,43 +13236,18 @@
             <a:r>
               <a:rPr lang="en-US" sz="1400" dirty="0">
                 <a:solidFill>
-                  <a:schemeClr val="tx1"/>
-                </a:solidFill>
-              </a:rPr>
-              <a:t>mechanics, flow, transport, heat</a:t>
+                  <a:srgbClr val="1B2430"/>
+                </a:solidFill>
+              </a:rPr>
+              <a:t>Emax, indirect response, kinetics</a:t>
             </a:r>
             <a:endParaRPr lang="en-US" sz="1400" dirty="0"/>
           </a:p>
         </p:txBody>
-      </p:sp>
-      <p:sp>
-        <p:nvSpPr>
-          <p:cNvPr id="28" name="icon circle"/>
-          <p:cNvSpPr/>
-          <p:nvPr/>
-        </p:nvSpPr>
-        <p:spPr>
-          <a:xfrm>
-            <a:off x="548640" y="3849624"/>
-            <a:ext cx="548640" cy="548640"/>
-          </a:xfrm>
-          <a:prstGeom prst="ellipse">
-            <a:avLst/>
-          </a:prstGeom>
-          <a:solidFill>
-            <a:schemeClr val="accent2"/>
-          </a:solidFill>
-          <a:ln w="12700">
-            <a:solidFill>
-              <a:schemeClr val="accent2"/>
-            </a:solidFill>
-            <a:prstDash val="solid"/>
-          </a:ln>
-        </p:spPr>
       </p:sp>
       <p:pic>
         <p:nvPicPr>
-          <p:cNvPr id="29" name="icon" descr="preencoded.png">    </p:cNvPr>
+          <p:cNvPr id="16" name="icon circle" descr="preencoded.png">    </p:cNvPr>
           <p:cNvPicPr>
             <a:picLocks noChangeAspect="1"/>
           </p:cNvPicPr>
@@ -13652,114 +13261,17 @@
         </p:blipFill>
         <p:spPr>
           <a:xfrm>
-            <a:off x="669341" y="3970325"/>
-            <a:ext cx="307238" cy="307238"/>
+            <a:off x="548640" y="2752344"/>
+            <a:ext cx="548640" cy="548640"/>
           </a:xfrm>
           <a:prstGeom prst="rect">
             <a:avLst/>
           </a:prstGeom>
         </p:spPr>
       </p:pic>
-      <p:sp>
-        <p:nvSpPr>
-          <p:cNvPr id="30" name="Text 21"/>
-          <p:cNvSpPr txBox="1"/>
-          <p:nvPr/>
-        </p:nvSpPr>
-        <p:spPr>
-          <a:xfrm>
-            <a:off x="1261872" y="3794760"/>
-            <a:ext cx="2926080" cy="384048"/>
-          </a:xfrm>
-          <a:prstGeom prst="rect">
-            <a:avLst/>
-          </a:prstGeom>
-          <a:noFill/>
-          <a:ln/>
-        </p:spPr>
-        <p:txBody>
-          <a:bodyPr wrap="square" lIns="0" tIns="0" rIns="0" bIns="0" rtlCol="0" anchor="t"/>
-          <a:lstStyle/>
-          <a:p>
-            <a:pPr indent="0" marL="0">
-              <a:buNone/>
-            </a:pPr>
-            <a:r>
-              <a:rPr lang="en-US" sz="1600" b="1" dirty="0">
-                <a:solidFill>
-                  <a:schemeClr val="tx2"/>
-                </a:solidFill>
-              </a:rPr>
-              <a:t>7 · Statistical models</a:t>
-            </a:r>
-            <a:endParaRPr lang="en-US" sz="1600" dirty="0"/>
-          </a:p>
-        </p:txBody>
-      </p:sp>
-      <p:sp>
-        <p:nvSpPr>
-          <p:cNvPr id="31" name="Text 22"/>
-          <p:cNvSpPr txBox="1"/>
-          <p:nvPr/>
-        </p:nvSpPr>
-        <p:spPr>
-          <a:xfrm>
-            <a:off x="1261872" y="4197096"/>
-            <a:ext cx="2926080" cy="457200"/>
-          </a:xfrm>
-          <a:prstGeom prst="rect">
-            <a:avLst/>
-          </a:prstGeom>
-          <a:noFill/>
-          <a:ln/>
-        </p:spPr>
-        <p:txBody>
-          <a:bodyPr wrap="square" lIns="0" tIns="0" rIns="0" bIns="0" rtlCol="0" anchor="t"/>
-          <a:lstStyle/>
-          <a:p>
-            <a:pPr indent="0" marL="0">
-              <a:buNone/>
-            </a:pPr>
-            <a:r>
-              <a:rPr lang="en-US" sz="1400" dirty="0">
-                <a:solidFill>
-                  <a:schemeClr val="tx1"/>
-                </a:solidFill>
-              </a:rPr>
-              <a:t>mixed effects, GLM, survival</a:t>
-            </a:r>
-            <a:endParaRPr lang="en-US" sz="1400" dirty="0"/>
-          </a:p>
-        </p:txBody>
-      </p:sp>
-      <p:sp>
-        <p:nvSpPr>
-          <p:cNvPr id="32" name="icon circle"/>
-          <p:cNvSpPr/>
-          <p:nvPr/>
-        </p:nvSpPr>
-        <p:spPr>
-          <a:xfrm>
-            <a:off x="4297680" y="3849624"/>
-            <a:ext cx="548640" cy="548640"/>
-          </a:xfrm>
-          <a:prstGeom prst="ellipse">
-            <a:avLst/>
-          </a:prstGeom>
-          <a:solidFill>
-            <a:schemeClr val="accent2"/>
-          </a:solidFill>
-          <a:ln w="12700">
-            <a:solidFill>
-              <a:schemeClr val="accent2"/>
-            </a:solidFill>
-            <a:prstDash val="solid"/>
-          </a:ln>
-        </p:spPr>
-      </p:sp>
       <p:pic>
         <p:nvPicPr>
-          <p:cNvPr id="33" name="icon" descr="preencoded.png">    </p:cNvPr>
+          <p:cNvPr id="17" name="icon" descr="preencoded.png">    </p:cNvPr>
           <p:cNvPicPr>
             <a:picLocks noChangeAspect="1"/>
           </p:cNvPicPr>
@@ -13773,7 +13285,7 @@
         </p:blipFill>
         <p:spPr>
           <a:xfrm>
-            <a:off x="4418381" y="3970325"/>
+            <a:off x="669341" y="2873045"/>
             <a:ext cx="307238" cy="307238"/>
           </a:xfrm>
           <a:prstGeom prst="rect">
@@ -13783,13 +13295,13 @@
       </p:pic>
       <p:sp>
         <p:nvSpPr>
-          <p:cNvPr id="34" name="Text 24"/>
-          <p:cNvSpPr txBox="1"/>
-          <p:nvPr/>
-        </p:nvSpPr>
-        <p:spPr>
-          <a:xfrm>
-            <a:off x="5010912" y="3794760"/>
+          <p:cNvPr id="18" name="Text 8"/>
+          <p:cNvSpPr txBox="1"/>
+          <p:nvPr/>
+        </p:nvSpPr>
+        <p:spPr>
+          <a:xfrm>
+            <a:off x="1261872" y="2697480"/>
             <a:ext cx="2926080" cy="384048"/>
           </a:xfrm>
           <a:prstGeom prst="rect">
@@ -13808,10 +13320,10 @@
             <a:r>
               <a:rPr lang="en-US" sz="1600" b="1" dirty="0">
                 <a:solidFill>
-                  <a:schemeClr val="tx2"/>
-                </a:solidFill>
-              </a:rPr>
-              <a:t>8 · Data assimilation</a:t>
+                  <a:srgbClr val="0B3C49"/>
+                </a:solidFill>
+              </a:rPr>
+              <a:t>4 · Disease dynamics</a:t>
             </a:r>
             <a:endParaRPr lang="en-US" sz="1600" dirty="0"/>
           </a:p>
@@ -13819,13 +13331,13 @@
       </p:sp>
       <p:sp>
         <p:nvSpPr>
-          <p:cNvPr id="35" name="Text 25"/>
-          <p:cNvSpPr txBox="1"/>
-          <p:nvPr/>
-        </p:nvSpPr>
-        <p:spPr>
-          <a:xfrm>
-            <a:off x="5010912" y="4197096"/>
+          <p:cNvPr id="19" name="Text 9"/>
+          <p:cNvSpPr txBox="1"/>
+          <p:nvPr/>
+        </p:nvSpPr>
+        <p:spPr>
+          <a:xfrm>
+            <a:off x="1261872" y="3099816"/>
             <a:ext cx="2926080" cy="457200"/>
           </a:xfrm>
           <a:prstGeom prst="rect">
@@ -13844,43 +13356,18 @@
             <a:r>
               <a:rPr lang="en-US" sz="1400" dirty="0">
                 <a:solidFill>
-                  <a:schemeClr val="tx1"/>
-                </a:solidFill>
-              </a:rPr>
-              <a:t>Kalman, particle, variational</a:t>
+                  <a:srgbClr val="1B2430"/>
+                </a:solidFill>
+              </a:rPr>
+              <a:t>growth, epidemics, progression</a:t>
             </a:r>
             <a:endParaRPr lang="en-US" sz="1400" dirty="0"/>
           </a:p>
         </p:txBody>
-      </p:sp>
-      <p:sp>
-        <p:nvSpPr>
-          <p:cNvPr id="36" name="icon circle"/>
-          <p:cNvSpPr/>
-          <p:nvPr/>
-        </p:nvSpPr>
-        <p:spPr>
-          <a:xfrm>
-            <a:off x="8046720" y="3849624"/>
-            <a:ext cx="548640" cy="548640"/>
-          </a:xfrm>
-          <a:prstGeom prst="ellipse">
-            <a:avLst/>
-          </a:prstGeom>
-          <a:solidFill>
-            <a:schemeClr val="accent2"/>
-          </a:solidFill>
-          <a:ln w="12700">
-            <a:solidFill>
-              <a:schemeClr val="accent2"/>
-            </a:solidFill>
-            <a:prstDash val="solid"/>
-          </a:ln>
-        </p:spPr>
       </p:sp>
       <p:pic>
         <p:nvPicPr>
-          <p:cNvPr id="37" name="icon" descr="preencoded.png">    </p:cNvPr>
+          <p:cNvPr id="20" name="icon circle" descr="preencoded.png">    </p:cNvPr>
           <p:cNvPicPr>
             <a:picLocks noChangeAspect="1"/>
           </p:cNvPicPr>
@@ -13894,114 +13381,17 @@
         </p:blipFill>
         <p:spPr>
           <a:xfrm>
-            <a:off x="8167421" y="3970325"/>
-            <a:ext cx="307238" cy="307238"/>
+            <a:off x="4297680" y="2752344"/>
+            <a:ext cx="548640" cy="548640"/>
           </a:xfrm>
           <a:prstGeom prst="rect">
             <a:avLst/>
           </a:prstGeom>
         </p:spPr>
       </p:pic>
-      <p:sp>
-        <p:nvSpPr>
-          <p:cNvPr id="38" name="Text 27"/>
-          <p:cNvSpPr txBox="1"/>
-          <p:nvPr/>
-        </p:nvSpPr>
-        <p:spPr>
-          <a:xfrm>
-            <a:off x="8759952" y="3794760"/>
-            <a:ext cx="2926080" cy="384048"/>
-          </a:xfrm>
-          <a:prstGeom prst="rect">
-            <a:avLst/>
-          </a:prstGeom>
-          <a:noFill/>
-          <a:ln/>
-        </p:spPr>
-        <p:txBody>
-          <a:bodyPr wrap="square" lIns="0" tIns="0" rIns="0" bIns="0" rtlCol="0" anchor="t"/>
-          <a:lstStyle/>
-          <a:p>
-            <a:pPr indent="0" marL="0">
-              <a:buNone/>
-            </a:pPr>
-            <a:r>
-              <a:rPr lang="en-US" sz="1600" b="1" dirty="0">
-                <a:solidFill>
-                  <a:schemeClr val="tx2"/>
-                </a:solidFill>
-              </a:rPr>
-              <a:t>9 · Uncertainty, sensitivity</a:t>
-            </a:r>
-            <a:endParaRPr lang="en-US" sz="1600" dirty="0"/>
-          </a:p>
-        </p:txBody>
-      </p:sp>
-      <p:sp>
-        <p:nvSpPr>
-          <p:cNvPr id="39" name="Text 28"/>
-          <p:cNvSpPr txBox="1"/>
-          <p:nvPr/>
-        </p:nvSpPr>
-        <p:spPr>
-          <a:xfrm>
-            <a:off x="8759952" y="4197096"/>
-            <a:ext cx="2926080" cy="457200"/>
-          </a:xfrm>
-          <a:prstGeom prst="rect">
-            <a:avLst/>
-          </a:prstGeom>
-          <a:noFill/>
-          <a:ln/>
-        </p:spPr>
-        <p:txBody>
-          <a:bodyPr wrap="square" lIns="0" tIns="0" rIns="0" bIns="0" rtlCol="0" anchor="t"/>
-          <a:lstStyle/>
-          <a:p>
-            <a:pPr indent="0" marL="0">
-              <a:buNone/>
-            </a:pPr>
-            <a:r>
-              <a:rPr lang="en-US" sz="1400" dirty="0">
-                <a:solidFill>
-                  <a:schemeClr val="tx1"/>
-                </a:solidFill>
-              </a:rPr>
-              <a:t>Monte Carlo, Sobol, chaos</a:t>
-            </a:r>
-            <a:endParaRPr lang="en-US" sz="1400" dirty="0"/>
-          </a:p>
-        </p:txBody>
-      </p:sp>
-      <p:sp>
-        <p:nvSpPr>
-          <p:cNvPr id="40" name="icon circle"/>
-          <p:cNvSpPr/>
-          <p:nvPr/>
-        </p:nvSpPr>
-        <p:spPr>
-          <a:xfrm>
-            <a:off x="548640" y="4946904"/>
-            <a:ext cx="548640" cy="548640"/>
-          </a:xfrm>
-          <a:prstGeom prst="ellipse">
-            <a:avLst/>
-          </a:prstGeom>
-          <a:solidFill>
-            <a:schemeClr val="accent2"/>
-          </a:solidFill>
-          <a:ln w="12700">
-            <a:solidFill>
-              <a:schemeClr val="accent2"/>
-            </a:solidFill>
-            <a:prstDash val="solid"/>
-          </a:ln>
-        </p:spPr>
-      </p:sp>
       <p:pic>
         <p:nvPicPr>
-          <p:cNvPr id="41" name="icon" descr="preencoded.png">    </p:cNvPr>
+          <p:cNvPr id="21" name="icon" descr="preencoded.png">    </p:cNvPr>
           <p:cNvPicPr>
             <a:picLocks noChangeAspect="1"/>
           </p:cNvPicPr>
@@ -14015,7 +13405,7 @@
         </p:blipFill>
         <p:spPr>
           <a:xfrm>
-            <a:off x="669341" y="5067605"/>
+            <a:off x="4418381" y="2873045"/>
             <a:ext cx="307238" cy="307238"/>
           </a:xfrm>
           <a:prstGeom prst="rect">
@@ -14025,13 +13415,13 @@
       </p:pic>
       <p:sp>
         <p:nvSpPr>
-          <p:cNvPr id="42" name="Text 30"/>
-          <p:cNvSpPr txBox="1"/>
-          <p:nvPr/>
-        </p:nvSpPr>
-        <p:spPr>
-          <a:xfrm>
-            <a:off x="1261872" y="4892040"/>
+          <p:cNvPr id="22" name="Text 10"/>
+          <p:cNvSpPr txBox="1"/>
+          <p:nvPr/>
+        </p:nvSpPr>
+        <p:spPr>
+          <a:xfrm>
+            <a:off x="5010912" y="2697480"/>
             <a:ext cx="2926080" cy="384048"/>
           </a:xfrm>
           <a:prstGeom prst="rect">
@@ -14050,10 +13440,10 @@
             <a:r>
               <a:rPr lang="en-US" sz="1600" b="1" dirty="0">
                 <a:solidFill>
-                  <a:schemeClr val="tx2"/>
-                </a:solidFill>
-              </a:rPr>
-              <a:t>10 · Surrogates</a:t>
+                  <a:srgbClr val="0B3C49"/>
+                </a:solidFill>
+              </a:rPr>
+              <a:t>5 · Organ physiology</a:t>
             </a:r>
             <a:endParaRPr lang="en-US" sz="1600" dirty="0"/>
           </a:p>
@@ -14061,13 +13451,13 @@
       </p:sp>
       <p:sp>
         <p:nvSpPr>
-          <p:cNvPr id="43" name="Text 31"/>
-          <p:cNvSpPr txBox="1"/>
-          <p:nvPr/>
-        </p:nvSpPr>
-        <p:spPr>
-          <a:xfrm>
-            <a:off x="1261872" y="5294376"/>
+          <p:cNvPr id="23" name="Text 11"/>
+          <p:cNvSpPr txBox="1"/>
+          <p:nvPr/>
+        </p:nvSpPr>
+        <p:spPr>
+          <a:xfrm>
+            <a:off x="5010912" y="3099816"/>
             <a:ext cx="2926080" cy="457200"/>
           </a:xfrm>
           <a:prstGeom prst="rect">
@@ -14086,43 +13476,18 @@
             <a:r>
               <a:rPr lang="en-US" sz="1400" dirty="0">
                 <a:solidFill>
-                  <a:schemeClr val="tx1"/>
-                </a:solidFill>
-              </a:rPr>
-              <a:t>POD, DMD, GP, neural</a:t>
+                  <a:srgbClr val="1B2430"/>
+                </a:solidFill>
+              </a:rPr>
+              <a:t>heart, cells, glucose, lungs</a:t>
             </a:r>
             <a:endParaRPr lang="en-US" sz="1400" dirty="0"/>
           </a:p>
         </p:txBody>
-      </p:sp>
-      <p:sp>
-        <p:nvSpPr>
-          <p:cNvPr id="44" name="icon circle"/>
-          <p:cNvSpPr/>
-          <p:nvPr/>
-        </p:nvSpPr>
-        <p:spPr>
-          <a:xfrm>
-            <a:off x="4297680" y="4946904"/>
-            <a:ext cx="548640" cy="548640"/>
-          </a:xfrm>
-          <a:prstGeom prst="ellipse">
-            <a:avLst/>
-          </a:prstGeom>
-          <a:solidFill>
-            <a:schemeClr val="accent2"/>
-          </a:solidFill>
-          <a:ln w="12700">
-            <a:solidFill>
-              <a:schemeClr val="accent2"/>
-            </a:solidFill>
-            <a:prstDash val="solid"/>
-          </a:ln>
-        </p:spPr>
       </p:sp>
       <p:pic>
         <p:nvPicPr>
-          <p:cNvPr id="45" name="icon" descr="preencoded.png">    </p:cNvPr>
+          <p:cNvPr id="24" name="icon circle" descr="preencoded.png">    </p:cNvPr>
           <p:cNvPicPr>
             <a:picLocks noChangeAspect="1"/>
           </p:cNvPicPr>
@@ -14136,114 +13501,17 @@
         </p:blipFill>
         <p:spPr>
           <a:xfrm>
-            <a:off x="4418381" y="5067605"/>
-            <a:ext cx="307238" cy="307238"/>
+            <a:off x="8046720" y="2752344"/>
+            <a:ext cx="548640" cy="548640"/>
           </a:xfrm>
           <a:prstGeom prst="rect">
             <a:avLst/>
           </a:prstGeom>
         </p:spPr>
       </p:pic>
-      <p:sp>
-        <p:nvSpPr>
-          <p:cNvPr id="46" name="Text 33"/>
-          <p:cNvSpPr txBox="1"/>
-          <p:nvPr/>
-        </p:nvSpPr>
-        <p:spPr>
-          <a:xfrm>
-            <a:off x="5010912" y="4892040"/>
-            <a:ext cx="2926080" cy="384048"/>
-          </a:xfrm>
-          <a:prstGeom prst="rect">
-            <a:avLst/>
-          </a:prstGeom>
-          <a:noFill/>
-          <a:ln/>
-        </p:spPr>
-        <p:txBody>
-          <a:bodyPr wrap="square" lIns="0" tIns="0" rIns="0" bIns="0" rtlCol="0" anchor="t"/>
-          <a:lstStyle/>
-          <a:p>
-            <a:pPr indent="0" marL="0">
-              <a:buNone/>
-            </a:pPr>
-            <a:r>
-              <a:rPr lang="en-US" sz="1600" b="1" dirty="0">
-                <a:solidFill>
-                  <a:schemeClr val="tx2"/>
-                </a:solidFill>
-              </a:rPr>
-              <a:t>11 · Virtual populations, trials</a:t>
-            </a:r>
-            <a:endParaRPr lang="en-US" sz="1600" dirty="0"/>
-          </a:p>
-        </p:txBody>
-      </p:sp>
-      <p:sp>
-        <p:nvSpPr>
-          <p:cNvPr id="47" name="Text 34"/>
-          <p:cNvSpPr txBox="1"/>
-          <p:nvPr/>
-        </p:nvSpPr>
-        <p:spPr>
-          <a:xfrm>
-            <a:off x="5010912" y="5294376"/>
-            <a:ext cx="2926080" cy="457200"/>
-          </a:xfrm>
-          <a:prstGeom prst="rect">
-            <a:avLst/>
-          </a:prstGeom>
-          <a:noFill/>
-          <a:ln/>
-        </p:spPr>
-        <p:txBody>
-          <a:bodyPr wrap="square" lIns="0" tIns="0" rIns="0" bIns="0" rtlCol="0" anchor="t"/>
-          <a:lstStyle/>
-          <a:p>
-            <a:pPr indent="0" marL="0">
-              <a:buNone/>
-            </a:pPr>
-            <a:r>
-              <a:rPr lang="en-US" sz="1400" dirty="0">
-                <a:solidFill>
-                  <a:schemeClr val="tx1"/>
-                </a:solidFill>
-              </a:rPr>
-              <a:t>cohorts, power, adaptive design</a:t>
-            </a:r>
-            <a:endParaRPr lang="en-US" sz="1400" dirty="0"/>
-          </a:p>
-        </p:txBody>
-      </p:sp>
-      <p:sp>
-        <p:nvSpPr>
-          <p:cNvPr id="48" name="icon circle"/>
-          <p:cNvSpPr/>
-          <p:nvPr/>
-        </p:nvSpPr>
-        <p:spPr>
-          <a:xfrm>
-            <a:off x="8046720" y="4946904"/>
-            <a:ext cx="548640" cy="548640"/>
-          </a:xfrm>
-          <a:prstGeom prst="ellipse">
-            <a:avLst/>
-          </a:prstGeom>
-          <a:solidFill>
-            <a:schemeClr val="accent2"/>
-          </a:solidFill>
-          <a:ln w="12700">
-            <a:solidFill>
-              <a:schemeClr val="accent2"/>
-            </a:solidFill>
-            <a:prstDash val="solid"/>
-          </a:ln>
-        </p:spPr>
-      </p:sp>
       <p:pic>
         <p:nvPicPr>
-          <p:cNvPr id="49" name="icon" descr="preencoded.png">    </p:cNvPr>
+          <p:cNvPr id="25" name="icon" descr="preencoded.png">    </p:cNvPr>
           <p:cNvPicPr>
             <a:picLocks noChangeAspect="1"/>
           </p:cNvPicPr>
@@ -14257,6 +13525,726 @@
         </p:blipFill>
         <p:spPr>
           <a:xfrm>
+            <a:off x="8167421" y="2873045"/>
+            <a:ext cx="307238" cy="307238"/>
+          </a:xfrm>
+          <a:prstGeom prst="rect">
+            <a:avLst/>
+          </a:prstGeom>
+        </p:spPr>
+      </p:pic>
+      <p:sp>
+        <p:nvSpPr>
+          <p:cNvPr id="26" name="Text 12"/>
+          <p:cNvSpPr txBox="1"/>
+          <p:nvPr/>
+        </p:nvSpPr>
+        <p:spPr>
+          <a:xfrm>
+            <a:off x="8759952" y="2697480"/>
+            <a:ext cx="2926080" cy="384048"/>
+          </a:xfrm>
+          <a:prstGeom prst="rect">
+            <a:avLst/>
+          </a:prstGeom>
+          <a:noFill/>
+          <a:ln/>
+        </p:spPr>
+        <p:txBody>
+          <a:bodyPr wrap="square" lIns="0" tIns="0" rIns="0" bIns="0" rtlCol="0" anchor="t"/>
+          <a:lstStyle/>
+          <a:p>
+            <a:pPr indent="0" marL="0">
+              <a:buNone/>
+            </a:pPr>
+            <a:r>
+              <a:rPr lang="en-US" sz="1600" b="1" dirty="0">
+                <a:solidFill>
+                  <a:srgbClr val="0B3C49"/>
+                </a:solidFill>
+              </a:rPr>
+              <a:t>6 · Continuum physics</a:t>
+            </a:r>
+            <a:endParaRPr lang="en-US" sz="1600" dirty="0"/>
+          </a:p>
+        </p:txBody>
+      </p:sp>
+      <p:sp>
+        <p:nvSpPr>
+          <p:cNvPr id="27" name="Text 13"/>
+          <p:cNvSpPr txBox="1"/>
+          <p:nvPr/>
+        </p:nvSpPr>
+        <p:spPr>
+          <a:xfrm>
+            <a:off x="8759952" y="3099816"/>
+            <a:ext cx="2926080" cy="457200"/>
+          </a:xfrm>
+          <a:prstGeom prst="rect">
+            <a:avLst/>
+          </a:prstGeom>
+          <a:noFill/>
+          <a:ln/>
+        </p:spPr>
+        <p:txBody>
+          <a:bodyPr wrap="square" lIns="0" tIns="0" rIns="0" bIns="0" rtlCol="0" anchor="t"/>
+          <a:lstStyle/>
+          <a:p>
+            <a:pPr indent="0" marL="0">
+              <a:buNone/>
+            </a:pPr>
+            <a:r>
+              <a:rPr lang="en-US" sz="1400" dirty="0">
+                <a:solidFill>
+                  <a:srgbClr val="1B2430"/>
+                </a:solidFill>
+              </a:rPr>
+              <a:t>mechanics, flow, transport, heat</a:t>
+            </a:r>
+            <a:endParaRPr lang="en-US" sz="1400" dirty="0"/>
+          </a:p>
+        </p:txBody>
+      </p:sp>
+      <p:pic>
+        <p:nvPicPr>
+          <p:cNvPr id="28" name="icon circle" descr="preencoded.png">    </p:cNvPr>
+          <p:cNvPicPr>
+            <a:picLocks noChangeAspect="1"/>
+          </p:cNvPicPr>
+          <p:nvPr/>
+        </p:nvPicPr>
+        <p:blipFill>
+          <a:blip r:embed="rId13"/>
+          <a:stretch>
+            <a:fillRect/>
+          </a:stretch>
+        </p:blipFill>
+        <p:spPr>
+          <a:xfrm>
+            <a:off x="548640" y="3849624"/>
+            <a:ext cx="548640" cy="548640"/>
+          </a:xfrm>
+          <a:prstGeom prst="rect">
+            <a:avLst/>
+          </a:prstGeom>
+        </p:spPr>
+      </p:pic>
+      <p:pic>
+        <p:nvPicPr>
+          <p:cNvPr id="29" name="icon" descr="preencoded.png">    </p:cNvPr>
+          <p:cNvPicPr>
+            <a:picLocks noChangeAspect="1"/>
+          </p:cNvPicPr>
+          <p:nvPr/>
+        </p:nvPicPr>
+        <p:blipFill>
+          <a:blip r:embed="rId14"/>
+          <a:stretch>
+            <a:fillRect/>
+          </a:stretch>
+        </p:blipFill>
+        <p:spPr>
+          <a:xfrm>
+            <a:off x="669341" y="3970325"/>
+            <a:ext cx="307238" cy="307238"/>
+          </a:xfrm>
+          <a:prstGeom prst="rect">
+            <a:avLst/>
+          </a:prstGeom>
+        </p:spPr>
+      </p:pic>
+      <p:sp>
+        <p:nvSpPr>
+          <p:cNvPr id="30" name="Text 14"/>
+          <p:cNvSpPr txBox="1"/>
+          <p:nvPr/>
+        </p:nvSpPr>
+        <p:spPr>
+          <a:xfrm>
+            <a:off x="1261872" y="3794760"/>
+            <a:ext cx="2926080" cy="384048"/>
+          </a:xfrm>
+          <a:prstGeom prst="rect">
+            <a:avLst/>
+          </a:prstGeom>
+          <a:noFill/>
+          <a:ln/>
+        </p:spPr>
+        <p:txBody>
+          <a:bodyPr wrap="square" lIns="0" tIns="0" rIns="0" bIns="0" rtlCol="0" anchor="t"/>
+          <a:lstStyle/>
+          <a:p>
+            <a:pPr indent="0" marL="0">
+              <a:buNone/>
+            </a:pPr>
+            <a:r>
+              <a:rPr lang="en-US" sz="1600" b="1" dirty="0">
+                <a:solidFill>
+                  <a:srgbClr val="0B3C49"/>
+                </a:solidFill>
+              </a:rPr>
+              <a:t>7 · Statistical models</a:t>
+            </a:r>
+            <a:endParaRPr lang="en-US" sz="1600" dirty="0"/>
+          </a:p>
+        </p:txBody>
+      </p:sp>
+      <p:sp>
+        <p:nvSpPr>
+          <p:cNvPr id="31" name="Text 15"/>
+          <p:cNvSpPr txBox="1"/>
+          <p:nvPr/>
+        </p:nvSpPr>
+        <p:spPr>
+          <a:xfrm>
+            <a:off x="1261872" y="4197096"/>
+            <a:ext cx="2926080" cy="457200"/>
+          </a:xfrm>
+          <a:prstGeom prst="rect">
+            <a:avLst/>
+          </a:prstGeom>
+          <a:noFill/>
+          <a:ln/>
+        </p:spPr>
+        <p:txBody>
+          <a:bodyPr wrap="square" lIns="0" tIns="0" rIns="0" bIns="0" rtlCol="0" anchor="t"/>
+          <a:lstStyle/>
+          <a:p>
+            <a:pPr indent="0" marL="0">
+              <a:buNone/>
+            </a:pPr>
+            <a:r>
+              <a:rPr lang="en-US" sz="1400" dirty="0">
+                <a:solidFill>
+                  <a:srgbClr val="1B2430"/>
+                </a:solidFill>
+              </a:rPr>
+              <a:t>mixed effects, GLM, survival</a:t>
+            </a:r>
+            <a:endParaRPr lang="en-US" sz="1400" dirty="0"/>
+          </a:p>
+        </p:txBody>
+      </p:sp>
+      <p:pic>
+        <p:nvPicPr>
+          <p:cNvPr id="32" name="icon circle" descr="preencoded.png">    </p:cNvPr>
+          <p:cNvPicPr>
+            <a:picLocks noChangeAspect="1"/>
+          </p:cNvPicPr>
+          <p:nvPr/>
+        </p:nvPicPr>
+        <p:blipFill>
+          <a:blip r:embed="rId15"/>
+          <a:stretch>
+            <a:fillRect/>
+          </a:stretch>
+        </p:blipFill>
+        <p:spPr>
+          <a:xfrm>
+            <a:off x="4297680" y="3849624"/>
+            <a:ext cx="548640" cy="548640"/>
+          </a:xfrm>
+          <a:prstGeom prst="rect">
+            <a:avLst/>
+          </a:prstGeom>
+        </p:spPr>
+      </p:pic>
+      <p:pic>
+        <p:nvPicPr>
+          <p:cNvPr id="33" name="icon" descr="preencoded.png">    </p:cNvPr>
+          <p:cNvPicPr>
+            <a:picLocks noChangeAspect="1"/>
+          </p:cNvPicPr>
+          <p:nvPr/>
+        </p:nvPicPr>
+        <p:blipFill>
+          <a:blip r:embed="rId16"/>
+          <a:stretch>
+            <a:fillRect/>
+          </a:stretch>
+        </p:blipFill>
+        <p:spPr>
+          <a:xfrm>
+            <a:off x="4418381" y="3970325"/>
+            <a:ext cx="307238" cy="307238"/>
+          </a:xfrm>
+          <a:prstGeom prst="rect">
+            <a:avLst/>
+          </a:prstGeom>
+        </p:spPr>
+      </p:pic>
+      <p:sp>
+        <p:nvSpPr>
+          <p:cNvPr id="34" name="Text 16"/>
+          <p:cNvSpPr txBox="1"/>
+          <p:nvPr/>
+        </p:nvSpPr>
+        <p:spPr>
+          <a:xfrm>
+            <a:off x="5010912" y="3794760"/>
+            <a:ext cx="2926080" cy="384048"/>
+          </a:xfrm>
+          <a:prstGeom prst="rect">
+            <a:avLst/>
+          </a:prstGeom>
+          <a:noFill/>
+          <a:ln/>
+        </p:spPr>
+        <p:txBody>
+          <a:bodyPr wrap="square" lIns="0" tIns="0" rIns="0" bIns="0" rtlCol="0" anchor="t"/>
+          <a:lstStyle/>
+          <a:p>
+            <a:pPr indent="0" marL="0">
+              <a:buNone/>
+            </a:pPr>
+            <a:r>
+              <a:rPr lang="en-US" sz="1600" b="1" dirty="0">
+                <a:solidFill>
+                  <a:srgbClr val="0B3C49"/>
+                </a:solidFill>
+              </a:rPr>
+              <a:t>8 · Data assimilation</a:t>
+            </a:r>
+            <a:endParaRPr lang="en-US" sz="1600" dirty="0"/>
+          </a:p>
+        </p:txBody>
+      </p:sp>
+      <p:sp>
+        <p:nvSpPr>
+          <p:cNvPr id="35" name="Text 17"/>
+          <p:cNvSpPr txBox="1"/>
+          <p:nvPr/>
+        </p:nvSpPr>
+        <p:spPr>
+          <a:xfrm>
+            <a:off x="5010912" y="4197096"/>
+            <a:ext cx="2926080" cy="457200"/>
+          </a:xfrm>
+          <a:prstGeom prst="rect">
+            <a:avLst/>
+          </a:prstGeom>
+          <a:noFill/>
+          <a:ln/>
+        </p:spPr>
+        <p:txBody>
+          <a:bodyPr wrap="square" lIns="0" tIns="0" rIns="0" bIns="0" rtlCol="0" anchor="t"/>
+          <a:lstStyle/>
+          <a:p>
+            <a:pPr indent="0" marL="0">
+              <a:buNone/>
+            </a:pPr>
+            <a:r>
+              <a:rPr lang="en-US" sz="1400" dirty="0">
+                <a:solidFill>
+                  <a:srgbClr val="1B2430"/>
+                </a:solidFill>
+              </a:rPr>
+              <a:t>Kalman, particle, variational</a:t>
+            </a:r>
+            <a:endParaRPr lang="en-US" sz="1400" dirty="0"/>
+          </a:p>
+        </p:txBody>
+      </p:sp>
+      <p:pic>
+        <p:nvPicPr>
+          <p:cNvPr id="36" name="icon circle" descr="preencoded.png">    </p:cNvPr>
+          <p:cNvPicPr>
+            <a:picLocks noChangeAspect="1"/>
+          </p:cNvPicPr>
+          <p:nvPr/>
+        </p:nvPicPr>
+        <p:blipFill>
+          <a:blip r:embed="rId17"/>
+          <a:stretch>
+            <a:fillRect/>
+          </a:stretch>
+        </p:blipFill>
+        <p:spPr>
+          <a:xfrm>
+            <a:off x="8046720" y="3849624"/>
+            <a:ext cx="548640" cy="548640"/>
+          </a:xfrm>
+          <a:prstGeom prst="rect">
+            <a:avLst/>
+          </a:prstGeom>
+        </p:spPr>
+      </p:pic>
+      <p:pic>
+        <p:nvPicPr>
+          <p:cNvPr id="37" name="icon" descr="preencoded.png">    </p:cNvPr>
+          <p:cNvPicPr>
+            <a:picLocks noChangeAspect="1"/>
+          </p:cNvPicPr>
+          <p:nvPr/>
+        </p:nvPicPr>
+        <p:blipFill>
+          <a:blip r:embed="rId18"/>
+          <a:stretch>
+            <a:fillRect/>
+          </a:stretch>
+        </p:blipFill>
+        <p:spPr>
+          <a:xfrm>
+            <a:off x="8167421" y="3970325"/>
+            <a:ext cx="307238" cy="307238"/>
+          </a:xfrm>
+          <a:prstGeom prst="rect">
+            <a:avLst/>
+          </a:prstGeom>
+        </p:spPr>
+      </p:pic>
+      <p:sp>
+        <p:nvSpPr>
+          <p:cNvPr id="38" name="Text 18"/>
+          <p:cNvSpPr txBox="1"/>
+          <p:nvPr/>
+        </p:nvSpPr>
+        <p:spPr>
+          <a:xfrm>
+            <a:off x="8759952" y="3794760"/>
+            <a:ext cx="2926080" cy="384048"/>
+          </a:xfrm>
+          <a:prstGeom prst="rect">
+            <a:avLst/>
+          </a:prstGeom>
+          <a:noFill/>
+          <a:ln/>
+        </p:spPr>
+        <p:txBody>
+          <a:bodyPr wrap="square" lIns="0" tIns="0" rIns="0" bIns="0" rtlCol="0" anchor="t"/>
+          <a:lstStyle/>
+          <a:p>
+            <a:pPr indent="0" marL="0">
+              <a:buNone/>
+            </a:pPr>
+            <a:r>
+              <a:rPr lang="en-US" sz="1600" b="1" dirty="0">
+                <a:solidFill>
+                  <a:srgbClr val="0B3C49"/>
+                </a:solidFill>
+              </a:rPr>
+              <a:t>9 · Uncertainty, sensitivity</a:t>
+            </a:r>
+            <a:endParaRPr lang="en-US" sz="1600" dirty="0"/>
+          </a:p>
+        </p:txBody>
+      </p:sp>
+      <p:sp>
+        <p:nvSpPr>
+          <p:cNvPr id="39" name="Text 19"/>
+          <p:cNvSpPr txBox="1"/>
+          <p:nvPr/>
+        </p:nvSpPr>
+        <p:spPr>
+          <a:xfrm>
+            <a:off x="8759952" y="4197096"/>
+            <a:ext cx="2926080" cy="457200"/>
+          </a:xfrm>
+          <a:prstGeom prst="rect">
+            <a:avLst/>
+          </a:prstGeom>
+          <a:noFill/>
+          <a:ln/>
+        </p:spPr>
+        <p:txBody>
+          <a:bodyPr wrap="square" lIns="0" tIns="0" rIns="0" bIns="0" rtlCol="0" anchor="t"/>
+          <a:lstStyle/>
+          <a:p>
+            <a:pPr indent="0" marL="0">
+              <a:buNone/>
+            </a:pPr>
+            <a:r>
+              <a:rPr lang="en-US" sz="1400" dirty="0">
+                <a:solidFill>
+                  <a:srgbClr val="1B2430"/>
+                </a:solidFill>
+              </a:rPr>
+              <a:t>Monte Carlo, Sobol, chaos</a:t>
+            </a:r>
+            <a:endParaRPr lang="en-US" sz="1400" dirty="0"/>
+          </a:p>
+        </p:txBody>
+      </p:sp>
+      <p:pic>
+        <p:nvPicPr>
+          <p:cNvPr id="40" name="icon circle" descr="preencoded.png">    </p:cNvPr>
+          <p:cNvPicPr>
+            <a:picLocks noChangeAspect="1"/>
+          </p:cNvPicPr>
+          <p:nvPr/>
+        </p:nvPicPr>
+        <p:blipFill>
+          <a:blip r:embed="rId19"/>
+          <a:stretch>
+            <a:fillRect/>
+          </a:stretch>
+        </p:blipFill>
+        <p:spPr>
+          <a:xfrm>
+            <a:off x="548640" y="4946904"/>
+            <a:ext cx="548640" cy="548640"/>
+          </a:xfrm>
+          <a:prstGeom prst="rect">
+            <a:avLst/>
+          </a:prstGeom>
+        </p:spPr>
+      </p:pic>
+      <p:pic>
+        <p:nvPicPr>
+          <p:cNvPr id="41" name="icon" descr="preencoded.png">    </p:cNvPr>
+          <p:cNvPicPr>
+            <a:picLocks noChangeAspect="1"/>
+          </p:cNvPicPr>
+          <p:nvPr/>
+        </p:nvPicPr>
+        <p:blipFill>
+          <a:blip r:embed="rId20"/>
+          <a:stretch>
+            <a:fillRect/>
+          </a:stretch>
+        </p:blipFill>
+        <p:spPr>
+          <a:xfrm>
+            <a:off x="669341" y="5067605"/>
+            <a:ext cx="307238" cy="307238"/>
+          </a:xfrm>
+          <a:prstGeom prst="rect">
+            <a:avLst/>
+          </a:prstGeom>
+        </p:spPr>
+      </p:pic>
+      <p:sp>
+        <p:nvSpPr>
+          <p:cNvPr id="42" name="Text 20"/>
+          <p:cNvSpPr txBox="1"/>
+          <p:nvPr/>
+        </p:nvSpPr>
+        <p:spPr>
+          <a:xfrm>
+            <a:off x="1261872" y="4892040"/>
+            <a:ext cx="2926080" cy="384048"/>
+          </a:xfrm>
+          <a:prstGeom prst="rect">
+            <a:avLst/>
+          </a:prstGeom>
+          <a:noFill/>
+          <a:ln/>
+        </p:spPr>
+        <p:txBody>
+          <a:bodyPr wrap="square" lIns="0" tIns="0" rIns="0" bIns="0" rtlCol="0" anchor="t"/>
+          <a:lstStyle/>
+          <a:p>
+            <a:pPr indent="0" marL="0">
+              <a:buNone/>
+            </a:pPr>
+            <a:r>
+              <a:rPr lang="en-US" sz="1600" b="1" dirty="0">
+                <a:solidFill>
+                  <a:srgbClr val="0B3C49"/>
+                </a:solidFill>
+              </a:rPr>
+              <a:t>10 · Surrogates</a:t>
+            </a:r>
+            <a:endParaRPr lang="en-US" sz="1600" dirty="0"/>
+          </a:p>
+        </p:txBody>
+      </p:sp>
+      <p:sp>
+        <p:nvSpPr>
+          <p:cNvPr id="43" name="Text 21"/>
+          <p:cNvSpPr txBox="1"/>
+          <p:nvPr/>
+        </p:nvSpPr>
+        <p:spPr>
+          <a:xfrm>
+            <a:off x="1261872" y="5294376"/>
+            <a:ext cx="2926080" cy="457200"/>
+          </a:xfrm>
+          <a:prstGeom prst="rect">
+            <a:avLst/>
+          </a:prstGeom>
+          <a:noFill/>
+          <a:ln/>
+        </p:spPr>
+        <p:txBody>
+          <a:bodyPr wrap="square" lIns="0" tIns="0" rIns="0" bIns="0" rtlCol="0" anchor="t"/>
+          <a:lstStyle/>
+          <a:p>
+            <a:pPr indent="0" marL="0">
+              <a:buNone/>
+            </a:pPr>
+            <a:r>
+              <a:rPr lang="en-US" sz="1400" dirty="0">
+                <a:solidFill>
+                  <a:srgbClr val="1B2430"/>
+                </a:solidFill>
+              </a:rPr>
+              <a:t>POD, DMD, GP, neural</a:t>
+            </a:r>
+            <a:endParaRPr lang="en-US" sz="1400" dirty="0"/>
+          </a:p>
+        </p:txBody>
+      </p:sp>
+      <p:pic>
+        <p:nvPicPr>
+          <p:cNvPr id="44" name="icon circle" descr="preencoded.png">    </p:cNvPr>
+          <p:cNvPicPr>
+            <a:picLocks noChangeAspect="1"/>
+          </p:cNvPicPr>
+          <p:nvPr/>
+        </p:nvPicPr>
+        <p:blipFill>
+          <a:blip r:embed="rId21"/>
+          <a:stretch>
+            <a:fillRect/>
+          </a:stretch>
+        </p:blipFill>
+        <p:spPr>
+          <a:xfrm>
+            <a:off x="4297680" y="4946904"/>
+            <a:ext cx="548640" cy="548640"/>
+          </a:xfrm>
+          <a:prstGeom prst="rect">
+            <a:avLst/>
+          </a:prstGeom>
+        </p:spPr>
+      </p:pic>
+      <p:pic>
+        <p:nvPicPr>
+          <p:cNvPr id="45" name="icon" descr="preencoded.png">    </p:cNvPr>
+          <p:cNvPicPr>
+            <a:picLocks noChangeAspect="1"/>
+          </p:cNvPicPr>
+          <p:nvPr/>
+        </p:nvPicPr>
+        <p:blipFill>
+          <a:blip r:embed="rId22"/>
+          <a:stretch>
+            <a:fillRect/>
+          </a:stretch>
+        </p:blipFill>
+        <p:spPr>
+          <a:xfrm>
+            <a:off x="4418381" y="5067605"/>
+            <a:ext cx="307238" cy="307238"/>
+          </a:xfrm>
+          <a:prstGeom prst="rect">
+            <a:avLst/>
+          </a:prstGeom>
+        </p:spPr>
+      </p:pic>
+      <p:sp>
+        <p:nvSpPr>
+          <p:cNvPr id="46" name="Text 22"/>
+          <p:cNvSpPr txBox="1"/>
+          <p:nvPr/>
+        </p:nvSpPr>
+        <p:spPr>
+          <a:xfrm>
+            <a:off x="5010912" y="4892040"/>
+            <a:ext cx="2926080" cy="384048"/>
+          </a:xfrm>
+          <a:prstGeom prst="rect">
+            <a:avLst/>
+          </a:prstGeom>
+          <a:noFill/>
+          <a:ln/>
+        </p:spPr>
+        <p:txBody>
+          <a:bodyPr wrap="square" lIns="0" tIns="0" rIns="0" bIns="0" rtlCol="0" anchor="t"/>
+          <a:lstStyle/>
+          <a:p>
+            <a:pPr indent="0" marL="0">
+              <a:buNone/>
+            </a:pPr>
+            <a:r>
+              <a:rPr lang="en-US" sz="1600" b="1" dirty="0">
+                <a:solidFill>
+                  <a:srgbClr val="0B3C49"/>
+                </a:solidFill>
+              </a:rPr>
+              <a:t>11 · Virtual populations, trials</a:t>
+            </a:r>
+            <a:endParaRPr lang="en-US" sz="1600" dirty="0"/>
+          </a:p>
+        </p:txBody>
+      </p:sp>
+      <p:sp>
+        <p:nvSpPr>
+          <p:cNvPr id="47" name="Text 23"/>
+          <p:cNvSpPr txBox="1"/>
+          <p:nvPr/>
+        </p:nvSpPr>
+        <p:spPr>
+          <a:xfrm>
+            <a:off x="5010912" y="5294376"/>
+            <a:ext cx="2926080" cy="457200"/>
+          </a:xfrm>
+          <a:prstGeom prst="rect">
+            <a:avLst/>
+          </a:prstGeom>
+          <a:noFill/>
+          <a:ln/>
+        </p:spPr>
+        <p:txBody>
+          <a:bodyPr wrap="square" lIns="0" tIns="0" rIns="0" bIns="0" rtlCol="0" anchor="t"/>
+          <a:lstStyle/>
+          <a:p>
+            <a:pPr indent="0" marL="0">
+              <a:buNone/>
+            </a:pPr>
+            <a:r>
+              <a:rPr lang="en-US" sz="1400" dirty="0">
+                <a:solidFill>
+                  <a:srgbClr val="1B2430"/>
+                </a:solidFill>
+              </a:rPr>
+              <a:t>cohorts, power, adaptive design</a:t>
+            </a:r>
+            <a:endParaRPr lang="en-US" sz="1400" dirty="0"/>
+          </a:p>
+        </p:txBody>
+      </p:sp>
+      <p:pic>
+        <p:nvPicPr>
+          <p:cNvPr id="48" name="icon circle" descr="preencoded.png">    </p:cNvPr>
+          <p:cNvPicPr>
+            <a:picLocks noChangeAspect="1"/>
+          </p:cNvPicPr>
+          <p:nvPr/>
+        </p:nvPicPr>
+        <p:blipFill>
+          <a:blip r:embed="rId23"/>
+          <a:stretch>
+            <a:fillRect/>
+          </a:stretch>
+        </p:blipFill>
+        <p:spPr>
+          <a:xfrm>
+            <a:off x="8046720" y="4946904"/>
+            <a:ext cx="548640" cy="548640"/>
+          </a:xfrm>
+          <a:prstGeom prst="rect">
+            <a:avLst/>
+          </a:prstGeom>
+        </p:spPr>
+      </p:pic>
+      <p:pic>
+        <p:nvPicPr>
+          <p:cNvPr id="49" name="icon" descr="preencoded.png">    </p:cNvPr>
+          <p:cNvPicPr>
+            <a:picLocks noChangeAspect="1"/>
+          </p:cNvPicPr>
+          <p:nvPr/>
+        </p:nvPicPr>
+        <p:blipFill>
+          <a:blip r:embed="rId24"/>
+          <a:stretch>
+            <a:fillRect/>
+          </a:stretch>
+        </p:blipFill>
+        <p:spPr>
+          <a:xfrm>
             <a:off x="8167421" y="5067605"/>
             <a:ext cx="307238" cy="307238"/>
           </a:xfrm>
@@ -14267,7 +14255,7 @@
       </p:pic>
       <p:sp>
         <p:nvSpPr>
-          <p:cNvPr id="50" name="Text 36"/>
+          <p:cNvPr id="50" name="Text 24"/>
           <p:cNvSpPr txBox="1"/>
           <p:nvPr/>
         </p:nvSpPr>
@@ -14292,7 +14280,7 @@
             <a:r>
               <a:rPr lang="en-US" sz="1600" b="1" dirty="0">
                 <a:solidFill>
-                  <a:schemeClr val="tx2"/>
+                  <a:srgbClr val="0B3C49"/>
                 </a:solidFill>
               </a:rPr>
               <a:t>12 · Control and validation</a:t>
@@ -14303,7 +14291,7 @@
       </p:sp>
       <p:sp>
         <p:nvSpPr>
-          <p:cNvPr id="51" name="Text 37"/>
+          <p:cNvPr id="51" name="Text 25"/>
           <p:cNvSpPr txBox="1"/>
           <p:nvPr/>
         </p:nvSpPr>
@@ -14328,7 +14316,7 @@
             <a:r>
               <a:rPr lang="en-US" sz="1400" dirty="0">
                 <a:solidFill>
-                  <a:schemeClr val="tx1"/>
+                  <a:srgbClr val="1B2430"/>
                 </a:solidFill>
               </a:rPr>
               <a:t>MPC, RL, fit, credibility</a:t>
@@ -14367,7 +14355,7 @@
             <a:lvl1pPr>
               <a:defRPr sz="1000">
                 <a:solidFill>
-                  <a:schemeClr val="accent6"/>
+                  <a:srgbClr val="5F6B76"/>
                 </a:solidFill>
               </a:defRPr>
             </a:lvl1pPr>
@@ -14436,7 +14424,7 @@
             <a:r>
               <a:rPr lang="en-US" sz="1300" b="1" dirty="0">
                 <a:solidFill>
-                  <a:schemeClr val="accent2"/>
+                  <a:srgbClr val="1F7A70"/>
                 </a:solidFill>
               </a:rPr>
               <a:t>FAMILY 9 · SENSITIVITY ANALYSIS</a:t>
@@ -14474,7 +14462,7 @@
             <a:r>
               <a:rPr lang="en-US" sz="3600" b="1" dirty="0">
                 <a:solidFill>
-                  <a:schemeClr val="tx2"/>
+                  <a:srgbClr val="0B3C49"/>
                 </a:solidFill>
               </a:rPr>
               <a:t>Which inputs drive the output?</a:t>
@@ -14494,17 +14482,17 @@
             <a:off x="548640" y="1554480"/>
             <a:ext cx="5394960" cy="2240280"/>
           </a:xfrm>
-          <a:prstGeom prst="roundRect">
+          <a:prstGeom prst="rect">
             <a:avLst>
               <a:gd name="adj" fmla="val 3265"/>
             </a:avLst>
           </a:prstGeom>
           <a:solidFill>
-            <a:schemeClr val="bg2"/>
+            <a:srgbClr val="EEF4F5"/>
           </a:solidFill>
           <a:ln w="12700">
             <a:solidFill>
-              <a:schemeClr val="bg2"/>
+              <a:srgbClr val="EEF4F5"/>
             </a:solidFill>
             <a:prstDash val="solid"/>
           </a:ln>
@@ -14537,7 +14525,7 @@
             <a:r>
               <a:rPr lang="en-US" sz="1600" b="1" dirty="0">
                 <a:solidFill>
-                  <a:schemeClr val="tx2"/>
+                  <a:srgbClr val="0B3C49"/>
                 </a:solidFill>
               </a:rPr>
               <a:t>Local (normalised) sensitivity</a:t>
@@ -14561,7 +14549,7 @@
             <a:avLst/>
           </a:prstGeom>
           <a:solidFill>
-            <a:schemeClr val="bg1"/>
+            <a:srgbClr val="FFFFFF"/>
           </a:solidFill>
           <a:ln/>
         </p:spPr>
@@ -14575,7 +14563,7 @@
             <a:r>
               <a:rPr lang="en-US" sz="1600" dirty="0">
                 <a:solidFill>
-                  <a:schemeClr val="accent4"/>
+                  <a:srgbClr val="264653"/>
                 </a:solidFill>
                 <a:latin typeface="+mj-lt" pitchFamily="34" charset="0"/>
                 <a:ea typeface="+mj-lt" pitchFamily="34" charset="-122"/>
@@ -14614,7 +14602,7 @@
             <a:r>
               <a:rPr lang="en-US" sz="1400" dirty="0">
                 <a:solidFill>
-                  <a:schemeClr val="tx1"/>
+                  <a:srgbClr val="1B2430"/>
                 </a:solidFill>
               </a:rPr>
               <a:t>Percent change in output per percent change in a parameter, at one point. Cheap but local.</a:t>
@@ -14634,17 +14622,17 @@
             <a:off x="6217920" y="1554480"/>
             <a:ext cx="5394960" cy="2240280"/>
           </a:xfrm>
-          <a:prstGeom prst="roundRect">
+          <a:prstGeom prst="rect">
             <a:avLst>
               <a:gd name="adj" fmla="val 3265"/>
             </a:avLst>
           </a:prstGeom>
           <a:solidFill>
-            <a:schemeClr val="bg2"/>
+            <a:srgbClr val="EEF4F5"/>
           </a:solidFill>
           <a:ln w="12700">
             <a:solidFill>
-              <a:schemeClr val="bg2"/>
+              <a:srgbClr val="EEF4F5"/>
             </a:solidFill>
             <a:prstDash val="solid"/>
           </a:ln>
@@ -14677,7 +14665,7 @@
             <a:r>
               <a:rPr lang="en-US" sz="1600" b="1" dirty="0">
                 <a:solidFill>
-                  <a:schemeClr val="tx2"/>
+                  <a:srgbClr val="0B3C49"/>
                 </a:solidFill>
               </a:rPr>
               <a:t>Morris elementary effects</a:t>
@@ -14701,7 +14689,7 @@
             <a:avLst/>
           </a:prstGeom>
           <a:solidFill>
-            <a:schemeClr val="bg1"/>
+            <a:srgbClr val="FFFFFF"/>
           </a:solidFill>
           <a:ln/>
         </p:spPr>
@@ -14715,7 +14703,7 @@
             <a:r>
               <a:rPr lang="en-US" sz="1600" dirty="0">
                 <a:solidFill>
-                  <a:schemeClr val="accent4"/>
+                  <a:srgbClr val="264653"/>
                 </a:solidFill>
                 <a:latin typeface="+mj-lt" pitchFamily="34" charset="0"/>
                 <a:ea typeface="+mj-lt" pitchFamily="34" charset="-122"/>
@@ -14754,7 +14742,7 @@
             <a:r>
               <a:rPr lang="en-US" sz="1400" dirty="0">
                 <a:solidFill>
-                  <a:schemeClr val="tx1"/>
+                  <a:srgbClr val="1B2430"/>
                 </a:solidFill>
               </a:rPr>
               <a:t>Global screening with few runs: μ* ranks importance, σ flags nonlinearity and interactions.</a:t>
@@ -14774,17 +14762,17 @@
             <a:off x="548640" y="4023360"/>
             <a:ext cx="5394960" cy="2240280"/>
           </a:xfrm>
-          <a:prstGeom prst="roundRect">
+          <a:prstGeom prst="rect">
             <a:avLst>
               <a:gd name="adj" fmla="val 3265"/>
             </a:avLst>
           </a:prstGeom>
           <a:solidFill>
-            <a:schemeClr val="bg2"/>
+            <a:srgbClr val="EEF4F5"/>
           </a:solidFill>
           <a:ln w="12700">
             <a:solidFill>
-              <a:schemeClr val="bg2"/>
+              <a:srgbClr val="EEF4F5"/>
             </a:solidFill>
             <a:prstDash val="solid"/>
           </a:ln>
@@ -14817,7 +14805,7 @@
             <a:r>
               <a:rPr lang="en-US" sz="1600" b="1" dirty="0">
                 <a:solidFill>
-                  <a:schemeClr val="tx2"/>
+                  <a:srgbClr val="0B3C49"/>
                 </a:solidFill>
               </a:rPr>
               <a:t>Sobol variance indices</a:t>
@@ -14841,7 +14829,7 @@
             <a:avLst/>
           </a:prstGeom>
           <a:solidFill>
-            <a:schemeClr val="bg1"/>
+            <a:srgbClr val="FFFFFF"/>
           </a:solidFill>
           <a:ln/>
         </p:spPr>
@@ -14855,7 +14843,7 @@
             <a:r>
               <a:rPr lang="en-US" sz="1600" dirty="0">
                 <a:solidFill>
-                  <a:schemeClr val="accent4"/>
+                  <a:srgbClr val="264653"/>
                 </a:solidFill>
                 <a:latin typeface="+mj-lt" pitchFamily="34" charset="0"/>
                 <a:ea typeface="+mj-lt" pitchFamily="34" charset="-122"/>
@@ -14872,7 +14860,7 @@
             <a:r>
               <a:rPr lang="en-US" sz="1600" dirty="0">
                 <a:solidFill>
-                  <a:schemeClr val="accent4"/>
+                  <a:srgbClr val="264653"/>
                 </a:solidFill>
                 <a:latin typeface="+mj-lt" pitchFamily="34" charset="0"/>
                 <a:ea typeface="+mj-lt" pitchFamily="34" charset="-122"/>
@@ -14911,7 +14899,7 @@
             <a:r>
               <a:rPr lang="en-US" sz="1400" dirty="0">
                 <a:solidFill>
-                  <a:schemeClr val="tx1"/>
+                  <a:srgbClr val="1B2430"/>
                 </a:solidFill>
               </a:rPr>
               <a:t>First-order and total effects; the reference global method (Saltelli estimators).</a:t>
@@ -14931,17 +14919,17 @@
             <a:off x="6217920" y="4023360"/>
             <a:ext cx="5394960" cy="2240280"/>
           </a:xfrm>
-          <a:prstGeom prst="roundRect">
+          <a:prstGeom prst="rect">
             <a:avLst>
               <a:gd name="adj" fmla="val 3265"/>
             </a:avLst>
           </a:prstGeom>
           <a:solidFill>
-            <a:schemeClr val="bg2"/>
+            <a:srgbClr val="EEF4F5"/>
           </a:solidFill>
           <a:ln w="12700">
             <a:solidFill>
-              <a:schemeClr val="bg2"/>
+              <a:srgbClr val="EEF4F5"/>
             </a:solidFill>
             <a:prstDash val="solid"/>
           </a:ln>
@@ -14974,7 +14962,7 @@
             <a:r>
               <a:rPr lang="en-US" sz="1600" b="1" dirty="0">
                 <a:solidFill>
-                  <a:schemeClr val="tx2"/>
+                  <a:srgbClr val="0B3C49"/>
                 </a:solidFill>
               </a:rPr>
               <a:t>PRCC</a:t>
@@ -14998,7 +14986,7 @@
             <a:avLst/>
           </a:prstGeom>
           <a:solidFill>
-            <a:schemeClr val="bg1"/>
+            <a:srgbClr val="FFFFFF"/>
           </a:solidFill>
           <a:ln/>
         </p:spPr>
@@ -15012,7 +15000,7 @@
             <a:r>
               <a:rPr lang="en-US" sz="1600" dirty="0">
                 <a:solidFill>
-                  <a:schemeClr val="accent4"/>
+                  <a:srgbClr val="264653"/>
                 </a:solidFill>
                 <a:latin typeface="+mj-lt" pitchFamily="34" charset="0"/>
                 <a:ea typeface="+mj-lt" pitchFamily="34" charset="-122"/>
@@ -15051,7 +15039,7 @@
             <a:r>
               <a:rPr lang="en-US" sz="1400" dirty="0">
                 <a:solidFill>
-                  <a:schemeClr val="tx1"/>
+                  <a:srgbClr val="1B2430"/>
                 </a:solidFill>
               </a:rPr>
               <a:t>Partial rank correlation with Latin hypercube sampling; monotonic relations, common in biology.</a:t>
@@ -15090,7 +15078,7 @@
             <a:lvl1pPr>
               <a:defRPr sz="1000">
                 <a:solidFill>
-                  <a:schemeClr val="accent6"/>
+                  <a:srgbClr val="5F6B76"/>
                 </a:solidFill>
               </a:defRPr>
             </a:lvl1pPr>
@@ -15159,7 +15147,7 @@
             <a:r>
               <a:rPr lang="en-US" sz="1300" b="1" dirty="0">
                 <a:solidFill>
-                  <a:schemeClr val="accent2"/>
+                  <a:srgbClr val="1F7A70"/>
                 </a:solidFill>
               </a:rPr>
               <a:t>FAMILY 10 · SURROGATES AND REDUCED-ORDER MODELS</a:t>
@@ -15197,7 +15185,7 @@
             <a:r>
               <a:rPr lang="en-US" sz="3600" b="1" dirty="0">
                 <a:solidFill>
-                  <a:schemeClr val="tx2"/>
+                  <a:srgbClr val="0B3C49"/>
                 </a:solidFill>
               </a:rPr>
               <a:t>Making twins fast enough to use</a:t>
@@ -15217,17 +15205,17 @@
             <a:off x="548640" y="1554480"/>
             <a:ext cx="5394960" cy="2240280"/>
           </a:xfrm>
-          <a:prstGeom prst="roundRect">
+          <a:prstGeom prst="rect">
             <a:avLst>
               <a:gd name="adj" fmla="val 3265"/>
             </a:avLst>
           </a:prstGeom>
           <a:solidFill>
-            <a:schemeClr val="bg2"/>
+            <a:srgbClr val="EEF4F5"/>
           </a:solidFill>
           <a:ln w="12700">
             <a:solidFill>
-              <a:schemeClr val="bg2"/>
+              <a:srgbClr val="EEF4F5"/>
             </a:solidFill>
             <a:prstDash val="solid"/>
           </a:ln>
@@ -15260,7 +15248,7 @@
             <a:r>
               <a:rPr lang="en-US" sz="1600" b="1" dirty="0">
                 <a:solidFill>
-                  <a:schemeClr val="tx2"/>
+                  <a:srgbClr val="0B3C49"/>
                 </a:solidFill>
               </a:rPr>
               <a:t>POD / PCA reduced basis</a:t>
@@ -15284,7 +15272,7 @@
             <a:avLst/>
           </a:prstGeom>
           <a:solidFill>
-            <a:schemeClr val="bg1"/>
+            <a:srgbClr val="FFFFFF"/>
           </a:solidFill>
           <a:ln/>
         </p:spPr>
@@ -15298,7 +15286,7 @@
             <a:r>
               <a:rPr lang="en-US" sz="1600" dirty="0">
                 <a:solidFill>
-                  <a:schemeClr val="accent4"/>
+                  <a:srgbClr val="264653"/>
                 </a:solidFill>
                 <a:latin typeface="+mj-lt" pitchFamily="34" charset="0"/>
                 <a:ea typeface="+mj-lt" pitchFamily="34" charset="-122"/>
@@ -15315,7 +15303,7 @@
             <a:r>
               <a:rPr lang="en-US" sz="1600" dirty="0">
                 <a:solidFill>
-                  <a:schemeClr val="accent4"/>
+                  <a:srgbClr val="264653"/>
                 </a:solidFill>
                 <a:latin typeface="+mj-lt" pitchFamily="34" charset="0"/>
                 <a:ea typeface="+mj-lt" pitchFamily="34" charset="-122"/>
@@ -15354,7 +15342,7 @@
             <a:r>
               <a:rPr lang="en-US" sz="1400" dirty="0">
                 <a:solidFill>
-                  <a:schemeClr val="tx1"/>
+                  <a:srgbClr val="1B2430"/>
                 </a:solidFill>
               </a:rPr>
               <a:t>Project PDE onto a few dominant modes; Galerkin ROMs run orders of magnitude faster.</a:t>
@@ -15374,17 +15362,17 @@
             <a:off x="6217920" y="1554480"/>
             <a:ext cx="5394960" cy="2240280"/>
           </a:xfrm>
-          <a:prstGeom prst="roundRect">
+          <a:prstGeom prst="rect">
             <a:avLst>
               <a:gd name="adj" fmla="val 3265"/>
             </a:avLst>
           </a:prstGeom>
           <a:solidFill>
-            <a:schemeClr val="bg2"/>
+            <a:srgbClr val="EEF4F5"/>
           </a:solidFill>
           <a:ln w="12700">
             <a:solidFill>
-              <a:schemeClr val="bg2"/>
+              <a:srgbClr val="EEF4F5"/>
             </a:solidFill>
             <a:prstDash val="solid"/>
           </a:ln>
@@ -15417,7 +15405,7 @@
             <a:r>
               <a:rPr lang="en-US" sz="1600" b="1" dirty="0">
                 <a:solidFill>
-                  <a:schemeClr val="tx2"/>
+                  <a:srgbClr val="0B3C49"/>
                 </a:solidFill>
               </a:rPr>
               <a:t>Dynamic mode decomposition</a:t>
@@ -15441,7 +15429,7 @@
             <a:avLst/>
           </a:prstGeom>
           <a:solidFill>
-            <a:schemeClr val="bg1"/>
+            <a:srgbClr val="FFFFFF"/>
           </a:solidFill>
           <a:ln/>
         </p:spPr>
@@ -15455,7 +15443,7 @@
             <a:r>
               <a:rPr lang="en-US" sz="1600" dirty="0">
                 <a:solidFill>
-                  <a:schemeClr val="accent4"/>
+                  <a:srgbClr val="264653"/>
                 </a:solidFill>
                 <a:latin typeface="+mj-lt" pitchFamily="34" charset="0"/>
                 <a:ea typeface="+mj-lt" pitchFamily="34" charset="-122"/>
@@ -15494,7 +15482,7 @@
             <a:r>
               <a:rPr lang="en-US" sz="1400" dirty="0">
                 <a:solidFill>
-                  <a:schemeClr val="tx1"/>
+                  <a:srgbClr val="1B2430"/>
                 </a:solidFill>
               </a:rPr>
               <a:t>Linear dynamics learned from data; growth rates and frequencies of each mode.</a:t>
@@ -15514,17 +15502,17 @@
             <a:off x="548640" y="4023360"/>
             <a:ext cx="5394960" cy="2240280"/>
           </a:xfrm>
-          <a:prstGeom prst="roundRect">
+          <a:prstGeom prst="rect">
             <a:avLst>
               <a:gd name="adj" fmla="val 3265"/>
             </a:avLst>
           </a:prstGeom>
           <a:solidFill>
-            <a:schemeClr val="bg2"/>
+            <a:srgbClr val="EEF4F5"/>
           </a:solidFill>
           <a:ln w="12700">
             <a:solidFill>
-              <a:schemeClr val="bg2"/>
+              <a:srgbClr val="EEF4F5"/>
             </a:solidFill>
             <a:prstDash val="solid"/>
           </a:ln>
@@ -15557,7 +15545,7 @@
             <a:r>
               <a:rPr lang="en-US" sz="1600" b="1" dirty="0">
                 <a:solidFill>
-                  <a:schemeClr val="tx2"/>
+                  <a:srgbClr val="0B3C49"/>
                 </a:solidFill>
               </a:rPr>
               <a:t>Gaussian-process emulator</a:t>
@@ -15581,7 +15569,7 @@
             <a:avLst/>
           </a:prstGeom>
           <a:solidFill>
-            <a:schemeClr val="bg1"/>
+            <a:srgbClr val="FFFFFF"/>
           </a:solidFill>
           <a:ln/>
         </p:spPr>
@@ -15595,7 +15583,7 @@
             <a:r>
               <a:rPr lang="en-US" sz="1600" dirty="0">
                 <a:solidFill>
-                  <a:schemeClr val="accent4"/>
+                  <a:srgbClr val="264653"/>
                 </a:solidFill>
                 <a:latin typeface="+mj-lt" pitchFamily="34" charset="0"/>
                 <a:ea typeface="+mj-lt" pitchFamily="34" charset="-122"/>
@@ -15612,7 +15600,7 @@
             <a:r>
               <a:rPr lang="en-US" sz="1600" dirty="0">
                 <a:solidFill>
-                  <a:schemeClr val="accent4"/>
+                  <a:srgbClr val="264653"/>
                 </a:solidFill>
                 <a:latin typeface="+mj-lt" pitchFamily="34" charset="0"/>
                 <a:ea typeface="+mj-lt" pitchFamily="34" charset="-122"/>
@@ -15651,7 +15639,7 @@
             <a:r>
               <a:rPr lang="en-US" sz="1400" dirty="0">
                 <a:solidFill>
-                  <a:schemeClr val="tx1"/>
+                  <a:srgbClr val="1B2430"/>
                 </a:solidFill>
               </a:rPr>
               <a:t>Surrogate with its own error bar from ~10 runs per input; drives calibration and design.</a:t>
@@ -15671,17 +15659,17 @@
             <a:off x="6217920" y="4023360"/>
             <a:ext cx="5394960" cy="2240280"/>
           </a:xfrm>
-          <a:prstGeom prst="roundRect">
+          <a:prstGeom prst="rect">
             <a:avLst>
               <a:gd name="adj" fmla="val 3265"/>
             </a:avLst>
           </a:prstGeom>
           <a:solidFill>
-            <a:schemeClr val="bg2"/>
+            <a:srgbClr val="EEF4F5"/>
           </a:solidFill>
           <a:ln w="12700">
             <a:solidFill>
-              <a:schemeClr val="bg2"/>
+              <a:srgbClr val="EEF4F5"/>
             </a:solidFill>
             <a:prstDash val="solid"/>
           </a:ln>
@@ -15714,7 +15702,7 @@
             <a:r>
               <a:rPr lang="en-US" sz="1600" b="1" dirty="0">
                 <a:solidFill>
-                  <a:schemeClr val="tx2"/>
+                  <a:srgbClr val="0B3C49"/>
                 </a:solidFill>
               </a:rPr>
               <a:t>Neural surrogates</a:t>
@@ -15738,7 +15726,7 @@
             <a:avLst/>
           </a:prstGeom>
           <a:solidFill>
-            <a:schemeClr val="bg1"/>
+            <a:srgbClr val="FFFFFF"/>
           </a:solidFill>
           <a:ln/>
         </p:spPr>
@@ -15752,7 +15740,7 @@
             <a:r>
               <a:rPr lang="en-US" sz="1600" dirty="0">
                 <a:solidFill>
-                  <a:schemeClr val="accent4"/>
+                  <a:srgbClr val="264653"/>
                 </a:solidFill>
                 <a:latin typeface="+mj-lt" pitchFamily="34" charset="0"/>
                 <a:ea typeface="+mj-lt" pitchFamily="34" charset="-122"/>
@@ -15769,7 +15757,7 @@
             <a:r>
               <a:rPr lang="en-US" sz="1600" dirty="0">
                 <a:solidFill>
-                  <a:schemeClr val="accent4"/>
+                  <a:srgbClr val="264653"/>
                 </a:solidFill>
                 <a:latin typeface="+mj-lt" pitchFamily="34" charset="0"/>
                 <a:ea typeface="+mj-lt" pitchFamily="34" charset="-122"/>
@@ -15808,7 +15796,7 @@
             <a:r>
               <a:rPr lang="en-US" sz="1400" dirty="0">
                 <a:solidFill>
-                  <a:schemeClr val="tx1"/>
+                  <a:srgbClr val="1B2430"/>
                 </a:solidFill>
               </a:rPr>
               <a:t>Neural networks, physics-informed nets, neural ODEs and neural operators for large data.</a:t>
@@ -15847,7 +15835,7 @@
             <a:lvl1pPr>
               <a:defRPr sz="1000">
                 <a:solidFill>
-                  <a:schemeClr val="accent6"/>
+                  <a:srgbClr val="5F6B76"/>
                 </a:solidFill>
               </a:defRPr>
             </a:lvl1pPr>
@@ -15916,7 +15904,7 @@
             <a:r>
               <a:rPr lang="en-US" sz="1600" b="1" dirty="0">
                 <a:solidFill>
-                  <a:schemeClr val="accent1"/>
+                  <a:srgbClr val="F2A541"/>
                 </a:solidFill>
               </a:rPr>
               <a:t>PART III</a:t>
@@ -15954,7 +15942,7 @@
             <a:r>
               <a:rPr lang="en-US" sz="4000" b="1" dirty="0">
                 <a:solidFill>
-                  <a:schemeClr val="bg1"/>
+                  <a:srgbClr val="FFFFFF"/>
                 </a:solidFill>
               </a:rPr>
               <a:t>From twins to trials and decisions</a:t>
@@ -15992,7 +15980,7 @@
             <a:r>
               <a:rPr lang="en-US" sz="1800" dirty="0">
                 <a:solidFill>
-                  <a:schemeClr val="bg2"/>
+                  <a:srgbClr val="EEF4F5"/>
                 </a:solidFill>
               </a:rPr>
               <a:t>Families 11–12: generating virtual populations, designing and analysing virtual trials, optimal control and validation</a:t>
@@ -16031,7 +16019,7 @@
             <a:lvl1pPr>
               <a:defRPr sz="1000">
                 <a:solidFill>
-                  <a:schemeClr val="bg2"/>
+                  <a:srgbClr val="EEF4F5"/>
                 </a:solidFill>
               </a:defRPr>
             </a:lvl1pPr>
@@ -16100,7 +16088,7 @@
             <a:r>
               <a:rPr lang="en-US" sz="1300" b="1" dirty="0">
                 <a:solidFill>
-                  <a:schemeClr val="accent2"/>
+                  <a:srgbClr val="1F7A70"/>
                 </a:solidFill>
               </a:rPr>
               <a:t>FAMILY 11 · VIRTUAL POPULATIONS</a:t>
@@ -16138,7 +16126,7 @@
             <a:r>
               <a:rPr lang="en-US" sz="3600" b="1" dirty="0">
                 <a:solidFill>
-                  <a:schemeClr val="tx2"/>
+                  <a:srgbClr val="0B3C49"/>
                 </a:solidFill>
               </a:rPr>
               <a:t>Generating realistic virtual subjects</a:t>
@@ -16158,17 +16146,17 @@
             <a:off x="548640" y="1554480"/>
             <a:ext cx="5394960" cy="2240280"/>
           </a:xfrm>
-          <a:prstGeom prst="roundRect">
+          <a:prstGeom prst="rect">
             <a:avLst>
               <a:gd name="adj" fmla="val 3265"/>
             </a:avLst>
           </a:prstGeom>
           <a:solidFill>
-            <a:schemeClr val="bg2"/>
+            <a:srgbClr val="EEF4F5"/>
           </a:solidFill>
           <a:ln w="12700">
             <a:solidFill>
-              <a:schemeClr val="bg2"/>
+              <a:srgbClr val="EEF4F5"/>
             </a:solidFill>
             <a:prstDash val="solid"/>
           </a:ln>
@@ -16201,7 +16189,7 @@
             <a:r>
               <a:rPr lang="en-US" sz="1600" b="1" dirty="0">
                 <a:solidFill>
-                  <a:schemeClr val="tx2"/>
+                  <a:srgbClr val="0B3C49"/>
                 </a:solidFill>
               </a:rPr>
               <a:t>Sampling covariates with copulas</a:t>
@@ -16225,7 +16213,7 @@
             <a:avLst/>
           </a:prstGeom>
           <a:solidFill>
-            <a:schemeClr val="bg1"/>
+            <a:srgbClr val="FFFFFF"/>
           </a:solidFill>
           <a:ln/>
         </p:spPr>
@@ -16239,7 +16227,7 @@
             <a:r>
               <a:rPr lang="en-US" sz="1600" dirty="0">
                 <a:solidFill>
-                  <a:schemeClr val="accent4"/>
+                  <a:srgbClr val="264653"/>
                 </a:solidFill>
                 <a:latin typeface="+mj-lt" pitchFamily="34" charset="0"/>
                 <a:ea typeface="+mj-lt" pitchFamily="34" charset="-122"/>
@@ -16256,7 +16244,7 @@
             <a:r>
               <a:rPr lang="en-US" sz="1600" dirty="0">
                 <a:solidFill>
-                  <a:schemeClr val="accent4"/>
+                  <a:srgbClr val="264653"/>
                 </a:solidFill>
                 <a:latin typeface="+mj-lt" pitchFamily="34" charset="0"/>
                 <a:ea typeface="+mj-lt" pitchFamily="34" charset="-122"/>
@@ -16295,7 +16283,7 @@
             <a:r>
               <a:rPr lang="en-US" sz="1400" dirty="0">
                 <a:solidFill>
-                  <a:schemeClr val="tx1"/>
+                  <a:srgbClr val="1B2430"/>
                 </a:solidFill>
               </a:rPr>
               <a:t>Correct marginals plus correct correlations (age, weight, renal function, biomarkers).</a:t>
@@ -16315,17 +16303,17 @@
             <a:off x="6217920" y="1554480"/>
             <a:ext cx="5394960" cy="2240280"/>
           </a:xfrm>
-          <a:prstGeom prst="roundRect">
+          <a:prstGeom prst="rect">
             <a:avLst>
               <a:gd name="adj" fmla="val 3265"/>
             </a:avLst>
           </a:prstGeom>
           <a:solidFill>
-            <a:schemeClr val="bg2"/>
+            <a:srgbClr val="EEF4F5"/>
           </a:solidFill>
           <a:ln w="12700">
             <a:solidFill>
-              <a:schemeClr val="bg2"/>
+              <a:srgbClr val="EEF4F5"/>
             </a:solidFill>
             <a:prstDash val="solid"/>
           </a:ln>
@@ -16358,7 +16346,7 @@
             <a:r>
               <a:rPr lang="en-US" sz="1600" b="1" dirty="0">
                 <a:solidFill>
-                  <a:schemeClr val="tx2"/>
+                  <a:srgbClr val="0B3C49"/>
                 </a:solidFill>
               </a:rPr>
               <a:t>Plausible-patient selection</a:t>
@@ -16382,7 +16370,7 @@
             <a:avLst/>
           </a:prstGeom>
           <a:solidFill>
-            <a:schemeClr val="bg1"/>
+            <a:srgbClr val="FFFFFF"/>
           </a:solidFill>
           <a:ln/>
         </p:spPr>
@@ -16396,7 +16384,7 @@
             <a:r>
               <a:rPr lang="en-US" sz="1400" dirty="0">
                 <a:solidFill>
-                  <a:schemeClr val="accent4"/>
+                  <a:srgbClr val="264653"/>
                 </a:solidFill>
                 <a:latin typeface="+mj-lt" pitchFamily="34" charset="0"/>
                 <a:ea typeface="+mj-lt" pitchFamily="34" charset="-122"/>
@@ -16413,7 +16401,7 @@
             <a:r>
               <a:rPr lang="en-US" sz="1400" dirty="0">
                 <a:solidFill>
-                  <a:schemeClr val="accent4"/>
+                  <a:srgbClr val="264653"/>
                 </a:solidFill>
                 <a:latin typeface="+mj-lt" pitchFamily="34" charset="0"/>
                 <a:ea typeface="+mj-lt" pitchFamily="34" charset="-122"/>
@@ -16452,7 +16440,7 @@
             <a:r>
               <a:rPr lang="en-US" sz="1400" dirty="0">
                 <a:solidFill>
-                  <a:schemeClr val="tx1"/>
+                  <a:srgbClr val="1B2430"/>
                 </a:solidFill>
               </a:rPr>
               <a:t>Accept–reject or prevalence weighting builds virtual populations matching real data (Allen et al. 2016).</a:t>
@@ -16472,17 +16460,17 @@
             <a:off x="548640" y="4023360"/>
             <a:ext cx="5394960" cy="2240280"/>
           </a:xfrm>
-          <a:prstGeom prst="roundRect">
+          <a:prstGeom prst="rect">
             <a:avLst>
               <a:gd name="adj" fmla="val 3265"/>
             </a:avLst>
           </a:prstGeom>
           <a:solidFill>
-            <a:schemeClr val="bg2"/>
+            <a:srgbClr val="EEF4F5"/>
           </a:solidFill>
           <a:ln w="12700">
             <a:solidFill>
-              <a:schemeClr val="bg2"/>
+              <a:srgbClr val="EEF4F5"/>
             </a:solidFill>
             <a:prstDash val="solid"/>
           </a:ln>
@@ -16515,7 +16503,7 @@
             <a:r>
               <a:rPr lang="en-US" sz="1600" b="1" dirty="0">
                 <a:solidFill>
-                  <a:schemeClr val="tx2"/>
+                  <a:srgbClr val="0B3C49"/>
                 </a:solidFill>
               </a:rPr>
               <a:t>Parameter posterior sampling</a:t>
@@ -16539,7 +16527,7 @@
             <a:avLst/>
           </a:prstGeom>
           <a:solidFill>
-            <a:schemeClr val="bg1"/>
+            <a:srgbClr val="FFFFFF"/>
           </a:solidFill>
           <a:ln/>
         </p:spPr>
@@ -16553,7 +16541,7 @@
             <a:r>
               <a:rPr lang="en-US" sz="1600" dirty="0">
                 <a:solidFill>
-                  <a:schemeClr val="accent4"/>
+                  <a:srgbClr val="264653"/>
                 </a:solidFill>
                 <a:latin typeface="+mj-lt" pitchFamily="34" charset="0"/>
                 <a:ea typeface="+mj-lt" pitchFamily="34" charset="-122"/>
@@ -16592,7 +16580,7 @@
             <a:r>
               <a:rPr lang="en-US" sz="1400" dirty="0">
                 <a:solidFill>
-                  <a:schemeClr val="tx1"/>
+                  <a:srgbClr val="1B2430"/>
                 </a:solidFill>
               </a:rPr>
               <a:t>Each draw is one virtual subject consistent with observed data and its uncertainty.</a:t>
@@ -16612,17 +16600,17 @@
             <a:off x="6217920" y="4023360"/>
             <a:ext cx="5394960" cy="2240280"/>
           </a:xfrm>
-          <a:prstGeom prst="roundRect">
+          <a:prstGeom prst="rect">
             <a:avLst>
               <a:gd name="adj" fmla="val 3265"/>
             </a:avLst>
           </a:prstGeom>
           <a:solidFill>
-            <a:schemeClr val="bg2"/>
+            <a:srgbClr val="EEF4F5"/>
           </a:solidFill>
           <a:ln w="12700">
             <a:solidFill>
-              <a:schemeClr val="bg2"/>
+              <a:srgbClr val="EEF4F5"/>
             </a:solidFill>
             <a:prstDash val="solid"/>
           </a:ln>
@@ -16655,7 +16643,7 @@
             <a:r>
               <a:rPr lang="en-US" sz="1600" b="1" dirty="0">
                 <a:solidFill>
-                  <a:schemeClr val="tx2"/>
+                  <a:srgbClr val="0B3C49"/>
                 </a:solidFill>
               </a:rPr>
               <a:t>Deep generative models</a:t>
@@ -16679,7 +16667,7 @@
             <a:avLst/>
           </a:prstGeom>
           <a:solidFill>
-            <a:schemeClr val="bg1"/>
+            <a:srgbClr val="FFFFFF"/>
           </a:solidFill>
           <a:ln/>
         </p:spPr>
@@ -16693,7 +16681,7 @@
             <a:r>
               <a:rPr lang="en-US" sz="1500" dirty="0">
                 <a:solidFill>
-                  <a:schemeClr val="accent4"/>
+                  <a:srgbClr val="264653"/>
                 </a:solidFill>
                 <a:latin typeface="+mj-lt" pitchFamily="34" charset="0"/>
                 <a:ea typeface="+mj-lt" pitchFamily="34" charset="-122"/>
@@ -16710,7 +16698,7 @@
             <a:r>
               <a:rPr lang="en-US" sz="1500" dirty="0">
                 <a:solidFill>
-                  <a:schemeClr val="accent4"/>
+                  <a:srgbClr val="264653"/>
                 </a:solidFill>
                 <a:latin typeface="+mj-lt" pitchFamily="34" charset="0"/>
                 <a:ea typeface="+mj-lt" pitchFamily="34" charset="-122"/>
@@ -16749,7 +16737,7 @@
             <a:r>
               <a:rPr lang="en-US" sz="1400" dirty="0">
                 <a:solidFill>
-                  <a:schemeClr val="tx1"/>
+                  <a:srgbClr val="1B2430"/>
                 </a:solidFill>
               </a:rPr>
               <a:t>Synthetic anatomies and records; check realism, coverage of rare cases and privacy.</a:t>
@@ -16788,7 +16776,7 @@
             <a:lvl1pPr>
               <a:defRPr sz="1000">
                 <a:solidFill>
-                  <a:schemeClr val="accent6"/>
+                  <a:srgbClr val="5F6B76"/>
                 </a:solidFill>
               </a:defRPr>
             </a:lvl1pPr>
@@ -16857,7 +16845,7 @@
             <a:r>
               <a:rPr lang="en-US" sz="1300" b="1" dirty="0">
                 <a:solidFill>
-                  <a:schemeClr val="accent2"/>
+                  <a:srgbClr val="1F7A70"/>
                 </a:solidFill>
               </a:rPr>
               <a:t>FAMILY 11 · VIRTUAL TRIAL DESIGN</a:t>
@@ -16895,7 +16883,7 @@
             <a:r>
               <a:rPr lang="en-US" sz="3600" b="1" dirty="0">
                 <a:solidFill>
-                  <a:schemeClr val="tx2"/>
+                  <a:srgbClr val="0B3C49"/>
                 </a:solidFill>
               </a:rPr>
               <a:t>Estimands, power and adaptive designs</a:t>
@@ -16915,17 +16903,17 @@
             <a:off x="548640" y="1554480"/>
             <a:ext cx="5394960" cy="2240280"/>
           </a:xfrm>
-          <a:prstGeom prst="roundRect">
+          <a:prstGeom prst="rect">
             <a:avLst>
               <a:gd name="adj" fmla="val 3265"/>
             </a:avLst>
           </a:prstGeom>
           <a:solidFill>
-            <a:schemeClr val="bg2"/>
+            <a:srgbClr val="EEF4F5"/>
           </a:solidFill>
           <a:ln w="12700">
             <a:solidFill>
-              <a:schemeClr val="bg2"/>
+              <a:srgbClr val="EEF4F5"/>
             </a:solidFill>
             <a:prstDash val="solid"/>
           </a:ln>
@@ -16958,7 +16946,7 @@
             <a:r>
               <a:rPr lang="en-US" sz="1600" b="1" dirty="0">
                 <a:solidFill>
-                  <a:schemeClr val="tx2"/>
+                  <a:srgbClr val="0B3C49"/>
                 </a:solidFill>
               </a:rPr>
               <a:t>Potential outcomes</a:t>
@@ -16982,7 +16970,7 @@
             <a:avLst/>
           </a:prstGeom>
           <a:solidFill>
-            <a:schemeClr val="bg1"/>
+            <a:srgbClr val="FFFFFF"/>
           </a:solidFill>
           <a:ln/>
         </p:spPr>
@@ -16996,7 +16984,7 @@
             <a:r>
               <a:rPr lang="en-US" sz="1500" dirty="0">
                 <a:solidFill>
-                  <a:schemeClr val="accent4"/>
+                  <a:srgbClr val="264653"/>
                 </a:solidFill>
                 <a:latin typeface="+mj-lt" pitchFamily="34" charset="0"/>
                 <a:ea typeface="+mj-lt" pitchFamily="34" charset="-122"/>
@@ -17013,7 +17001,7 @@
             <a:r>
               <a:rPr lang="en-US" sz="1500" dirty="0">
                 <a:solidFill>
-                  <a:schemeClr val="accent4"/>
+                  <a:srgbClr val="264653"/>
                 </a:solidFill>
                 <a:latin typeface="+mj-lt" pitchFamily="34" charset="0"/>
                 <a:ea typeface="+mj-lt" pitchFamily="34" charset="-122"/>
@@ -17052,7 +17040,7 @@
             <a:r>
               <a:rPr lang="en-US" sz="1400" dirty="0">
                 <a:solidFill>
-                  <a:schemeClr val="tx1"/>
+                  <a:srgbClr val="1B2430"/>
                 </a:solidFill>
               </a:rPr>
               <a:t>Virtual subjects receive every arm, so individual effects are directly computable.</a:t>
@@ -17072,17 +17060,17 @@
             <a:off x="6217920" y="1554480"/>
             <a:ext cx="5394960" cy="2240280"/>
           </a:xfrm>
-          <a:prstGeom prst="roundRect">
+          <a:prstGeom prst="rect">
             <a:avLst>
               <a:gd name="adj" fmla="val 3265"/>
             </a:avLst>
           </a:prstGeom>
           <a:solidFill>
-            <a:schemeClr val="bg2"/>
+            <a:srgbClr val="EEF4F5"/>
           </a:solidFill>
           <a:ln w="12700">
             <a:solidFill>
-              <a:schemeClr val="bg2"/>
+              <a:srgbClr val="EEF4F5"/>
             </a:solidFill>
             <a:prstDash val="solid"/>
           </a:ln>
@@ -17115,7 +17103,7 @@
             <a:r>
               <a:rPr lang="en-US" sz="1600" b="1" dirty="0">
                 <a:solidFill>
-                  <a:schemeClr val="tx2"/>
+                  <a:srgbClr val="0B3C49"/>
                 </a:solidFill>
               </a:rPr>
               <a:t>Sample size and power</a:t>
@@ -17139,7 +17127,7 @@
             <a:avLst/>
           </a:prstGeom>
           <a:solidFill>
-            <a:schemeClr val="bg1"/>
+            <a:srgbClr val="FFFFFF"/>
           </a:solidFill>
           <a:ln/>
         </p:spPr>
@@ -17153,7 +17141,7 @@
             <a:r>
               <a:rPr lang="en-US" sz="1500" dirty="0">
                 <a:solidFill>
-                  <a:schemeClr val="accent4"/>
+                  <a:srgbClr val="264653"/>
                 </a:solidFill>
                 <a:latin typeface="+mj-lt" pitchFamily="34" charset="0"/>
                 <a:ea typeface="+mj-lt" pitchFamily="34" charset="-122"/>
@@ -17170,7 +17158,7 @@
             <a:r>
               <a:rPr lang="en-US" sz="1500" dirty="0">
                 <a:solidFill>
-                  <a:schemeClr val="accent4"/>
+                  <a:srgbClr val="264653"/>
                 </a:solidFill>
                 <a:latin typeface="+mj-lt" pitchFamily="34" charset="0"/>
                 <a:ea typeface="+mj-lt" pitchFamily="34" charset="-122"/>
@@ -17209,7 +17197,7 @@
             <a:r>
               <a:rPr lang="en-US" sz="1400" dirty="0">
                 <a:solidFill>
-                  <a:schemeClr val="tx1"/>
+                  <a:srgbClr val="1B2430"/>
                 </a:solidFill>
               </a:rPr>
               <a:t>Simulated trials estimate power directly: the fraction of replicate trials that succeed.</a:t>
@@ -17229,17 +17217,17 @@
             <a:off x="548640" y="4023360"/>
             <a:ext cx="5394960" cy="2240280"/>
           </a:xfrm>
-          <a:prstGeom prst="roundRect">
+          <a:prstGeom prst="rect">
             <a:avLst>
               <a:gd name="adj" fmla="val 3265"/>
             </a:avLst>
           </a:prstGeom>
           <a:solidFill>
-            <a:schemeClr val="bg2"/>
+            <a:srgbClr val="EEF4F5"/>
           </a:solidFill>
           <a:ln w="12700">
             <a:solidFill>
-              <a:schemeClr val="bg2"/>
+              <a:srgbClr val="EEF4F5"/>
             </a:solidFill>
             <a:prstDash val="solid"/>
           </a:ln>
@@ -17272,7 +17260,7 @@
             <a:r>
               <a:rPr lang="en-US" sz="1600" b="1" dirty="0">
                 <a:solidFill>
-                  <a:schemeClr val="tx2"/>
+                  <a:srgbClr val="0B3C49"/>
                 </a:solidFill>
               </a:rPr>
               <a:t>Bayesian adaptive design</a:t>
@@ -17296,7 +17284,7 @@
             <a:avLst/>
           </a:prstGeom>
           <a:solidFill>
-            <a:schemeClr val="bg1"/>
+            <a:srgbClr val="FFFFFF"/>
           </a:solidFill>
           <a:ln/>
         </p:spPr>
@@ -17310,7 +17298,7 @@
             <a:r>
               <a:rPr lang="en-US" sz="1600" dirty="0">
                 <a:solidFill>
-                  <a:schemeClr val="accent4"/>
+                  <a:srgbClr val="264653"/>
                 </a:solidFill>
                 <a:latin typeface="+mj-lt" pitchFamily="34" charset="0"/>
                 <a:ea typeface="+mj-lt" pitchFamily="34" charset="-122"/>
@@ -17327,7 +17315,7 @@
             <a:r>
               <a:rPr lang="en-US" sz="1600" dirty="0">
                 <a:solidFill>
-                  <a:schemeClr val="accent4"/>
+                  <a:srgbClr val="264653"/>
                 </a:solidFill>
                 <a:latin typeface="+mj-lt" pitchFamily="34" charset="0"/>
                 <a:ea typeface="+mj-lt" pitchFamily="34" charset="-122"/>
@@ -17366,7 +17354,7 @@
             <a:r>
               <a:rPr lang="en-US" sz="1400" dirty="0">
                 <a:solidFill>
-                  <a:schemeClr val="tx1"/>
+                  <a:srgbClr val="1B2430"/>
                 </a:solidFill>
               </a:rPr>
               <a:t>Interim decisions and response-adaptive randomisation; operating characteristics found by simulation.</a:t>
@@ -17386,17 +17374,17 @@
             <a:off x="6217920" y="4023360"/>
             <a:ext cx="5394960" cy="2240280"/>
           </a:xfrm>
-          <a:prstGeom prst="roundRect">
+          <a:prstGeom prst="rect">
             <a:avLst>
               <a:gd name="adj" fmla="val 3265"/>
             </a:avLst>
           </a:prstGeom>
           <a:solidFill>
-            <a:schemeClr val="bg2"/>
+            <a:srgbClr val="EEF4F5"/>
           </a:solidFill>
           <a:ln w="12700">
             <a:solidFill>
-              <a:schemeClr val="bg2"/>
+              <a:srgbClr val="EEF4F5"/>
             </a:solidFill>
             <a:prstDash val="solid"/>
           </a:ln>
@@ -17429,7 +17417,7 @@
             <a:r>
               <a:rPr lang="en-US" sz="1600" b="1" dirty="0">
                 <a:solidFill>
-                  <a:schemeClr val="tx2"/>
+                  <a:srgbClr val="0B3C49"/>
                 </a:solidFill>
               </a:rPr>
               <a:t>Dose-finding (CRM)</a:t>
@@ -17453,7 +17441,7 @@
             <a:avLst/>
           </a:prstGeom>
           <a:solidFill>
-            <a:schemeClr val="bg1"/>
+            <a:srgbClr val="FFFFFF"/>
           </a:solidFill>
           <a:ln/>
         </p:spPr>
@@ -17467,7 +17455,7 @@
             <a:r>
               <a:rPr lang="en-US" sz="1600" dirty="0">
                 <a:solidFill>
-                  <a:schemeClr val="accent4"/>
+                  <a:srgbClr val="264653"/>
                 </a:solidFill>
                 <a:latin typeface="+mj-lt" pitchFamily="34" charset="0"/>
                 <a:ea typeface="+mj-lt" pitchFamily="34" charset="-122"/>
@@ -17506,7 +17494,7 @@
             <a:r>
               <a:rPr lang="en-US" sz="1400" dirty="0">
                 <a:solidFill>
-                  <a:schemeClr val="tx1"/>
+                  <a:srgbClr val="1B2430"/>
                 </a:solidFill>
               </a:rPr>
               <a:t>Continual reassessment method updates the dose–toxicity curve after each cohort.</a:t>
@@ -17545,7 +17533,7 @@
             <a:lvl1pPr>
               <a:defRPr sz="1000">
                 <a:solidFill>
-                  <a:schemeClr val="accent6"/>
+                  <a:srgbClr val="5F6B76"/>
                 </a:solidFill>
               </a:defRPr>
             </a:lvl1pPr>
@@ -17614,7 +17602,7 @@
             <a:r>
               <a:rPr lang="en-US" sz="1300" b="1" dirty="0">
                 <a:solidFill>
-                  <a:schemeClr val="accent2"/>
+                  <a:srgbClr val="1F7A70"/>
                 </a:solidFill>
               </a:rPr>
               <a:t>FAMILY 11 · TWINS INSIDE REAL TRIALS</a:t>
@@ -17652,7 +17640,7 @@
             <a:r>
               <a:rPr lang="en-US" sz="3600" b="1" dirty="0">
                 <a:solidFill>
-                  <a:schemeClr val="tx2"/>
+                  <a:srgbClr val="0B3C49"/>
                 </a:solidFill>
               </a:rPr>
               <a:t>Augmenting, not replacing, clinical evidence</a:t>
@@ -17672,17 +17660,17 @@
             <a:off x="548640" y="1554480"/>
             <a:ext cx="5394960" cy="2240280"/>
           </a:xfrm>
-          <a:prstGeom prst="roundRect">
+          <a:prstGeom prst="rect">
             <a:avLst>
               <a:gd name="adj" fmla="val 3265"/>
             </a:avLst>
           </a:prstGeom>
           <a:solidFill>
-            <a:schemeClr val="bg2"/>
+            <a:srgbClr val="EEF4F5"/>
           </a:solidFill>
           <a:ln w="12700">
             <a:solidFill>
-              <a:schemeClr val="bg2"/>
+              <a:srgbClr val="EEF4F5"/>
             </a:solidFill>
             <a:prstDash val="solid"/>
           </a:ln>
@@ -17715,7 +17703,7 @@
             <a:r>
               <a:rPr lang="en-US" sz="1600" b="1" dirty="0">
                 <a:solidFill>
-                  <a:schemeClr val="tx2"/>
+                  <a:srgbClr val="0B3C49"/>
                 </a:solidFill>
               </a:rPr>
               <a:t>Prognostic covariate adjustment</a:t>
@@ -17739,7 +17727,7 @@
             <a:avLst/>
           </a:prstGeom>
           <a:solidFill>
-            <a:schemeClr val="bg1"/>
+            <a:srgbClr val="FFFFFF"/>
           </a:solidFill>
           <a:ln/>
         </p:spPr>
@@ -17753,7 +17741,7 @@
             <a:r>
               <a:rPr lang="en-US" sz="1600" dirty="0">
                 <a:solidFill>
-                  <a:schemeClr val="accent4"/>
+                  <a:srgbClr val="264653"/>
                 </a:solidFill>
                 <a:latin typeface="+mj-lt" pitchFamily="34" charset="0"/>
                 <a:ea typeface="+mj-lt" pitchFamily="34" charset="-122"/>
@@ -17792,7 +17780,7 @@
             <a:r>
               <a:rPr lang="en-US" sz="1400" dirty="0">
                 <a:solidFill>
-                  <a:schemeClr val="tx1"/>
+                  <a:srgbClr val="1B2430"/>
                 </a:solidFill>
               </a:rPr>
               <a:t>Twin-predicted control outcome m̂ᵢ as covariate; smaller variance, fewer patients for the same power.</a:t>
@@ -17812,17 +17800,17 @@
             <a:off x="6217920" y="1554480"/>
             <a:ext cx="5394960" cy="2240280"/>
           </a:xfrm>
-          <a:prstGeom prst="roundRect">
+          <a:prstGeom prst="rect">
             <a:avLst>
               <a:gd name="adj" fmla="val 3265"/>
             </a:avLst>
           </a:prstGeom>
           <a:solidFill>
-            <a:schemeClr val="bg2"/>
+            <a:srgbClr val="EEF4F5"/>
           </a:solidFill>
           <a:ln w="12700">
             <a:solidFill>
-              <a:schemeClr val="bg2"/>
+              <a:srgbClr val="EEF4F5"/>
             </a:solidFill>
             <a:prstDash val="solid"/>
           </a:ln>
@@ -17855,7 +17843,7 @@
             <a:r>
               <a:rPr lang="en-US" sz="1600" b="1" dirty="0">
                 <a:solidFill>
-                  <a:schemeClr val="tx2"/>
+                  <a:srgbClr val="0B3C49"/>
                 </a:solidFill>
               </a:rPr>
               <a:t>Synthetic / external control arm</a:t>
@@ -17879,7 +17867,7 @@
             <a:avLst/>
           </a:prstGeom>
           <a:solidFill>
-            <a:schemeClr val="bg1"/>
+            <a:srgbClr val="FFFFFF"/>
           </a:solidFill>
           <a:ln/>
         </p:spPr>
@@ -17893,7 +17881,7 @@
             <a:r>
               <a:rPr lang="en-US" sz="1500" dirty="0">
                 <a:solidFill>
-                  <a:schemeClr val="accent4"/>
+                  <a:srgbClr val="264653"/>
                 </a:solidFill>
                 <a:latin typeface="+mj-lt" pitchFamily="34" charset="0"/>
                 <a:ea typeface="+mj-lt" pitchFamily="34" charset="-122"/>
@@ -17910,7 +17898,7 @@
             <a:r>
               <a:rPr lang="en-US" sz="1500" dirty="0">
                 <a:solidFill>
-                  <a:schemeClr val="accent4"/>
+                  <a:srgbClr val="264653"/>
                 </a:solidFill>
                 <a:latin typeface="+mj-lt" pitchFamily="34" charset="0"/>
                 <a:ea typeface="+mj-lt" pitchFamily="34" charset="-122"/>
@@ -17949,7 +17937,7 @@
             <a:r>
               <a:rPr lang="en-US" sz="1400" dirty="0">
                 <a:solidFill>
-                  <a:schemeClr val="tx1"/>
+                  <a:srgbClr val="1B2430"/>
                 </a:solidFill>
               </a:rPr>
               <a:t>Propensity scores balance external or simulated controls against treated patients.</a:t>
@@ -17969,17 +17957,17 @@
             <a:off x="548640" y="4023360"/>
             <a:ext cx="5394960" cy="2240280"/>
           </a:xfrm>
-          <a:prstGeom prst="roundRect">
+          <a:prstGeom prst="rect">
             <a:avLst>
               <a:gd name="adj" fmla="val 3265"/>
             </a:avLst>
           </a:prstGeom>
           <a:solidFill>
-            <a:schemeClr val="bg2"/>
+            <a:srgbClr val="EEF4F5"/>
           </a:solidFill>
           <a:ln w="12700">
             <a:solidFill>
-              <a:schemeClr val="bg2"/>
+              <a:srgbClr val="EEF4F5"/>
             </a:solidFill>
             <a:prstDash val="solid"/>
           </a:ln>
@@ -18012,7 +18000,7 @@
             <a:r>
               <a:rPr lang="en-US" sz="1600" b="1" dirty="0">
                 <a:solidFill>
-                  <a:schemeClr val="tx2"/>
+                  <a:srgbClr val="0B3C49"/>
                 </a:solidFill>
               </a:rPr>
               <a:t>Model observers for imaging trials</a:t>
@@ -18036,7 +18024,7 @@
             <a:avLst/>
           </a:prstGeom>
           <a:solidFill>
-            <a:schemeClr val="bg1"/>
+            <a:srgbClr val="FFFFFF"/>
           </a:solidFill>
           <a:ln/>
         </p:spPr>
@@ -18050,7 +18038,7 @@
             <a:r>
               <a:rPr lang="en-US" sz="1600" dirty="0">
                 <a:solidFill>
-                  <a:schemeClr val="accent4"/>
+                  <a:srgbClr val="264653"/>
                 </a:solidFill>
                 <a:latin typeface="+mj-lt" pitchFamily="34" charset="0"/>
                 <a:ea typeface="+mj-lt" pitchFamily="34" charset="-122"/>
@@ -18067,7 +18055,7 @@
             <a:r>
               <a:rPr lang="en-US" sz="1600" dirty="0">
                 <a:solidFill>
-                  <a:schemeClr val="accent4"/>
+                  <a:srgbClr val="264653"/>
                 </a:solidFill>
                 <a:latin typeface="+mj-lt" pitchFamily="34" charset="0"/>
                 <a:ea typeface="+mj-lt" pitchFamily="34" charset="-122"/>
@@ -18106,7 +18094,7 @@
             <a:r>
               <a:rPr lang="en-US" sz="1400" dirty="0">
                 <a:solidFill>
-                  <a:schemeClr val="tx1"/>
+                  <a:srgbClr val="1B2430"/>
                 </a:solidFill>
               </a:rPr>
               <a:t>Channelised Hotelling observer replaces readers in virtual imaging trials (e.g. VICTRE).</a:t>
@@ -18126,17 +18114,17 @@
             <a:off x="6217920" y="4023360"/>
             <a:ext cx="5394960" cy="2240280"/>
           </a:xfrm>
-          <a:prstGeom prst="roundRect">
+          <a:prstGeom prst="rect">
             <a:avLst>
               <a:gd name="adj" fmla="val 3265"/>
             </a:avLst>
           </a:prstGeom>
           <a:solidFill>
-            <a:schemeClr val="bg2"/>
+            <a:srgbClr val="EEF4F5"/>
           </a:solidFill>
           <a:ln w="12700">
             <a:solidFill>
-              <a:schemeClr val="bg2"/>
+              <a:srgbClr val="EEF4F5"/>
             </a:solidFill>
             <a:prstDash val="solid"/>
           </a:ln>
@@ -18169,7 +18157,7 @@
             <a:r>
               <a:rPr lang="en-US" sz="1600" b="1" dirty="0">
                 <a:solidFill>
-                  <a:schemeClr val="tx2"/>
+                  <a:srgbClr val="0B3C49"/>
                 </a:solidFill>
               </a:rPr>
               <a:t>Health-economic model</a:t>
@@ -18193,7 +18181,7 @@
             <a:avLst/>
           </a:prstGeom>
           <a:solidFill>
-            <a:schemeClr val="bg1"/>
+            <a:srgbClr val="FFFFFF"/>
           </a:solidFill>
           <a:ln/>
         </p:spPr>
@@ -18207,7 +18195,7 @@
             <a:r>
               <a:rPr lang="en-US" sz="1600" dirty="0">
                 <a:solidFill>
-                  <a:schemeClr val="accent4"/>
+                  <a:srgbClr val="264653"/>
                 </a:solidFill>
                 <a:latin typeface="+mj-lt" pitchFamily="34" charset="0"/>
                 <a:ea typeface="+mj-lt" pitchFamily="34" charset="-122"/>
@@ -18224,7 +18212,7 @@
             <a:r>
               <a:rPr lang="en-US" sz="1600" dirty="0">
                 <a:solidFill>
-                  <a:schemeClr val="accent4"/>
+                  <a:srgbClr val="264653"/>
                 </a:solidFill>
                 <a:latin typeface="+mj-lt" pitchFamily="34" charset="0"/>
                 <a:ea typeface="+mj-lt" pitchFamily="34" charset="-122"/>
@@ -18263,7 +18251,7 @@
             <a:r>
               <a:rPr lang="en-US" sz="1400" dirty="0">
                 <a:solidFill>
-                  <a:schemeClr val="tx1"/>
+                  <a:srgbClr val="1B2430"/>
                 </a:solidFill>
               </a:rPr>
               <a:t>Markov cohort over health states, with utilities u and discounting r; value of the intervention.</a:t>
@@ -18302,7 +18290,7 @@
             <a:lvl1pPr>
               <a:defRPr sz="1000">
                 <a:solidFill>
-                  <a:schemeClr val="accent6"/>
+                  <a:srgbClr val="5F6B76"/>
                 </a:solidFill>
               </a:defRPr>
             </a:lvl1pPr>
@@ -18371,7 +18359,7 @@
             <a:r>
               <a:rPr lang="en-US" sz="1300" b="1" dirty="0">
                 <a:solidFill>
-                  <a:schemeClr val="accent2"/>
+                  <a:srgbClr val="1F7A70"/>
                 </a:solidFill>
               </a:rPr>
               <a:t>FAMILY 12 · OPTIMISATION AND CONTROL</a:t>
@@ -18409,7 +18397,7 @@
             <a:r>
               <a:rPr lang="en-US" sz="3600" b="1" dirty="0">
                 <a:solidFill>
-                  <a:schemeClr val="tx2"/>
+                  <a:srgbClr val="0B3C49"/>
                 </a:solidFill>
               </a:rPr>
               <a:t>Using the twin to decide</a:t>
@@ -18429,17 +18417,17 @@
             <a:off x="548640" y="1554480"/>
             <a:ext cx="5394960" cy="2240280"/>
           </a:xfrm>
-          <a:prstGeom prst="roundRect">
+          <a:prstGeom prst="rect">
             <a:avLst>
               <a:gd name="adj" fmla="val 3265"/>
             </a:avLst>
           </a:prstGeom>
           <a:solidFill>
-            <a:schemeClr val="bg2"/>
+            <a:srgbClr val="EEF4F5"/>
           </a:solidFill>
           <a:ln w="12700">
             <a:solidFill>
-              <a:schemeClr val="bg2"/>
+              <a:srgbClr val="EEF4F5"/>
             </a:solidFill>
             <a:prstDash val="solid"/>
           </a:ln>
@@ -18472,7 +18460,7 @@
             <a:r>
               <a:rPr lang="en-US" sz="1600" b="1" dirty="0">
                 <a:solidFill>
-                  <a:schemeClr val="tx2"/>
+                  <a:srgbClr val="0B3C49"/>
                 </a:solidFill>
               </a:rPr>
               <a:t>Optimal control</a:t>
@@ -18496,7 +18484,7 @@
             <a:avLst/>
           </a:prstGeom>
           <a:solidFill>
-            <a:schemeClr val="bg1"/>
+            <a:srgbClr val="FFFFFF"/>
           </a:solidFill>
           <a:ln/>
         </p:spPr>
@@ -18510,7 +18498,7 @@
             <a:r>
               <a:rPr lang="en-US" sz="1400" dirty="0">
                 <a:solidFill>
-                  <a:schemeClr val="accent4"/>
+                  <a:srgbClr val="264653"/>
                 </a:solidFill>
                 <a:latin typeface="+mj-lt" pitchFamily="34" charset="0"/>
                 <a:ea typeface="+mj-lt" pitchFamily="34" charset="-122"/>
@@ -18527,7 +18515,7 @@
             <a:r>
               <a:rPr lang="en-US" sz="1400" dirty="0">
                 <a:solidFill>
-                  <a:schemeClr val="accent4"/>
+                  <a:srgbClr val="264653"/>
                 </a:solidFill>
                 <a:latin typeface="+mj-lt" pitchFamily="34" charset="0"/>
                 <a:ea typeface="+mj-lt" pitchFamily="34" charset="-122"/>
@@ -18566,7 +18554,7 @@
             <a:r>
               <a:rPr lang="en-US" sz="1400" dirty="0">
                 <a:solidFill>
-                  <a:schemeClr val="tx1"/>
+                  <a:srgbClr val="1B2430"/>
                 </a:solidFill>
               </a:rPr>
               <a:t>Best dosing or therapy schedule over a horizon, with toxicity and resource constraints.</a:t>
@@ -18586,17 +18574,17 @@
             <a:off x="6217920" y="1554480"/>
             <a:ext cx="5394960" cy="2240280"/>
           </a:xfrm>
-          <a:prstGeom prst="roundRect">
+          <a:prstGeom prst="rect">
             <a:avLst>
               <a:gd name="adj" fmla="val 3265"/>
             </a:avLst>
           </a:prstGeom>
           <a:solidFill>
-            <a:schemeClr val="bg2"/>
+            <a:srgbClr val="EEF4F5"/>
           </a:solidFill>
           <a:ln w="12700">
             <a:solidFill>
-              <a:schemeClr val="bg2"/>
+              <a:srgbClr val="EEF4F5"/>
             </a:solidFill>
             <a:prstDash val="solid"/>
           </a:ln>
@@ -18629,7 +18617,7 @@
             <a:r>
               <a:rPr lang="en-US" sz="1600" b="1" dirty="0">
                 <a:solidFill>
-                  <a:schemeClr val="tx2"/>
+                  <a:srgbClr val="0B3C49"/>
                 </a:solidFill>
               </a:rPr>
               <a:t>Model predictive control</a:t>
@@ -18653,7 +18641,7 @@
             <a:avLst/>
           </a:prstGeom>
           <a:solidFill>
-            <a:schemeClr val="bg1"/>
+            <a:srgbClr val="FFFFFF"/>
           </a:solidFill>
           <a:ln/>
         </p:spPr>
@@ -18667,7 +18655,7 @@
             <a:r>
               <a:rPr lang="en-US" sz="1400" dirty="0">
                 <a:solidFill>
-                  <a:schemeClr val="accent4"/>
+                  <a:srgbClr val="264653"/>
                 </a:solidFill>
                 <a:latin typeface="+mj-lt" pitchFamily="34" charset="0"/>
                 <a:ea typeface="+mj-lt" pitchFamily="34" charset="-122"/>
@@ -18706,7 +18694,7 @@
             <a:r>
               <a:rPr lang="en-US" sz="1400" dirty="0">
                 <a:solidFill>
-                  <a:schemeClr val="tx1"/>
+                  <a:srgbClr val="1B2430"/>
                 </a:solidFill>
               </a:rPr>
               <a:t>Re-optimise at every step with the updated twin (e.g. artificial pancreas).</a:t>
@@ -18726,17 +18714,17 @@
             <a:off x="548640" y="4023360"/>
             <a:ext cx="5394960" cy="2240280"/>
           </a:xfrm>
-          <a:prstGeom prst="roundRect">
+          <a:prstGeom prst="rect">
             <a:avLst>
               <a:gd name="adj" fmla="val 3265"/>
             </a:avLst>
           </a:prstGeom>
           <a:solidFill>
-            <a:schemeClr val="bg2"/>
+            <a:srgbClr val="EEF4F5"/>
           </a:solidFill>
           <a:ln w="12700">
             <a:solidFill>
-              <a:schemeClr val="bg2"/>
+              <a:srgbClr val="EEF4F5"/>
             </a:solidFill>
             <a:prstDash val="solid"/>
           </a:ln>
@@ -18769,7 +18757,7 @@
             <a:r>
               <a:rPr lang="en-US" sz="1600" b="1" dirty="0">
                 <a:solidFill>
-                  <a:schemeClr val="tx2"/>
+                  <a:srgbClr val="0B3C49"/>
                 </a:solidFill>
               </a:rPr>
               <a:t>Reinforcement learning</a:t>
@@ -18793,7 +18781,7 @@
             <a:avLst/>
           </a:prstGeom>
           <a:solidFill>
-            <a:schemeClr val="bg1"/>
+            <a:srgbClr val="FFFFFF"/>
           </a:solidFill>
           <a:ln/>
         </p:spPr>
@@ -18807,7 +18795,7 @@
             <a:r>
               <a:rPr lang="en-US" sz="1500" dirty="0">
                 <a:solidFill>
-                  <a:schemeClr val="accent4"/>
+                  <a:srgbClr val="264653"/>
                 </a:solidFill>
                 <a:latin typeface="+mj-lt" pitchFamily="34" charset="0"/>
                 <a:ea typeface="+mj-lt" pitchFamily="34" charset="-122"/>
@@ -18846,7 +18834,7 @@
             <a:r>
               <a:rPr lang="en-US" sz="1400" dirty="0">
                 <a:solidFill>
-                  <a:schemeClr val="tx1"/>
+                  <a:srgbClr val="1B2430"/>
                 </a:solidFill>
               </a:rPr>
               <a:t>Learn a policy by interacting with the twin; adaptive treatment strategies. Train in silico only.</a:t>
@@ -18866,17 +18854,17 @@
             <a:off x="6217920" y="4023360"/>
             <a:ext cx="5394960" cy="2240280"/>
           </a:xfrm>
-          <a:prstGeom prst="roundRect">
+          <a:prstGeom prst="rect">
             <a:avLst>
               <a:gd name="adj" fmla="val 3265"/>
             </a:avLst>
           </a:prstGeom>
           <a:solidFill>
-            <a:schemeClr val="bg2"/>
+            <a:srgbClr val="EEF4F5"/>
           </a:solidFill>
           <a:ln w="12700">
             <a:solidFill>
-              <a:schemeClr val="bg2"/>
+              <a:srgbClr val="EEF4F5"/>
             </a:solidFill>
             <a:prstDash val="solid"/>
           </a:ln>
@@ -18909,7 +18897,7 @@
             <a:r>
               <a:rPr lang="en-US" sz="1600" b="1" dirty="0">
                 <a:solidFill>
-                  <a:schemeClr val="tx2"/>
+                  <a:srgbClr val="0B3C49"/>
                 </a:solidFill>
               </a:rPr>
               <a:t>Bayesian and multi-objective optimisation</a:t>
@@ -18933,7 +18921,7 @@
             <a:avLst/>
           </a:prstGeom>
           <a:solidFill>
-            <a:schemeClr val="bg1"/>
+            <a:srgbClr val="FFFFFF"/>
           </a:solidFill>
           <a:ln/>
         </p:spPr>
@@ -18947,7 +18935,7 @@
             <a:r>
               <a:rPr lang="en-US" sz="1400" dirty="0">
                 <a:solidFill>
-                  <a:schemeClr val="accent4"/>
+                  <a:srgbClr val="264653"/>
                 </a:solidFill>
                 <a:latin typeface="+mj-lt" pitchFamily="34" charset="0"/>
                 <a:ea typeface="+mj-lt" pitchFamily="34" charset="-122"/>
@@ -18964,7 +18952,7 @@
             <a:r>
               <a:rPr lang="en-US" sz="1400" dirty="0">
                 <a:solidFill>
-                  <a:schemeClr val="accent4"/>
+                  <a:srgbClr val="264653"/>
                 </a:solidFill>
                 <a:latin typeface="+mj-lt" pitchFamily="34" charset="0"/>
                 <a:ea typeface="+mj-lt" pitchFamily="34" charset="-122"/>
@@ -19003,7 +18991,7 @@
             <a:r>
               <a:rPr lang="en-US" sz="1400" dirty="0">
                 <a:solidFill>
-                  <a:schemeClr val="tx1"/>
+                  <a:srgbClr val="1B2430"/>
                 </a:solidFill>
               </a:rPr>
               <a:t>Few expensive evaluations; efficacy vs toxicity vs cost trade-offs.</a:t>
@@ -19042,7 +19030,7 @@
             <a:lvl1pPr>
               <a:defRPr sz="1000">
                 <a:solidFill>
-                  <a:schemeClr val="accent6"/>
+                  <a:srgbClr val="5F6B76"/>
                 </a:solidFill>
               </a:defRPr>
             </a:lvl1pPr>
@@ -19111,7 +19099,7 @@
             <a:r>
               <a:rPr lang="en-US" sz="1300" b="1" dirty="0">
                 <a:solidFill>
-                  <a:schemeClr val="accent2"/>
+                  <a:srgbClr val="1F7A70"/>
                 </a:solidFill>
               </a:rPr>
               <a:t>FAMILY 12 · MODEL FIT AND SELECTION</a:t>
@@ -19149,7 +19137,7 @@
             <a:r>
               <a:rPr lang="en-US" sz="3600" b="1" dirty="0">
                 <a:solidFill>
-                  <a:schemeClr val="tx2"/>
+                  <a:srgbClr val="0B3C49"/>
                 </a:solidFill>
               </a:rPr>
               <a:t>Does the model describe the data?</a:t>
@@ -19169,17 +19157,17 @@
             <a:off x="548640" y="1554480"/>
             <a:ext cx="5394960" cy="2240280"/>
           </a:xfrm>
-          <a:prstGeom prst="roundRect">
+          <a:prstGeom prst="rect">
             <a:avLst>
               <a:gd name="adj" fmla="val 3265"/>
             </a:avLst>
           </a:prstGeom>
           <a:solidFill>
-            <a:schemeClr val="bg2"/>
+            <a:srgbClr val="EEF4F5"/>
           </a:solidFill>
           <a:ln w="12700">
             <a:solidFill>
-              <a:schemeClr val="bg2"/>
+              <a:srgbClr val="EEF4F5"/>
             </a:solidFill>
             <a:prstDash val="solid"/>
           </a:ln>
@@ -19212,7 +19200,7 @@
             <a:r>
               <a:rPr lang="en-US" sz="1600" b="1" dirty="0">
                 <a:solidFill>
-                  <a:schemeClr val="tx2"/>
+                  <a:srgbClr val="0B3C49"/>
                 </a:solidFill>
               </a:rPr>
               <a:t>Error metrics</a:t>
@@ -19236,7 +19224,7 @@
             <a:avLst/>
           </a:prstGeom>
           <a:solidFill>
-            <a:schemeClr val="bg1"/>
+            <a:srgbClr val="FFFFFF"/>
           </a:solidFill>
           <a:ln/>
         </p:spPr>
@@ -19250,7 +19238,7 @@
             <a:r>
               <a:rPr lang="en-US" sz="1600" dirty="0">
                 <a:solidFill>
-                  <a:schemeClr val="accent4"/>
+                  <a:srgbClr val="264653"/>
                 </a:solidFill>
                 <a:latin typeface="+mj-lt" pitchFamily="34" charset="0"/>
                 <a:ea typeface="+mj-lt" pitchFamily="34" charset="-122"/>
@@ -19267,7 +19255,7 @@
             <a:r>
               <a:rPr lang="en-US" sz="1600" dirty="0">
                 <a:solidFill>
-                  <a:schemeClr val="accent4"/>
+                  <a:srgbClr val="264653"/>
                 </a:solidFill>
                 <a:latin typeface="+mj-lt" pitchFamily="34" charset="0"/>
                 <a:ea typeface="+mj-lt" pitchFamily="34" charset="-122"/>
@@ -19306,7 +19294,7 @@
             <a:r>
               <a:rPr lang="en-US" sz="1400" dirty="0">
                 <a:solidFill>
-                  <a:schemeClr val="tx1"/>
+                  <a:srgbClr val="1B2430"/>
                 </a:solidFill>
               </a:rPr>
               <a:t>Accuracy of predictions; report on held-out data, not the fitting data.</a:t>
@@ -19326,17 +19314,17 @@
             <a:off x="6217920" y="1554480"/>
             <a:ext cx="5394960" cy="2240280"/>
           </a:xfrm>
-          <a:prstGeom prst="roundRect">
+          <a:prstGeom prst="rect">
             <a:avLst>
               <a:gd name="adj" fmla="val 3265"/>
             </a:avLst>
           </a:prstGeom>
           <a:solidFill>
-            <a:schemeClr val="bg2"/>
+            <a:srgbClr val="EEF4F5"/>
           </a:solidFill>
           <a:ln w="12700">
             <a:solidFill>
-              <a:schemeClr val="bg2"/>
+              <a:srgbClr val="EEF4F5"/>
             </a:solidFill>
             <a:prstDash val="solid"/>
           </a:ln>
@@ -19369,7 +19357,7 @@
             <a:r>
               <a:rPr lang="en-US" sz="1600" b="1" dirty="0">
                 <a:solidFill>
-                  <a:schemeClr val="tx2"/>
+                  <a:srgbClr val="0B3C49"/>
                 </a:solidFill>
               </a:rPr>
               <a:t>Information criteria</a:t>
@@ -19393,7 +19381,7 @@
             <a:avLst/>
           </a:prstGeom>
           <a:solidFill>
-            <a:schemeClr val="bg1"/>
+            <a:srgbClr val="FFFFFF"/>
           </a:solidFill>
           <a:ln/>
         </p:spPr>
@@ -19407,7 +19395,7 @@
             <a:r>
               <a:rPr lang="en-US" sz="1600" dirty="0">
                 <a:solidFill>
-                  <a:schemeClr val="accent4"/>
+                  <a:srgbClr val="264653"/>
                 </a:solidFill>
                 <a:latin typeface="+mj-lt" pitchFamily="34" charset="0"/>
                 <a:ea typeface="+mj-lt" pitchFamily="34" charset="-122"/>
@@ -19424,7 +19412,7 @@
             <a:r>
               <a:rPr lang="en-US" sz="1600" dirty="0">
                 <a:solidFill>
-                  <a:schemeClr val="accent4"/>
+                  <a:srgbClr val="264653"/>
                 </a:solidFill>
                 <a:latin typeface="+mj-lt" pitchFamily="34" charset="0"/>
                 <a:ea typeface="+mj-lt" pitchFamily="34" charset="-122"/>
@@ -19463,7 +19451,7 @@
             <a:r>
               <a:rPr lang="en-US" sz="1400" dirty="0">
                 <a:solidFill>
-                  <a:schemeClr val="tx1"/>
+                  <a:srgbClr val="1B2430"/>
                 </a:solidFill>
               </a:rPr>
               <a:t>Trade fit against complexity k; choose between growth laws, compartments or covariates.</a:t>
@@ -19483,17 +19471,17 @@
             <a:off x="548640" y="4023360"/>
             <a:ext cx="5394960" cy="2240280"/>
           </a:xfrm>
-          <a:prstGeom prst="roundRect">
+          <a:prstGeom prst="rect">
             <a:avLst>
               <a:gd name="adj" fmla="val 3265"/>
             </a:avLst>
           </a:prstGeom>
           <a:solidFill>
-            <a:schemeClr val="bg2"/>
+            <a:srgbClr val="EEF4F5"/>
           </a:solidFill>
           <a:ln w="12700">
             <a:solidFill>
-              <a:schemeClr val="bg2"/>
+              <a:srgbClr val="EEF4F5"/>
             </a:solidFill>
             <a:prstDash val="solid"/>
           </a:ln>
@@ -19526,7 +19514,7 @@
             <a:r>
               <a:rPr lang="en-US" sz="1600" b="1" dirty="0">
                 <a:solidFill>
-                  <a:schemeClr val="tx2"/>
+                  <a:srgbClr val="0B3C49"/>
                 </a:solidFill>
               </a:rPr>
               <a:t>Cross-validation</a:t>
@@ -19550,7 +19538,7 @@
             <a:avLst/>
           </a:prstGeom>
           <a:solidFill>
-            <a:schemeClr val="bg1"/>
+            <a:srgbClr val="FFFFFF"/>
           </a:solidFill>
           <a:ln/>
         </p:spPr>
@@ -19564,7 +19552,7 @@
             <a:r>
               <a:rPr lang="en-US" sz="1600" dirty="0">
                 <a:solidFill>
-                  <a:schemeClr val="accent4"/>
+                  <a:srgbClr val="264653"/>
                 </a:solidFill>
                 <a:latin typeface="+mj-lt" pitchFamily="34" charset="0"/>
                 <a:ea typeface="+mj-lt" pitchFamily="34" charset="-122"/>
@@ -19603,7 +19591,7 @@
             <a:r>
               <a:rPr lang="en-US" sz="1400" dirty="0">
                 <a:solidFill>
-                  <a:schemeClr val="tx1"/>
+                  <a:srgbClr val="1B2430"/>
                 </a:solidFill>
               </a:rPr>
               <a:t>K-fold or leave-one-subject-out; nested CV when tuning hyper-parameters too.</a:t>
@@ -19623,17 +19611,17 @@
             <a:off x="6217920" y="4023360"/>
             <a:ext cx="5394960" cy="2240280"/>
           </a:xfrm>
-          <a:prstGeom prst="roundRect">
+          <a:prstGeom prst="rect">
             <a:avLst>
               <a:gd name="adj" fmla="val 3265"/>
             </a:avLst>
           </a:prstGeom>
           <a:solidFill>
-            <a:schemeClr val="bg2"/>
+            <a:srgbClr val="EEF4F5"/>
           </a:solidFill>
           <a:ln w="12700">
             <a:solidFill>
-              <a:schemeClr val="bg2"/>
+              <a:srgbClr val="EEF4F5"/>
             </a:solidFill>
             <a:prstDash val="solid"/>
           </a:ln>
@@ -19666,7 +19654,7 @@
             <a:r>
               <a:rPr lang="en-US" sz="1600" b="1" dirty="0">
                 <a:solidFill>
-                  <a:schemeClr val="tx2"/>
+                  <a:srgbClr val="0B3C49"/>
                 </a:solidFill>
               </a:rPr>
               <a:t>Predictive checks</a:t>
@@ -19690,7 +19678,7 @@
             <a:avLst/>
           </a:prstGeom>
           <a:solidFill>
-            <a:schemeClr val="bg1"/>
+            <a:srgbClr val="FFFFFF"/>
           </a:solidFill>
           <a:ln/>
         </p:spPr>
@@ -19704,7 +19692,7 @@
             <a:r>
               <a:rPr lang="en-US" sz="1400" dirty="0">
                 <a:solidFill>
-                  <a:schemeClr val="accent4"/>
+                  <a:srgbClr val="264653"/>
                 </a:solidFill>
                 <a:latin typeface="+mj-lt" pitchFamily="34" charset="0"/>
                 <a:ea typeface="+mj-lt" pitchFamily="34" charset="-122"/>
@@ -19721,7 +19709,7 @@
             <a:r>
               <a:rPr lang="en-US" sz="1400" dirty="0">
                 <a:solidFill>
-                  <a:schemeClr val="accent4"/>
+                  <a:srgbClr val="264653"/>
                 </a:solidFill>
                 <a:latin typeface="+mj-lt" pitchFamily="34" charset="0"/>
                 <a:ea typeface="+mj-lt" pitchFamily="34" charset="-122"/>
@@ -19760,7 +19748,7 @@
             <a:r>
               <a:rPr lang="en-US" sz="1400" dirty="0">
                 <a:solidFill>
-                  <a:schemeClr val="tx1"/>
+                  <a:srgbClr val="1B2430"/>
                 </a:solidFill>
               </a:rPr>
               <a:t>Simulate new data from the fitted model and compare to what was observed.</a:t>
@@ -19799,7 +19787,7 @@
             <a:lvl1pPr>
               <a:defRPr sz="1000">
                 <a:solidFill>
-                  <a:schemeClr val="accent6"/>
+                  <a:srgbClr val="5F6B76"/>
                 </a:solidFill>
               </a:defRPr>
             </a:lvl1pPr>
@@ -19868,7 +19856,7 @@
             <a:r>
               <a:rPr lang="en-US" sz="1300" b="1" dirty="0">
                 <a:solidFill>
-                  <a:schemeClr val="accent2"/>
+                  <a:srgbClr val="1F7A70"/>
                 </a:solidFill>
               </a:rPr>
               <a:t>FAMILY 12 · VERIFICATION, VALIDATION, CREDIBILITY</a:t>
@@ -19906,7 +19894,7 @@
             <a:r>
               <a:rPr lang="en-US" sz="3600" b="1" dirty="0">
                 <a:solidFill>
-                  <a:schemeClr val="tx2"/>
+                  <a:srgbClr val="0B3C49"/>
                 </a:solidFill>
               </a:rPr>
               <a:t>When can a twin be trusted?</a:t>
@@ -19926,17 +19914,17 @@
             <a:off x="548640" y="1554480"/>
             <a:ext cx="5394960" cy="2240280"/>
           </a:xfrm>
-          <a:prstGeom prst="roundRect">
+          <a:prstGeom prst="rect">
             <a:avLst>
               <a:gd name="adj" fmla="val 3265"/>
             </a:avLst>
           </a:prstGeom>
           <a:solidFill>
-            <a:schemeClr val="bg2"/>
+            <a:srgbClr val="EEF4F5"/>
           </a:solidFill>
           <a:ln w="12700">
             <a:solidFill>
-              <a:schemeClr val="bg2"/>
+              <a:srgbClr val="EEF4F5"/>
             </a:solidFill>
             <a:prstDash val="solid"/>
           </a:ln>
@@ -19969,7 +19957,7 @@
             <a:r>
               <a:rPr lang="en-US" sz="1600" b="1" dirty="0">
                 <a:solidFill>
-                  <a:schemeClr val="tx2"/>
+                  <a:srgbClr val="0B3C49"/>
                 </a:solidFill>
               </a:rPr>
               <a:t>Verification (solve equations right)</a:t>
@@ -19993,7 +19981,7 @@
             <a:avLst/>
           </a:prstGeom>
           <a:solidFill>
-            <a:schemeClr val="bg1"/>
+            <a:srgbClr val="FFFFFF"/>
           </a:solidFill>
           <a:ln/>
         </p:spPr>
@@ -20007,7 +19995,7 @@
             <a:r>
               <a:rPr lang="en-US" sz="1600" dirty="0">
                 <a:solidFill>
-                  <a:schemeClr val="accent4"/>
+                  <a:srgbClr val="264653"/>
                 </a:solidFill>
                 <a:latin typeface="+mj-lt" pitchFamily="34" charset="0"/>
                 <a:ea typeface="+mj-lt" pitchFamily="34" charset="-122"/>
@@ -20024,7 +20012,7 @@
             <a:r>
               <a:rPr lang="en-US" sz="1600" dirty="0">
                 <a:solidFill>
-                  <a:schemeClr val="accent4"/>
+                  <a:srgbClr val="264653"/>
                 </a:solidFill>
                 <a:latin typeface="+mj-lt" pitchFamily="34" charset="0"/>
                 <a:ea typeface="+mj-lt" pitchFamily="34" charset="-122"/>
@@ -20063,7 +20051,7 @@
             <a:r>
               <a:rPr lang="en-US" sz="1400" dirty="0">
                 <a:solidFill>
-                  <a:schemeClr val="tx1"/>
+                  <a:srgbClr val="1B2430"/>
                 </a:solidFill>
               </a:rPr>
               <a:t>Mesh and time-step convergence; code tested against analytical solutions.</a:t>
@@ -20083,17 +20071,17 @@
             <a:off x="6217920" y="1554480"/>
             <a:ext cx="5394960" cy="2240280"/>
           </a:xfrm>
-          <a:prstGeom prst="roundRect">
+          <a:prstGeom prst="rect">
             <a:avLst>
               <a:gd name="adj" fmla="val 3265"/>
             </a:avLst>
           </a:prstGeom>
           <a:solidFill>
-            <a:schemeClr val="bg2"/>
+            <a:srgbClr val="EEF4F5"/>
           </a:solidFill>
           <a:ln w="12700">
             <a:solidFill>
-              <a:schemeClr val="bg2"/>
+              <a:srgbClr val="EEF4F5"/>
             </a:solidFill>
             <a:prstDash val="solid"/>
           </a:ln>
@@ -20126,7 +20114,7 @@
             <a:r>
               <a:rPr lang="en-US" sz="1600" b="1" dirty="0">
                 <a:solidFill>
-                  <a:schemeClr val="tx2"/>
+                  <a:srgbClr val="0B3C49"/>
                 </a:solidFill>
               </a:rPr>
               <a:t>Validation (solve right equations)</a:t>
@@ -20150,7 +20138,7 @@
             <a:avLst/>
           </a:prstGeom>
           <a:solidFill>
-            <a:schemeClr val="bg1"/>
+            <a:srgbClr val="FFFFFF"/>
           </a:solidFill>
           <a:ln/>
         </p:spPr>
@@ -20164,7 +20152,7 @@
             <a:r>
               <a:rPr lang="en-US" sz="1400" dirty="0">
                 <a:solidFill>
-                  <a:schemeClr val="accent4"/>
+                  <a:srgbClr val="264653"/>
                 </a:solidFill>
                 <a:latin typeface="+mj-lt" pitchFamily="34" charset="0"/>
                 <a:ea typeface="+mj-lt" pitchFamily="34" charset="-122"/>
@@ -20203,7 +20191,7 @@
             <a:r>
               <a:rPr lang="en-US" sz="1400" dirty="0">
                 <a:solidFill>
-                  <a:schemeClr val="tx1"/>
+                  <a:srgbClr val="1B2430"/>
                 </a:solidFill>
               </a:rPr>
               <a:t>Simulation S vs experiment D, judged against combined uncertainty (ASME V&amp;V 20).</a:t>
@@ -20223,17 +20211,17 @@
             <a:off x="548640" y="4023360"/>
             <a:ext cx="5394960" cy="2240280"/>
           </a:xfrm>
-          <a:prstGeom prst="roundRect">
+          <a:prstGeom prst="rect">
             <a:avLst>
               <a:gd name="adj" fmla="val 3265"/>
             </a:avLst>
           </a:prstGeom>
           <a:solidFill>
-            <a:schemeClr val="bg2"/>
+            <a:srgbClr val="EEF4F5"/>
           </a:solidFill>
           <a:ln w="12700">
             <a:solidFill>
-              <a:schemeClr val="bg2"/>
+              <a:srgbClr val="EEF4F5"/>
             </a:solidFill>
             <a:prstDash val="solid"/>
           </a:ln>
@@ -20266,7 +20254,7 @@
             <a:r>
               <a:rPr lang="en-US" sz="1600" b="1" dirty="0">
                 <a:solidFill>
-                  <a:schemeClr val="tx2"/>
+                  <a:srgbClr val="0B3C49"/>
                 </a:solidFill>
               </a:rPr>
               <a:t>Probabilistic calibration</a:t>
@@ -20290,7 +20278,7 @@
             <a:avLst/>
           </a:prstGeom>
           <a:solidFill>
-            <a:schemeClr val="bg1"/>
+            <a:srgbClr val="FFFFFF"/>
           </a:solidFill>
           <a:ln/>
         </p:spPr>
@@ -20304,7 +20292,7 @@
             <a:r>
               <a:rPr lang="en-US" sz="1600" dirty="0">
                 <a:solidFill>
-                  <a:schemeClr val="accent4"/>
+                  <a:srgbClr val="264653"/>
                 </a:solidFill>
                 <a:latin typeface="+mj-lt" pitchFamily="34" charset="0"/>
                 <a:ea typeface="+mj-lt" pitchFamily="34" charset="-122"/>
@@ -20321,7 +20309,7 @@
             <a:r>
               <a:rPr lang="en-US" sz="1600" dirty="0">
                 <a:solidFill>
-                  <a:schemeClr val="accent4"/>
+                  <a:srgbClr val="264653"/>
                 </a:solidFill>
                 <a:latin typeface="+mj-lt" pitchFamily="34" charset="0"/>
                 <a:ea typeface="+mj-lt" pitchFamily="34" charset="-122"/>
@@ -20360,7 +20348,7 @@
             <a:r>
               <a:rPr lang="en-US" sz="1400" dirty="0">
                 <a:solidFill>
-                  <a:schemeClr val="tx1"/>
+                  <a:srgbClr val="1B2430"/>
                 </a:solidFill>
               </a:rPr>
               <a:t>Are the twin's uncertainty bands honest? Check on new subjects.</a:t>
@@ -20380,17 +20368,17 @@
             <a:off x="6217920" y="4023360"/>
             <a:ext cx="5394960" cy="2240280"/>
           </a:xfrm>
-          <a:prstGeom prst="roundRect">
+          <a:prstGeom prst="rect">
             <a:avLst>
               <a:gd name="adj" fmla="val 3265"/>
             </a:avLst>
           </a:prstGeom>
           <a:solidFill>
-            <a:schemeClr val="bg2"/>
+            <a:srgbClr val="EEF4F5"/>
           </a:solidFill>
           <a:ln w="12700">
             <a:solidFill>
-              <a:schemeClr val="bg2"/>
+              <a:srgbClr val="EEF4F5"/>
             </a:solidFill>
             <a:prstDash val="solid"/>
           </a:ln>
@@ -20423,7 +20411,7 @@
             <a:r>
               <a:rPr lang="en-US" sz="1600" b="1" dirty="0">
                 <a:solidFill>
-                  <a:schemeClr val="tx2"/>
+                  <a:srgbClr val="0B3C49"/>
                 </a:solidFill>
               </a:rPr>
               <a:t>Risk-informed credibility</a:t>
@@ -20447,7 +20435,7 @@
             <a:avLst/>
           </a:prstGeom>
           <a:solidFill>
-            <a:schemeClr val="bg1"/>
+            <a:srgbClr val="FFFFFF"/>
           </a:solidFill>
           <a:ln/>
         </p:spPr>
@@ -20461,7 +20449,7 @@
             <a:r>
               <a:rPr lang="en-US" sz="1500" dirty="0">
                 <a:solidFill>
-                  <a:schemeClr val="accent4"/>
+                  <a:srgbClr val="264653"/>
                 </a:solidFill>
                 <a:latin typeface="+mj-lt" pitchFamily="34" charset="0"/>
                 <a:ea typeface="+mj-lt" pitchFamily="34" charset="-122"/>
@@ -20500,7 +20488,7 @@
             <a:r>
               <a:rPr lang="en-US" sz="1400" dirty="0">
                 <a:solidFill>
-                  <a:schemeClr val="tx1"/>
+                  <a:srgbClr val="1B2430"/>
                 </a:solidFill>
               </a:rPr>
               <a:t>ASME V&amp;V 40 and FDA guidance: define context of use, then scale verification, validation and UQ.</a:t>
@@ -20539,7 +20527,7 @@
             <a:lvl1pPr>
               <a:defRPr sz="1000">
                 <a:solidFill>
-                  <a:schemeClr val="accent6"/>
+                  <a:srgbClr val="5F6B76"/>
                 </a:solidFill>
               </a:defRPr>
             </a:lvl1pPr>
@@ -20608,7 +20596,7 @@
             <a:r>
               <a:rPr lang="en-US" sz="1300" b="1" dirty="0">
                 <a:solidFill>
-                  <a:schemeClr val="accent2"/>
+                  <a:srgbClr val="1F7A70"/>
                 </a:solidFill>
               </a:rPr>
               <a:t>CHOOSING A MODEL</a:t>
@@ -20646,7 +20634,7 @@
             <a:r>
               <a:rPr lang="en-US" sz="3600" b="1" dirty="0">
                 <a:solidFill>
-                  <a:schemeClr val="tx2"/>
+                  <a:srgbClr val="0B3C49"/>
                 </a:solidFill>
               </a:rPr>
               <a:t>Match the question to the model family</a:t>
@@ -20694,7 +20682,7 @@
                       <a:r>
                         <a:rPr lang="en-US" sz="1300" b="1" dirty="0">
                           <a:solidFill>
-                            <a:schemeClr val="bg1"/>
+                            <a:srgbClr val="FFFFFF"/>
                           </a:solidFill>
                         </a:rPr>
                         <a:t>Question</a:t>
@@ -20740,7 +20728,7 @@
                       <a:tailEnd type="none" w="med" len="med"/>
                     </a:lnB>
                     <a:solidFill>
-                      <a:schemeClr val="tx2"/>
+                      <a:srgbClr val="0B3C49"/>
                     </a:solidFill>
                   </a:tcPr>
                 </a:tc>
@@ -20755,7 +20743,7 @@
                       <a:r>
                         <a:rPr lang="en-US" sz="1300" b="1" dirty="0">
                           <a:solidFill>
-                            <a:schemeClr val="bg1"/>
+                            <a:srgbClr val="FFFFFF"/>
                           </a:solidFill>
                         </a:rPr>
                         <a:t>Start with</a:t>
@@ -20801,7 +20789,7 @@
                       <a:tailEnd type="none" w="med" len="med"/>
                     </a:lnB>
                     <a:solidFill>
-                      <a:schemeClr val="tx2"/>
+                      <a:srgbClr val="0B3C49"/>
                     </a:solidFill>
                   </a:tcPr>
                 </a:tc>
@@ -20816,7 +20804,7 @@
                       <a:r>
                         <a:rPr lang="en-US" sz="1300" b="1" dirty="0">
                           <a:solidFill>
-                            <a:schemeClr val="bg1"/>
+                            <a:srgbClr val="FFFFFF"/>
                           </a:solidFill>
                         </a:rPr>
                         <a:t>Upgrade to</a:t>
@@ -20862,7 +20850,7 @@
                       <a:tailEnd type="none" w="med" len="med"/>
                     </a:lnB>
                     <a:solidFill>
-                      <a:schemeClr val="tx2"/>
+                      <a:srgbClr val="0B3C49"/>
                     </a:solidFill>
                   </a:tcPr>
                 </a:tc>
@@ -20879,7 +20867,7 @@
                       <a:r>
                         <a:rPr lang="en-US" sz="1300" b="1" dirty="0">
                           <a:solidFill>
-                            <a:schemeClr val="tx2"/>
+                            <a:srgbClr val="0B3C49"/>
                           </a:solidFill>
                         </a:rPr>
                         <a:t>How does exposure change over time?</a:t>
@@ -20925,7 +20913,7 @@
                       <a:tailEnd type="none" w="med" len="med"/>
                     </a:lnB>
                     <a:solidFill>
-                      <a:schemeClr val="bg1"/>
+                      <a:srgbClr val="FFFFFF"/>
                     </a:solidFill>
                   </a:tcPr>
                 </a:tc>
@@ -20940,7 +20928,7 @@
                       <a:r>
                         <a:rPr lang="en-US" sz="1300" dirty="0">
                           <a:solidFill>
-                            <a:schemeClr val="tx1"/>
+                            <a:srgbClr val="1B2430"/>
                           </a:solidFill>
                         </a:rPr>
                         <a:t>Compartmental PK</a:t>
@@ -20986,7 +20974,7 @@
                       <a:tailEnd type="none" w="med" len="med"/>
                     </a:lnB>
                     <a:solidFill>
-                      <a:schemeClr val="bg1"/>
+                      <a:srgbClr val="FFFFFF"/>
                     </a:solidFill>
                   </a:tcPr>
                 </a:tc>
@@ -21001,7 +20989,7 @@
                       <a:r>
                         <a:rPr lang="en-US" sz="1300" dirty="0">
                           <a:solidFill>
-                            <a:schemeClr val="accent6"/>
+                            <a:srgbClr val="5F6B76"/>
                           </a:solidFill>
                         </a:rPr>
                         <a:t>PBPK, TMDD</a:t>
@@ -21047,7 +21035,7 @@
                       <a:tailEnd type="none" w="med" len="med"/>
                     </a:lnB>
                     <a:solidFill>
-                      <a:schemeClr val="bg1"/>
+                      <a:srgbClr val="FFFFFF"/>
                     </a:solidFill>
                   </a:tcPr>
                 </a:tc>
@@ -21064,7 +21052,7 @@
                       <a:r>
                         <a:rPr lang="en-US" sz="1300" b="1" dirty="0">
                           <a:solidFill>
-                            <a:schemeClr val="tx2"/>
+                            <a:srgbClr val="0B3C49"/>
                           </a:solidFill>
                         </a:rPr>
                         <a:t>How does exposure produce effect?</a:t>
@@ -21110,7 +21098,7 @@
                       <a:tailEnd type="none" w="med" len="med"/>
                     </a:lnB>
                     <a:solidFill>
-                      <a:schemeClr val="bg1"/>
+                      <a:srgbClr val="FFFFFF"/>
                     </a:solidFill>
                   </a:tcPr>
                 </a:tc>
@@ -21125,7 +21113,7 @@
                       <a:r>
                         <a:rPr lang="en-US" sz="1300" dirty="0">
                           <a:solidFill>
-                            <a:schemeClr val="tx1"/>
+                            <a:srgbClr val="1B2430"/>
                           </a:solidFill>
                         </a:rPr>
                         <a:t>Emax / Hill, indirect response</a:t>
@@ -21171,7 +21159,7 @@
                       <a:tailEnd type="none" w="med" len="med"/>
                     </a:lnB>
                     <a:solidFill>
-                      <a:schemeClr val="bg1"/>
+                      <a:srgbClr val="FFFFFF"/>
                     </a:solidFill>
                   </a:tcPr>
                 </a:tc>
@@ -21186,7 +21174,7 @@
                       <a:r>
                         <a:rPr lang="en-US" sz="1300" dirty="0">
                           <a:solidFill>
-                            <a:schemeClr val="accent6"/>
+                            <a:srgbClr val="5F6B76"/>
                           </a:solidFill>
                         </a:rPr>
                         <a:t>QSP network</a:t>
@@ -21232,7 +21220,7 @@
                       <a:tailEnd type="none" w="med" len="med"/>
                     </a:lnB>
                     <a:solidFill>
-                      <a:schemeClr val="bg1"/>
+                      <a:srgbClr val="FFFFFF"/>
                     </a:solidFill>
                   </a:tcPr>
                 </a:tc>
@@ -21249,7 +21237,7 @@
                       <a:r>
                         <a:rPr lang="en-US" sz="1300" b="1" dirty="0">
                           <a:solidFill>
-                            <a:schemeClr val="tx2"/>
+                            <a:srgbClr val="0B3C49"/>
                           </a:solidFill>
                         </a:rPr>
                         <a:t>How does disease evolve?</a:t>
@@ -21295,7 +21283,7 @@
                       <a:tailEnd type="none" w="med" len="med"/>
                     </a:lnB>
                     <a:solidFill>
-                      <a:schemeClr val="bg1"/>
+                      <a:srgbClr val="FFFFFF"/>
                     </a:solidFill>
                   </a:tcPr>
                 </a:tc>
@@ -21310,7 +21298,7 @@
                       <a:r>
                         <a:rPr lang="en-US" sz="1300" dirty="0">
                           <a:solidFill>
-                            <a:schemeClr val="tx1"/>
+                            <a:srgbClr val="1B2430"/>
                           </a:solidFill>
                         </a:rPr>
                         <a:t>Logistic / Gompertz, SIR, slope model</a:t>
@@ -21356,7 +21344,7 @@
                       <a:tailEnd type="none" w="med" len="med"/>
                     </a:lnB>
                     <a:solidFill>
-                      <a:schemeClr val="bg1"/>
+                      <a:srgbClr val="FFFFFF"/>
                     </a:solidFill>
                   </a:tcPr>
                 </a:tc>
@@ -21371,7 +21359,7 @@
                       <a:r>
                         <a:rPr lang="en-US" sz="1300" dirty="0">
                           <a:solidFill>
-                            <a:schemeClr val="accent6"/>
+                            <a:srgbClr val="5F6B76"/>
                           </a:solidFill>
                         </a:rPr>
                         <a:t>Reaction–diffusion, agent-based</a:t>
@@ -21417,7 +21405,7 @@
                       <a:tailEnd type="none" w="med" len="med"/>
                     </a:lnB>
                     <a:solidFill>
-                      <a:schemeClr val="bg1"/>
+                      <a:srgbClr val="FFFFFF"/>
                     </a:solidFill>
                   </a:tcPr>
                 </a:tc>
@@ -21434,7 +21422,7 @@
                       <a:r>
                         <a:rPr lang="en-US" sz="1300" b="1" dirty="0">
                           <a:solidFill>
-                            <a:schemeClr val="tx2"/>
+                            <a:srgbClr val="0B3C49"/>
                           </a:solidFill>
                         </a:rPr>
                         <a:t>How do individuals differ?</a:t>
@@ -21480,7 +21468,7 @@
                       <a:tailEnd type="none" w="med" len="med"/>
                     </a:lnB>
                     <a:solidFill>
-                      <a:schemeClr val="bg1"/>
+                      <a:srgbClr val="FFFFFF"/>
                     </a:solidFill>
                   </a:tcPr>
                 </a:tc>
@@ -21495,7 +21483,7 @@
                       <a:r>
                         <a:rPr lang="en-US" sz="1300" dirty="0">
                           <a:solidFill>
-                            <a:schemeClr val="tx1"/>
+                            <a:srgbClr val="1B2430"/>
                           </a:solidFill>
                         </a:rPr>
                         <a:t>Mixed effects (NLME, LMM)</a:t>
@@ -21541,7 +21529,7 @@
                       <a:tailEnd type="none" w="med" len="med"/>
                     </a:lnB>
                     <a:solidFill>
-                      <a:schemeClr val="bg1"/>
+                      <a:srgbClr val="FFFFFF"/>
                     </a:solidFill>
                   </a:tcPr>
                 </a:tc>
@@ -21556,7 +21544,7 @@
                       <a:r>
                         <a:rPr lang="en-US" sz="1300" dirty="0">
                           <a:solidFill>
-                            <a:schemeClr val="accent6"/>
+                            <a:srgbClr val="5F6B76"/>
                           </a:solidFill>
                         </a:rPr>
                         <a:t>Hierarchical Bayes, copula cohorts</a:t>
@@ -21602,7 +21590,7 @@
                       <a:tailEnd type="none" w="med" len="med"/>
                     </a:lnB>
                     <a:solidFill>
-                      <a:schemeClr val="bg1"/>
+                      <a:srgbClr val="FFFFFF"/>
                     </a:solidFill>
                   </a:tcPr>
                 </a:tc>
@@ -21619,7 +21607,7 @@
                       <a:r>
                         <a:rPr lang="en-US" sz="1300" b="1" dirty="0">
                           <a:solidFill>
-                            <a:schemeClr val="tx2"/>
+                            <a:srgbClr val="0B3C49"/>
                           </a:solidFill>
                         </a:rPr>
                         <a:t>How do I keep the twin current?</a:t>
@@ -21665,7 +21653,7 @@
                       <a:tailEnd type="none" w="med" len="med"/>
                     </a:lnB>
                     <a:solidFill>
-                      <a:schemeClr val="bg1"/>
+                      <a:srgbClr val="FFFFFF"/>
                     </a:solidFill>
                   </a:tcPr>
                 </a:tc>
@@ -21680,7 +21668,7 @@
                       <a:r>
                         <a:rPr lang="en-US" sz="1300" dirty="0">
                           <a:solidFill>
-                            <a:schemeClr val="tx1"/>
+                            <a:srgbClr val="1B2430"/>
                           </a:solidFill>
                         </a:rPr>
                         <a:t>Kalman / EKF</a:t>
@@ -21726,7 +21714,7 @@
                       <a:tailEnd type="none" w="med" len="med"/>
                     </a:lnB>
                     <a:solidFill>
-                      <a:schemeClr val="bg1"/>
+                      <a:srgbClr val="FFFFFF"/>
                     </a:solidFill>
                   </a:tcPr>
                 </a:tc>
@@ -21741,7 +21729,7 @@
                       <a:r>
                         <a:rPr lang="en-US" sz="1300" dirty="0">
                           <a:solidFill>
-                            <a:schemeClr val="accent6"/>
+                            <a:srgbClr val="5F6B76"/>
                           </a:solidFill>
                         </a:rPr>
                         <a:t>Particle filter, 4D-Var, SBI</a:t>
@@ -21787,7 +21775,7 @@
                       <a:tailEnd type="none" w="med" len="med"/>
                     </a:lnB>
                     <a:solidFill>
-                      <a:schemeClr val="bg1"/>
+                      <a:srgbClr val="FFFFFF"/>
                     </a:solidFill>
                   </a:tcPr>
                 </a:tc>
@@ -21804,7 +21792,7 @@
                       <a:r>
                         <a:rPr lang="en-US" sz="1300" b="1" dirty="0">
                           <a:solidFill>
-                            <a:schemeClr val="tx2"/>
+                            <a:srgbClr val="0B3C49"/>
                           </a:solidFill>
                         </a:rPr>
                         <a:t>How sure is the prediction?</a:t>
@@ -21850,7 +21838,7 @@
                       <a:tailEnd type="none" w="med" len="med"/>
                     </a:lnB>
                     <a:solidFill>
-                      <a:schemeClr val="bg1"/>
+                      <a:srgbClr val="FFFFFF"/>
                     </a:solidFill>
                   </a:tcPr>
                 </a:tc>
@@ -21865,7 +21853,7 @@
                       <a:r>
                         <a:rPr lang="en-US" sz="1300" dirty="0">
                           <a:solidFill>
-                            <a:schemeClr val="tx1"/>
+                            <a:srgbClr val="1B2430"/>
                           </a:solidFill>
                         </a:rPr>
                         <a:t>Monte Carlo + Morris</a:t>
@@ -21911,7 +21899,7 @@
                       <a:tailEnd type="none" w="med" len="med"/>
                     </a:lnB>
                     <a:solidFill>
-                      <a:schemeClr val="bg1"/>
+                      <a:srgbClr val="FFFFFF"/>
                     </a:solidFill>
                   </a:tcPr>
                 </a:tc>
@@ -21926,7 +21914,7 @@
                       <a:r>
                         <a:rPr lang="en-US" sz="1300" dirty="0">
                           <a:solidFill>
-                            <a:schemeClr val="accent6"/>
+                            <a:srgbClr val="5F6B76"/>
                           </a:solidFill>
                         </a:rPr>
                         <a:t>Sobol, polynomial chaos, KOH</a:t>
@@ -21972,7 +21960,7 @@
                       <a:tailEnd type="none" w="med" len="med"/>
                     </a:lnB>
                     <a:solidFill>
-                      <a:schemeClr val="bg1"/>
+                      <a:srgbClr val="FFFFFF"/>
                     </a:solidFill>
                   </a:tcPr>
                 </a:tc>
@@ -21989,7 +21977,7 @@
                       <a:r>
                         <a:rPr lang="en-US" sz="1300" b="1" dirty="0">
                           <a:solidFill>
-                            <a:schemeClr val="tx2"/>
+                            <a:srgbClr val="0B3C49"/>
                           </a:solidFill>
                         </a:rPr>
                         <a:t>Too slow to run thousands of times?</a:t>
@@ -22035,7 +22023,7 @@
                       <a:tailEnd type="none" w="med" len="med"/>
                     </a:lnB>
                     <a:solidFill>
-                      <a:schemeClr val="bg1"/>
+                      <a:srgbClr val="FFFFFF"/>
                     </a:solidFill>
                   </a:tcPr>
                 </a:tc>
@@ -22050,7 +22038,7 @@
                       <a:r>
                         <a:rPr lang="en-US" sz="1300" dirty="0">
                           <a:solidFill>
-                            <a:schemeClr val="tx1"/>
+                            <a:srgbClr val="1B2430"/>
                           </a:solidFill>
                         </a:rPr>
                         <a:t>GP emulator, POD</a:t>
@@ -22096,7 +22084,7 @@
                       <a:tailEnd type="none" w="med" len="med"/>
                     </a:lnB>
                     <a:solidFill>
-                      <a:schemeClr val="bg1"/>
+                      <a:srgbClr val="FFFFFF"/>
                     </a:solidFill>
                   </a:tcPr>
                 </a:tc>
@@ -22111,7 +22099,7 @@
                       <a:r>
                         <a:rPr lang="en-US" sz="1300" dirty="0">
                           <a:solidFill>
-                            <a:schemeClr val="accent6"/>
+                            <a:srgbClr val="5F6B76"/>
                           </a:solidFill>
                         </a:rPr>
                         <a:t>Neural operator, PINN</a:t>
@@ -22157,7 +22145,7 @@
                       <a:tailEnd type="none" w="med" len="med"/>
                     </a:lnB>
                     <a:solidFill>
-                      <a:schemeClr val="bg1"/>
+                      <a:srgbClr val="FFFFFF"/>
                     </a:solidFill>
                   </a:tcPr>
                 </a:tc>
@@ -22174,7 +22162,7 @@
                       <a:r>
                         <a:rPr lang="en-US" sz="1300" b="1" dirty="0">
                           <a:solidFill>
-                            <a:schemeClr val="tx2"/>
+                            <a:srgbClr val="0B3C49"/>
                           </a:solidFill>
                         </a:rPr>
                         <a:t>Does the treatment work in a virtual trial?</a:t>
@@ -22220,7 +22208,7 @@
                       <a:tailEnd type="none" w="med" len="med"/>
                     </a:lnB>
                     <a:solidFill>
-                      <a:schemeClr val="bg1"/>
+                      <a:srgbClr val="FFFFFF"/>
                     </a:solidFill>
                   </a:tcPr>
                 </a:tc>
@@ -22235,7 +22223,7 @@
                       <a:r>
                         <a:rPr lang="en-US" sz="1300" dirty="0">
                           <a:solidFill>
-                            <a:schemeClr val="tx1"/>
+                            <a:srgbClr val="1B2430"/>
                           </a:solidFill>
                         </a:rPr>
                         <a:t>Paired design, power by simulation</a:t>
@@ -22281,7 +22269,7 @@
                       <a:tailEnd type="none" w="med" len="med"/>
                     </a:lnB>
                     <a:solidFill>
-                      <a:schemeClr val="bg1"/>
+                      <a:srgbClr val="FFFFFF"/>
                     </a:solidFill>
                   </a:tcPr>
                 </a:tc>
@@ -22296,7 +22284,7 @@
                       <a:r>
                         <a:rPr lang="en-US" sz="1300" dirty="0">
                           <a:solidFill>
-                            <a:schemeClr val="accent6"/>
+                            <a:srgbClr val="5F6B76"/>
                           </a:solidFill>
                         </a:rPr>
                         <a:t>Adaptive design, PROCOVA</a:t>
@@ -22342,7 +22330,7 @@
                       <a:tailEnd type="none" w="med" len="med"/>
                     </a:lnB>
                     <a:solidFill>
-                      <a:schemeClr val="bg1"/>
+                      <a:srgbClr val="FFFFFF"/>
                     </a:solidFill>
                   </a:tcPr>
                 </a:tc>
@@ -22359,7 +22347,7 @@
                       <a:r>
                         <a:rPr lang="en-US" sz="1300" b="1" dirty="0">
                           <a:solidFill>
-                            <a:schemeClr val="tx2"/>
+                            <a:srgbClr val="0B3C49"/>
                           </a:solidFill>
                         </a:rPr>
                         <a:t>What should be done next?</a:t>
@@ -22405,7 +22393,7 @@
                       <a:tailEnd type="none" w="med" len="med"/>
                     </a:lnB>
                     <a:solidFill>
-                      <a:schemeClr val="bg1"/>
+                      <a:srgbClr val="FFFFFF"/>
                     </a:solidFill>
                   </a:tcPr>
                 </a:tc>
@@ -22420,7 +22408,7 @@
                       <a:r>
                         <a:rPr lang="en-US" sz="1300" dirty="0">
                           <a:solidFill>
-                            <a:schemeClr val="tx1"/>
+                            <a:srgbClr val="1B2430"/>
                           </a:solidFill>
                         </a:rPr>
                         <a:t>Optimal control</a:t>
@@ -22466,7 +22454,7 @@
                       <a:tailEnd type="none" w="med" len="med"/>
                     </a:lnB>
                     <a:solidFill>
-                      <a:schemeClr val="bg1"/>
+                      <a:srgbClr val="FFFFFF"/>
                     </a:solidFill>
                   </a:tcPr>
                 </a:tc>
@@ -22481,7 +22469,7 @@
                       <a:r>
                         <a:rPr lang="en-US" sz="1300" dirty="0">
                           <a:solidFill>
-                            <a:schemeClr val="accent6"/>
+                            <a:srgbClr val="5F6B76"/>
                           </a:solidFill>
                         </a:rPr>
                         <a:t>MPC, reinforcement learning</a:t>
@@ -22527,7 +22515,7 @@
                       <a:tailEnd type="none" w="med" len="med"/>
                     </a:lnB>
                     <a:solidFill>
-                      <a:schemeClr val="bg1"/>
+                      <a:srgbClr val="FFFFFF"/>
                     </a:solidFill>
                   </a:tcPr>
                 </a:tc>
@@ -22566,7 +22554,7 @@
             <a:lvl1pPr>
               <a:defRPr sz="1000">
                 <a:solidFill>
-                  <a:schemeClr val="accent6"/>
+                  <a:srgbClr val="5F6B76"/>
                 </a:solidFill>
               </a:defRPr>
             </a:lvl1pPr>
@@ -22635,7 +22623,7 @@
             <a:r>
               <a:rPr lang="en-US" sz="1300" b="1" dirty="0">
                 <a:solidFill>
-                  <a:schemeClr val="accent2"/>
+                  <a:srgbClr val="1F7A70"/>
                 </a:solidFill>
               </a:rPr>
               <a:t>HOW THEY FIT TOGETHER</a:t>
@@ -22673,7 +22661,7 @@
             <a:r>
               <a:rPr lang="en-US" sz="3600" b="1" dirty="0">
                 <a:solidFill>
-                  <a:schemeClr val="tx2"/>
+                  <a:srgbClr val="0B3C49"/>
                 </a:solidFill>
               </a:rPr>
               <a:t>The digital-twin loop and the virtual trial</a:t>
@@ -22693,13 +22681,13 @@
             <a:off x="548640" y="1691640"/>
             <a:ext cx="1691640" cy="1097280"/>
           </a:xfrm>
-          <a:prstGeom prst="roundRect">
+          <a:prstGeom prst="rect">
             <a:avLst>
               <a:gd name="adj" fmla="val 8333"/>
             </a:avLst>
           </a:prstGeom>
           <a:solidFill>
-            <a:schemeClr val="accent4"/>
+            <a:srgbClr val="264653"/>
           </a:solidFill>
           <a:ln/>
         </p:spPr>
@@ -22713,7 +22701,7 @@
             <a:r>
               <a:rPr lang="en-US" sz="1400" b="1" dirty="0">
                 <a:solidFill>
-                  <a:schemeClr val="bg1"/>
+                  <a:srgbClr val="FFFFFF"/>
                 </a:solidFill>
               </a:rPr>
               <a:t>Physical system</a:t>
@@ -22727,7 +22715,7 @@
             <a:r>
               <a:rPr lang="en-US" sz="1200" dirty="0">
                 <a:solidFill>
-                  <a:schemeClr val="bg2"/>
+                  <a:srgbClr val="EEF4F5"/>
                 </a:solidFill>
               </a:rPr>
               <a:t>patient, organ, device</a:t>
@@ -22753,7 +22741,7 @@
           <a:noFill/>
           <a:ln w="19050">
             <a:solidFill>
-              <a:schemeClr val="accent6"/>
+              <a:srgbClr val="5F6B76"/>
             </a:solidFill>
             <a:prstDash val="solid"/>
             <a:tailEnd type="triangle"/>
@@ -22771,13 +22759,13 @@
             <a:off x="2432304" y="1691640"/>
             <a:ext cx="1691640" cy="1097280"/>
           </a:xfrm>
-          <a:prstGeom prst="roundRect">
+          <a:prstGeom prst="rect">
             <a:avLst>
               <a:gd name="adj" fmla="val 8333"/>
             </a:avLst>
           </a:prstGeom>
           <a:solidFill>
-            <a:schemeClr val="tx2"/>
+            <a:srgbClr val="0B3C49"/>
           </a:solidFill>
           <a:ln/>
         </p:spPr>
@@ -22791,7 +22779,7 @@
             <a:r>
               <a:rPr lang="en-US" sz="1400" b="1" dirty="0">
                 <a:solidFill>
-                  <a:schemeClr val="bg1"/>
+                  <a:srgbClr val="FFFFFF"/>
                 </a:solidFill>
               </a:rPr>
               <a:t>Data y</a:t>
@@ -22805,7 +22793,7 @@
             <a:r>
               <a:rPr lang="en-US" sz="1200" dirty="0">
                 <a:solidFill>
-                  <a:schemeClr val="bg2"/>
+                  <a:srgbClr val="EEF4F5"/>
                 </a:solidFill>
               </a:rPr>
               <a:t>sensors, imaging, labs</a:t>
@@ -22831,7 +22819,7 @@
           <a:noFill/>
           <a:ln w="19050">
             <a:solidFill>
-              <a:schemeClr val="accent6"/>
+              <a:srgbClr val="5F6B76"/>
             </a:solidFill>
             <a:prstDash val="solid"/>
             <a:tailEnd type="triangle"/>
@@ -22849,13 +22837,13 @@
             <a:off x="4315968" y="1691640"/>
             <a:ext cx="1691640" cy="1097280"/>
           </a:xfrm>
-          <a:prstGeom prst="roundRect">
+          <a:prstGeom prst="rect">
             <a:avLst>
               <a:gd name="adj" fmla="val 8333"/>
             </a:avLst>
           </a:prstGeom>
           <a:solidFill>
-            <a:schemeClr val="tx2"/>
+            <a:srgbClr val="0B3C49"/>
           </a:solidFill>
           <a:ln/>
         </p:spPr>
@@ -22869,7 +22857,7 @@
             <a:r>
               <a:rPr lang="en-US" sz="1400" b="1" dirty="0">
                 <a:solidFill>
-                  <a:schemeClr val="bg1"/>
+                  <a:srgbClr val="FFFFFF"/>
                 </a:solidFill>
               </a:rPr>
               <a:t>Assimilation</a:t>
@@ -22883,7 +22871,7 @@
             <a:r>
               <a:rPr lang="en-US" sz="1200" dirty="0">
                 <a:solidFill>
-                  <a:schemeClr val="bg2"/>
+                  <a:srgbClr val="EEF4F5"/>
                 </a:solidFill>
               </a:rPr>
               <a:t>θ, x ← y (Family 8)</a:t>
@@ -22909,7 +22897,7 @@
           <a:noFill/>
           <a:ln w="19050">
             <a:solidFill>
-              <a:schemeClr val="accent6"/>
+              <a:srgbClr val="5F6B76"/>
             </a:solidFill>
             <a:prstDash val="solid"/>
             <a:tailEnd type="triangle"/>
@@ -22927,13 +22915,13 @@
             <a:off x="6199632" y="1691640"/>
             <a:ext cx="1691640" cy="1097280"/>
           </a:xfrm>
-          <a:prstGeom prst="roundRect">
+          <a:prstGeom prst="rect">
             <a:avLst>
               <a:gd name="adj" fmla="val 8333"/>
             </a:avLst>
           </a:prstGeom>
           <a:solidFill>
-            <a:schemeClr val="tx2"/>
+            <a:srgbClr val="0B3C49"/>
           </a:solidFill>
           <a:ln/>
         </p:spPr>
@@ -22947,7 +22935,7 @@
             <a:r>
               <a:rPr lang="en-US" sz="1400" b="1" dirty="0">
                 <a:solidFill>
-                  <a:schemeClr val="bg1"/>
+                  <a:srgbClr val="FFFFFF"/>
                 </a:solidFill>
               </a:rPr>
               <a:t>Virtual model</a:t>
@@ -22961,7 +22949,7 @@
             <a:r>
               <a:rPr lang="en-US" sz="1200" dirty="0">
                 <a:solidFill>
-                  <a:schemeClr val="bg2"/>
+                  <a:srgbClr val="EEF4F5"/>
                 </a:solidFill>
               </a:rPr>
               <a:t>x′ = f(x, u, θ) (1–7)</a:t>
@@ -22987,7 +22975,7 @@
           <a:noFill/>
           <a:ln w="19050">
             <a:solidFill>
-              <a:schemeClr val="accent6"/>
+              <a:srgbClr val="5F6B76"/>
             </a:solidFill>
             <a:prstDash val="solid"/>
             <a:tailEnd type="triangle"/>
@@ -23005,13 +22993,13 @@
             <a:off x="8083296" y="1691640"/>
             <a:ext cx="1691640" cy="1097280"/>
           </a:xfrm>
-          <a:prstGeom prst="roundRect">
+          <a:prstGeom prst="rect">
             <a:avLst>
               <a:gd name="adj" fmla="val 8333"/>
             </a:avLst>
           </a:prstGeom>
           <a:solidFill>
-            <a:schemeClr val="tx2"/>
+            <a:srgbClr val="0B3C49"/>
           </a:solidFill>
           <a:ln/>
         </p:spPr>
@@ -23025,7 +23013,7 @@
             <a:r>
               <a:rPr lang="en-US" sz="1400" b="1" dirty="0">
                 <a:solidFill>
-                  <a:schemeClr val="bg1"/>
+                  <a:srgbClr val="FFFFFF"/>
                 </a:solidFill>
               </a:rPr>
               <a:t>Prediction</a:t>
@@ -23039,7 +23027,7 @@
             <a:r>
               <a:rPr lang="en-US" sz="1200" dirty="0">
                 <a:solidFill>
-                  <a:schemeClr val="bg2"/>
+                  <a:srgbClr val="EEF4F5"/>
                 </a:solidFill>
               </a:rPr>
               <a:t>what-if, with UQ (9–10)</a:t>
@@ -23065,7 +23053,7 @@
           <a:noFill/>
           <a:ln w="19050">
             <a:solidFill>
-              <a:schemeClr val="accent6"/>
+              <a:srgbClr val="5F6B76"/>
             </a:solidFill>
             <a:prstDash val="solid"/>
             <a:tailEnd type="triangle"/>
@@ -23083,13 +23071,13 @@
             <a:off x="9966960" y="1691640"/>
             <a:ext cx="1691640" cy="1097280"/>
           </a:xfrm>
-          <a:prstGeom prst="roundRect">
+          <a:prstGeom prst="rect">
             <a:avLst>
               <a:gd name="adj" fmla="val 8333"/>
             </a:avLst>
           </a:prstGeom>
           <a:solidFill>
-            <a:schemeClr val="tx2"/>
+            <a:srgbClr val="0B3C49"/>
           </a:solidFill>
           <a:ln/>
         </p:spPr>
@@ -23103,7 +23091,7 @@
             <a:r>
               <a:rPr lang="en-US" sz="1400" b="1" dirty="0">
                 <a:solidFill>
-                  <a:schemeClr val="bg1"/>
+                  <a:srgbClr val="FFFFFF"/>
                 </a:solidFill>
               </a:rPr>
               <a:t>Decision u</a:t>
@@ -23117,7 +23105,7 @@
             <a:r>
               <a:rPr lang="en-US" sz="1200" dirty="0">
                 <a:solidFill>
-                  <a:schemeClr val="bg2"/>
+                  <a:srgbClr val="EEF4F5"/>
                 </a:solidFill>
               </a:rPr>
               <a:t>control (12)</a:t>
@@ -23143,7 +23131,7 @@
           <a:noFill/>
           <a:ln w="25400">
             <a:solidFill>
-              <a:schemeClr val="accent1"/>
+              <a:srgbClr val="F2A541"/>
             </a:solidFill>
             <a:prstDash val="solid"/>
           </a:ln>
@@ -23166,7 +23154,7 @@
           <a:noFill/>
           <a:ln w="25400">
             <a:solidFill>
-              <a:schemeClr val="accent1"/>
+              <a:srgbClr val="F2A541"/>
             </a:solidFill>
             <a:prstDash val="solid"/>
           </a:ln>
@@ -23189,7 +23177,7 @@
           <a:noFill/>
           <a:ln w="25400">
             <a:solidFill>
-              <a:schemeClr val="accent1"/>
+              <a:srgbClr val="F2A541"/>
             </a:solidFill>
             <a:prstDash val="solid"/>
             <a:headEnd type="triangle"/>
@@ -23223,7 +23211,7 @@
             <a:r>
               <a:rPr lang="en-US" sz="1400" i="1" dirty="0">
                 <a:solidFill>
-                  <a:schemeClr val="tx1"/>
+                  <a:srgbClr val="1B2430"/>
                 </a:solidFill>
               </a:rPr>
               <a:t>Bidirectional link: the twin is re-synchronised with every new measurement, and its decisions act on the real system</a:t>
@@ -23243,50 +23231,25 @@
             <a:off x="548640" y="3886200"/>
             <a:ext cx="3520440" cy="2194560"/>
           </a:xfrm>
-          <a:prstGeom prst="roundRect">
+          <a:prstGeom prst="rect">
             <a:avLst>
               <a:gd name="adj" fmla="val 3333"/>
             </a:avLst>
           </a:prstGeom>
           <a:solidFill>
-            <a:schemeClr val="bg2"/>
+            <a:srgbClr val="EEF4F5"/>
           </a:solidFill>
           <a:ln w="12700">
             <a:solidFill>
-              <a:schemeClr val="bg2"/>
+              <a:srgbClr val="EEF4F5"/>
             </a:solidFill>
             <a:prstDash val="solid"/>
           </a:ln>
         </p:spPr>
       </p:sp>
-      <p:sp>
-        <p:nvSpPr>
-          <p:cNvPr id="20" name="icon circle"/>
-          <p:cNvSpPr/>
-          <p:nvPr/>
-        </p:nvSpPr>
-        <p:spPr>
-          <a:xfrm>
-            <a:off x="749808" y="4069080"/>
-            <a:ext cx="502920" cy="502920"/>
-          </a:xfrm>
-          <a:prstGeom prst="ellipse">
-            <a:avLst/>
-          </a:prstGeom>
-          <a:solidFill>
-            <a:schemeClr val="accent2"/>
-          </a:solidFill>
-          <a:ln w="12700">
-            <a:solidFill>
-              <a:schemeClr val="accent2"/>
-            </a:solidFill>
-            <a:prstDash val="solid"/>
-          </a:ln>
-        </p:spPr>
-      </p:sp>
       <p:pic>
         <p:nvPicPr>
-          <p:cNvPr id="21" name="icon" descr="preencoded.png">    </p:cNvPr>
+          <p:cNvPr id="20" name="icon circle" descr="preencoded.png">    </p:cNvPr>
           <p:cNvPicPr>
             <a:picLocks noChangeAspect="1"/>
           </p:cNvPicPr>
@@ -23300,141 +23263,17 @@
         </p:blipFill>
         <p:spPr>
           <a:xfrm>
-            <a:off x="860450" y="4179722"/>
-            <a:ext cx="281635" cy="281635"/>
+            <a:off x="749808" y="4069080"/>
+            <a:ext cx="502920" cy="502920"/>
           </a:xfrm>
           <a:prstGeom prst="rect">
             <a:avLst/>
           </a:prstGeom>
         </p:spPr>
       </p:pic>
-      <p:sp>
-        <p:nvSpPr>
-          <p:cNvPr id="22" name="Text 19"/>
-          <p:cNvSpPr txBox="1"/>
-          <p:nvPr/>
-        </p:nvSpPr>
-        <p:spPr>
-          <a:xfrm>
-            <a:off x="1371600" y="4114800"/>
-            <a:ext cx="2560320" cy="411480"/>
-          </a:xfrm>
-          <a:prstGeom prst="rect">
-            <a:avLst/>
-          </a:prstGeom>
-          <a:noFill/>
-          <a:ln/>
-        </p:spPr>
-        <p:txBody>
-          <a:bodyPr wrap="square" lIns="0" tIns="0" rIns="0" bIns="0" rtlCol="0" anchor="ctr"/>
-          <a:lstStyle/>
-          <a:p>
-            <a:pPr indent="0" marL="0">
-              <a:buNone/>
-            </a:pPr>
-            <a:r>
-              <a:rPr lang="en-US" sz="1700" b="1" dirty="0">
-                <a:solidFill>
-                  <a:schemeClr val="tx2"/>
-                </a:solidFill>
-              </a:rPr>
-              <a:t>Digital twin</a:t>
-            </a:r>
-            <a:endParaRPr lang="en-US" sz="1700" dirty="0"/>
-          </a:p>
-        </p:txBody>
-      </p:sp>
-      <p:sp>
-        <p:nvSpPr>
-          <p:cNvPr id="23" name="Text 20"/>
-          <p:cNvSpPr txBox="1"/>
-          <p:nvPr/>
-        </p:nvSpPr>
-        <p:spPr>
-          <a:xfrm>
-            <a:off x="749808" y="4709160"/>
-            <a:ext cx="3154680" cy="1234440"/>
-          </a:xfrm>
-          <a:prstGeom prst="rect">
-            <a:avLst/>
-          </a:prstGeom>
-          <a:noFill/>
-          <a:ln/>
-        </p:spPr>
-        <p:txBody>
-          <a:bodyPr wrap="square" lIns="0" tIns="0" rIns="0" bIns="0" rtlCol="0" anchor="t"/>
-          <a:lstStyle/>
-          <a:p>
-            <a:pPr indent="0" marL="0">
-              <a:buNone/>
-            </a:pPr>
-            <a:r>
-              <a:rPr lang="en-US" sz="1400" dirty="0">
-                <a:solidFill>
-                  <a:schemeClr val="tx1"/>
-                </a:solidFill>
-              </a:rPr>
-              <a:t>One individual. Model + data assimilation + prediction + decision, updated over time.</a:t>
-            </a:r>
-            <a:endParaRPr lang="en-US" sz="1400" dirty="0"/>
-          </a:p>
-        </p:txBody>
-      </p:sp>
-      <p:sp>
-        <p:nvSpPr>
-          <p:cNvPr id="24" name="card Virtual cohort"/>
-          <p:cNvSpPr/>
-          <p:nvPr/>
-        </p:nvSpPr>
-        <p:spPr>
-          <a:xfrm>
-            <a:off x="4297680" y="3886200"/>
-            <a:ext cx="3520440" cy="2194560"/>
-          </a:xfrm>
-          <a:prstGeom prst="roundRect">
-            <a:avLst>
-              <a:gd name="adj" fmla="val 3333"/>
-            </a:avLst>
-          </a:prstGeom>
-          <a:solidFill>
-            <a:schemeClr val="bg2"/>
-          </a:solidFill>
-          <a:ln w="12700">
-            <a:solidFill>
-              <a:schemeClr val="bg2"/>
-            </a:solidFill>
-            <a:prstDash val="solid"/>
-          </a:ln>
-        </p:spPr>
-      </p:sp>
-      <p:sp>
-        <p:nvSpPr>
-          <p:cNvPr id="25" name="icon circle"/>
-          <p:cNvSpPr/>
-          <p:nvPr/>
-        </p:nvSpPr>
-        <p:spPr>
-          <a:xfrm>
-            <a:off x="4498848" y="4069080"/>
-            <a:ext cx="502920" cy="502920"/>
-          </a:xfrm>
-          <a:prstGeom prst="ellipse">
-            <a:avLst/>
-          </a:prstGeom>
-          <a:solidFill>
-            <a:schemeClr val="accent2"/>
-          </a:solidFill>
-          <a:ln w="12700">
-            <a:solidFill>
-              <a:schemeClr val="accent2"/>
-            </a:solidFill>
-            <a:prstDash val="solid"/>
-          </a:ln>
-        </p:spPr>
-      </p:sp>
       <p:pic>
         <p:nvPicPr>
-          <p:cNvPr id="26" name="icon" descr="preencoded.png">    </p:cNvPr>
+          <p:cNvPr id="21" name="icon" descr="preencoded.png">    </p:cNvPr>
           <p:cNvPicPr>
             <a:picLocks noChangeAspect="1"/>
           </p:cNvPicPr>
@@ -23448,7 +23287,7 @@
         </p:blipFill>
         <p:spPr>
           <a:xfrm>
-            <a:off x="4609490" y="4179722"/>
+            <a:off x="860450" y="4179722"/>
             <a:ext cx="281635" cy="281635"/>
           </a:xfrm>
           <a:prstGeom prst="rect">
@@ -23458,13 +23297,13 @@
       </p:pic>
       <p:sp>
         <p:nvSpPr>
-          <p:cNvPr id="27" name="Text 23"/>
-          <p:cNvSpPr txBox="1"/>
-          <p:nvPr/>
-        </p:nvSpPr>
-        <p:spPr>
-          <a:xfrm>
-            <a:off x="5120640" y="4114800"/>
+          <p:cNvPr id="22" name="Text 18"/>
+          <p:cNvSpPr txBox="1"/>
+          <p:nvPr/>
+        </p:nvSpPr>
+        <p:spPr>
+          <a:xfrm>
+            <a:off x="1371600" y="4114800"/>
             <a:ext cx="2560320" cy="411480"/>
           </a:xfrm>
           <a:prstGeom prst="rect">
@@ -23483,10 +23322,10 @@
             <a:r>
               <a:rPr lang="en-US" sz="1700" b="1" dirty="0">
                 <a:solidFill>
-                  <a:schemeClr val="tx2"/>
-                </a:solidFill>
-              </a:rPr>
-              <a:t>Virtual cohort</a:t>
+                  <a:srgbClr val="0B3C49"/>
+                </a:solidFill>
+              </a:rPr>
+              <a:t>Digital twin</a:t>
             </a:r>
             <a:endParaRPr lang="en-US" sz="1700" dirty="0"/>
           </a:p>
@@ -23494,13 +23333,13 @@
       </p:sp>
       <p:sp>
         <p:nvSpPr>
-          <p:cNvPr id="28" name="Text 24"/>
-          <p:cNvSpPr txBox="1"/>
-          <p:nvPr/>
-        </p:nvSpPr>
-        <p:spPr>
-          <a:xfrm>
-            <a:off x="4498848" y="4709160"/>
+          <p:cNvPr id="23" name="Text 19"/>
+          <p:cNvSpPr txBox="1"/>
+          <p:nvPr/>
+        </p:nvSpPr>
+        <p:spPr>
+          <a:xfrm>
+            <a:off x="749808" y="4709160"/>
             <a:ext cx="3154680" cy="1234440"/>
           </a:xfrm>
           <a:prstGeom prst="rect">
@@ -23519,10 +23358,10 @@
             <a:r>
               <a:rPr lang="en-US" sz="1400" dirty="0">
                 <a:solidFill>
-                  <a:schemeClr val="tx1"/>
-                </a:solidFill>
-              </a:rPr>
-              <a:t>Many twins sampled from population models (Families 7, 11): realistic, diverse, plausible.</a:t>
+                  <a:srgbClr val="1B2430"/>
+                </a:solidFill>
+              </a:rPr>
+              <a:t>One individual. Model + data assimilation + prediction + decision, updated over time.</a:t>
             </a:r>
             <a:endParaRPr lang="en-US" sz="1400" dirty="0"/>
           </a:p>
@@ -23530,59 +23369,34 @@
       </p:sp>
       <p:sp>
         <p:nvSpPr>
-          <p:cNvPr id="29" name="card Virtual trial"/>
+          <p:cNvPr id="24" name="card Virtual cohort"/>
           <p:cNvSpPr/>
           <p:nvPr/>
         </p:nvSpPr>
         <p:spPr>
           <a:xfrm>
-            <a:off x="8046720" y="3886200"/>
+            <a:off x="4297680" y="3886200"/>
             <a:ext cx="3520440" cy="2194560"/>
           </a:xfrm>
-          <a:prstGeom prst="roundRect">
+          <a:prstGeom prst="rect">
             <a:avLst>
               <a:gd name="adj" fmla="val 3333"/>
             </a:avLst>
           </a:prstGeom>
           <a:solidFill>
-            <a:schemeClr val="bg2"/>
+            <a:srgbClr val="EEF4F5"/>
           </a:solidFill>
           <a:ln w="12700">
             <a:solidFill>
-              <a:schemeClr val="bg2"/>
+              <a:srgbClr val="EEF4F5"/>
             </a:solidFill>
             <a:prstDash val="solid"/>
           </a:ln>
         </p:spPr>
       </p:sp>
-      <p:sp>
-        <p:nvSpPr>
-          <p:cNvPr id="30" name="icon circle"/>
-          <p:cNvSpPr/>
-          <p:nvPr/>
-        </p:nvSpPr>
-        <p:spPr>
-          <a:xfrm>
-            <a:off x="8247888" y="4069080"/>
-            <a:ext cx="502920" cy="502920"/>
-          </a:xfrm>
-          <a:prstGeom prst="ellipse">
-            <a:avLst/>
-          </a:prstGeom>
-          <a:solidFill>
-            <a:schemeClr val="accent2"/>
-          </a:solidFill>
-          <a:ln w="12700">
-            <a:solidFill>
-              <a:schemeClr val="accent2"/>
-            </a:solidFill>
-            <a:prstDash val="solid"/>
-          </a:ln>
-        </p:spPr>
-      </p:sp>
       <p:pic>
         <p:nvPicPr>
-          <p:cNvPr id="31" name="icon" descr="preencoded.png">    </p:cNvPr>
+          <p:cNvPr id="25" name="icon circle" descr="preencoded.png">    </p:cNvPr>
           <p:cNvPicPr>
             <a:picLocks noChangeAspect="1"/>
           </p:cNvPicPr>
@@ -23596,6 +23410,177 @@
         </p:blipFill>
         <p:spPr>
           <a:xfrm>
+            <a:off x="4498848" y="4069080"/>
+            <a:ext cx="502920" cy="502920"/>
+          </a:xfrm>
+          <a:prstGeom prst="rect">
+            <a:avLst/>
+          </a:prstGeom>
+        </p:spPr>
+      </p:pic>
+      <p:pic>
+        <p:nvPicPr>
+          <p:cNvPr id="26" name="icon" descr="preencoded.png">    </p:cNvPr>
+          <p:cNvPicPr>
+            <a:picLocks noChangeAspect="1"/>
+          </p:cNvPicPr>
+          <p:nvPr/>
+        </p:nvPicPr>
+        <p:blipFill>
+          <a:blip r:embed="rId4"/>
+          <a:stretch>
+            <a:fillRect/>
+          </a:stretch>
+        </p:blipFill>
+        <p:spPr>
+          <a:xfrm>
+            <a:off x="4609490" y="4179722"/>
+            <a:ext cx="281635" cy="281635"/>
+          </a:xfrm>
+          <a:prstGeom prst="rect">
+            <a:avLst/>
+          </a:prstGeom>
+        </p:spPr>
+      </p:pic>
+      <p:sp>
+        <p:nvSpPr>
+          <p:cNvPr id="27" name="Text 21"/>
+          <p:cNvSpPr txBox="1"/>
+          <p:nvPr/>
+        </p:nvSpPr>
+        <p:spPr>
+          <a:xfrm>
+            <a:off x="5120640" y="4114800"/>
+            <a:ext cx="2560320" cy="411480"/>
+          </a:xfrm>
+          <a:prstGeom prst="rect">
+            <a:avLst/>
+          </a:prstGeom>
+          <a:noFill/>
+          <a:ln/>
+        </p:spPr>
+        <p:txBody>
+          <a:bodyPr wrap="square" lIns="0" tIns="0" rIns="0" bIns="0" rtlCol="0" anchor="ctr"/>
+          <a:lstStyle/>
+          <a:p>
+            <a:pPr indent="0" marL="0">
+              <a:buNone/>
+            </a:pPr>
+            <a:r>
+              <a:rPr lang="en-US" sz="1700" b="1" dirty="0">
+                <a:solidFill>
+                  <a:srgbClr val="0B3C49"/>
+                </a:solidFill>
+              </a:rPr>
+              <a:t>Virtual cohort</a:t>
+            </a:r>
+            <a:endParaRPr lang="en-US" sz="1700" dirty="0"/>
+          </a:p>
+        </p:txBody>
+      </p:sp>
+      <p:sp>
+        <p:nvSpPr>
+          <p:cNvPr id="28" name="Text 22"/>
+          <p:cNvSpPr txBox="1"/>
+          <p:nvPr/>
+        </p:nvSpPr>
+        <p:spPr>
+          <a:xfrm>
+            <a:off x="4498848" y="4709160"/>
+            <a:ext cx="3154680" cy="1234440"/>
+          </a:xfrm>
+          <a:prstGeom prst="rect">
+            <a:avLst/>
+          </a:prstGeom>
+          <a:noFill/>
+          <a:ln/>
+        </p:spPr>
+        <p:txBody>
+          <a:bodyPr wrap="square" lIns="0" tIns="0" rIns="0" bIns="0" rtlCol="0" anchor="t"/>
+          <a:lstStyle/>
+          <a:p>
+            <a:pPr indent="0" marL="0">
+              <a:buNone/>
+            </a:pPr>
+            <a:r>
+              <a:rPr lang="en-US" sz="1400" dirty="0">
+                <a:solidFill>
+                  <a:srgbClr val="1B2430"/>
+                </a:solidFill>
+              </a:rPr>
+              <a:t>Many twins sampled from population models (Families 7, 11): realistic, diverse, plausible.</a:t>
+            </a:r>
+            <a:endParaRPr lang="en-US" sz="1400" dirty="0"/>
+          </a:p>
+        </p:txBody>
+      </p:sp>
+      <p:sp>
+        <p:nvSpPr>
+          <p:cNvPr id="29" name="card Virtual trial"/>
+          <p:cNvSpPr/>
+          <p:nvPr/>
+        </p:nvSpPr>
+        <p:spPr>
+          <a:xfrm>
+            <a:off x="8046720" y="3886200"/>
+            <a:ext cx="3520440" cy="2194560"/>
+          </a:xfrm>
+          <a:prstGeom prst="rect">
+            <a:avLst>
+              <a:gd name="adj" fmla="val 3333"/>
+            </a:avLst>
+          </a:prstGeom>
+          <a:solidFill>
+            <a:srgbClr val="EEF4F5"/>
+          </a:solidFill>
+          <a:ln w="12700">
+            <a:solidFill>
+              <a:srgbClr val="EEF4F5"/>
+            </a:solidFill>
+            <a:prstDash val="solid"/>
+          </a:ln>
+        </p:spPr>
+      </p:sp>
+      <p:pic>
+        <p:nvPicPr>
+          <p:cNvPr id="30" name="icon circle" descr="preencoded.png">    </p:cNvPr>
+          <p:cNvPicPr>
+            <a:picLocks noChangeAspect="1"/>
+          </p:cNvPicPr>
+          <p:nvPr/>
+        </p:nvPicPr>
+        <p:blipFill>
+          <a:blip r:embed="rId5"/>
+          <a:stretch>
+            <a:fillRect/>
+          </a:stretch>
+        </p:blipFill>
+        <p:spPr>
+          <a:xfrm>
+            <a:off x="8247888" y="4069080"/>
+            <a:ext cx="502920" cy="502920"/>
+          </a:xfrm>
+          <a:prstGeom prst="rect">
+            <a:avLst/>
+          </a:prstGeom>
+        </p:spPr>
+      </p:pic>
+      <p:pic>
+        <p:nvPicPr>
+          <p:cNvPr id="31" name="icon" descr="preencoded.png">    </p:cNvPr>
+          <p:cNvPicPr>
+            <a:picLocks noChangeAspect="1"/>
+          </p:cNvPicPr>
+          <p:nvPr/>
+        </p:nvPicPr>
+        <p:blipFill>
+          <a:blip r:embed="rId6"/>
+          <a:stretch>
+            <a:fillRect/>
+          </a:stretch>
+        </p:blipFill>
+        <p:spPr>
+          <a:xfrm>
             <a:off x="8358530" y="4179722"/>
             <a:ext cx="281635" cy="281635"/>
           </a:xfrm>
@@ -23606,7 +23591,7 @@
       </p:pic>
       <p:sp>
         <p:nvSpPr>
-          <p:cNvPr id="32" name="Text 27"/>
+          <p:cNvPr id="32" name="Text 24"/>
           <p:cNvSpPr txBox="1"/>
           <p:nvPr/>
         </p:nvSpPr>
@@ -23631,7 +23616,7 @@
             <a:r>
               <a:rPr lang="en-US" sz="1700" b="1" dirty="0">
                 <a:solidFill>
-                  <a:schemeClr val="tx2"/>
+                  <a:srgbClr val="0B3C49"/>
                 </a:solidFill>
               </a:rPr>
               <a:t>Virtual trial</a:t>
@@ -23642,7 +23627,7 @@
       </p:sp>
       <p:sp>
         <p:nvSpPr>
-          <p:cNvPr id="33" name="Text 28"/>
+          <p:cNvPr id="33" name="Text 25"/>
           <p:cNvSpPr txBox="1"/>
           <p:nvPr/>
         </p:nvSpPr>
@@ -23667,7 +23652,7 @@
             <a:r>
               <a:rPr lang="en-US" sz="1400" dirty="0">
                 <a:solidFill>
-                  <a:schemeClr val="tx1"/>
+                  <a:srgbClr val="1B2430"/>
                 </a:solidFill>
               </a:rPr>
               <a:t>Every arm applied to every virtual subject; endpoints analysed with trial statistics.</a:t>
@@ -23706,7 +23691,7 @@
             <a:lvl1pPr>
               <a:defRPr sz="1000">
                 <a:solidFill>
-                  <a:schemeClr val="accent6"/>
+                  <a:srgbClr val="5F6B76"/>
                 </a:solidFill>
               </a:defRPr>
             </a:lvl1pPr>
@@ -23775,7 +23760,7 @@
             <a:r>
               <a:rPr lang="en-US" sz="1600" b="1" dirty="0">
                 <a:solidFill>
-                  <a:schemeClr val="accent1"/>
+                  <a:srgbClr val="F2A541"/>
                 </a:solidFill>
               </a:rPr>
               <a:t>TAKEAWAYS</a:t>
@@ -23813,7 +23798,7 @@
             <a:r>
               <a:rPr lang="en-US" sz="4000" b="1" dirty="0">
                 <a:solidFill>
-                  <a:schemeClr val="bg1"/>
+                  <a:srgbClr val="FFFFFF"/>
                 </a:solidFill>
               </a:rPr>
               <a:t>Mechanism, data, uncertainty, decision</a:t>
@@ -23855,7 +23840,7 @@
             <a:r>
               <a:rPr lang="en-US" sz="1800" dirty="0">
                 <a:solidFill>
-                  <a:schemeClr val="bg2"/>
+                  <a:srgbClr val="EEF4F5"/>
                 </a:solidFill>
               </a:rPr>
               <a:t>A twin is a state-space model (Families 1–6) kept current by data assimilation (8).</a:t>
@@ -23873,7 +23858,7 @@
             <a:r>
               <a:rPr lang="en-US" sz="1800" dirty="0">
                 <a:solidFill>
-                  <a:schemeClr val="bg2"/>
+                  <a:srgbClr val="EEF4F5"/>
                 </a:solidFill>
               </a:rPr>
               <a:t>Population, UQ and surrogate models (7, 9, 10) turn one twin into a fast, honest virtual cohort.</a:t>
@@ -23888,7 +23873,7 @@
             <a:r>
               <a:rPr lang="en-US" sz="1800" dirty="0">
                 <a:solidFill>
-                  <a:schemeClr val="bg2"/>
+                  <a:srgbClr val="EEF4F5"/>
                 </a:solidFill>
               </a:rPr>
               <a:t>Trial, control and V&amp;V models (11, 12) turn the cohort into credible decisions.</a:t>
@@ -23927,7 +23912,7 @@
             <a:lvl1pPr>
               <a:defRPr sz="1000">
                 <a:solidFill>
-                  <a:schemeClr val="bg2"/>
+                  <a:srgbClr val="EEF4F5"/>
                 </a:solidFill>
               </a:defRPr>
             </a:lvl1pPr>
@@ -23996,7 +23981,7 @@
             <a:r>
               <a:rPr lang="en-US" sz="1300" b="1" dirty="0">
                 <a:solidFill>
-                  <a:schemeClr val="accent2"/>
+                  <a:srgbClr val="1F7A70"/>
                 </a:solidFill>
               </a:rPr>
               <a:t>KEY REFERENCES</a:t>
@@ -24034,7 +24019,7 @@
             <a:r>
               <a:rPr lang="en-US" sz="3600" b="1" dirty="0">
                 <a:solidFill>
-                  <a:schemeClr val="tx2"/>
+                  <a:srgbClr val="0B3C49"/>
                 </a:solidFill>
               </a:rPr>
               <a:t>Classic sources for the models</a:t>
@@ -24074,7 +24059,7 @@
             <a:r>
               <a:rPr lang="en-US" sz="1300" dirty="0">
                 <a:solidFill>
-                  <a:schemeClr val="tx1"/>
+                  <a:srgbClr val="1B2430"/>
                 </a:solidFill>
               </a:rPr>
               <a:t>Gabrielsson J, Weiner D. Pharmacokinetic and Pharmacodynamic Data Analysis. 5th ed. 2016</a:t>
@@ -24092,7 +24077,7 @@
             <a:r>
               <a:rPr lang="en-US" sz="1300" dirty="0">
                 <a:solidFill>
-                  <a:schemeClr val="tx1"/>
+                  <a:srgbClr val="1B2430"/>
                 </a:solidFill>
               </a:rPr>
               <a:t>Owen JS, Fiedler-Kelly J. Introduction to Population PK/PD Analysis with NONMEM. 2014</a:t>
@@ -24110,7 +24095,7 @@
             <a:r>
               <a:rPr lang="en-US" sz="1300" dirty="0">
                 <a:solidFill>
-                  <a:schemeClr val="tx1"/>
+                  <a:srgbClr val="1B2430"/>
                 </a:solidFill>
               </a:rPr>
               <a:t>Keener J, Sneyd J. Mathematical Physiology. 2nd ed. Springer 2009</a:t>
@@ -24128,7 +24113,7 @@
             <a:r>
               <a:rPr lang="en-US" sz="1300" dirty="0">
                 <a:solidFill>
-                  <a:schemeClr val="tx1"/>
+                  <a:srgbClr val="1B2430"/>
                 </a:solidFill>
               </a:rPr>
               <a:t>Murray JD. Mathematical Biology I &amp; II. Springer 2002–03</a:t>
@@ -24146,7 +24131,7 @@
             <a:r>
               <a:rPr lang="en-US" sz="1300" dirty="0">
                 <a:solidFill>
-                  <a:schemeClr val="tx1"/>
+                  <a:srgbClr val="1B2430"/>
                 </a:solidFill>
               </a:rPr>
               <a:t>Kalman RE. A new approach to linear filtering. J Basic Eng 1960</a:t>
@@ -24164,7 +24149,7 @@
             <a:r>
               <a:rPr lang="en-US" sz="1300" dirty="0">
                 <a:solidFill>
-                  <a:schemeClr val="tx1"/>
+                  <a:srgbClr val="1B2430"/>
                 </a:solidFill>
               </a:rPr>
               <a:t>Särkkä S. Bayesian Filtering and Smoothing. Cambridge 2013</a:t>
@@ -24182,7 +24167,7 @@
             <a:r>
               <a:rPr lang="en-US" sz="1300" dirty="0">
                 <a:solidFill>
-                  <a:schemeClr val="tx1"/>
+                  <a:srgbClr val="1B2430"/>
                 </a:solidFill>
               </a:rPr>
               <a:t>Kennedy MC, O'Hagan A. Bayesian calibration of computer models. JRSS B 2001</a:t>
@@ -24200,7 +24185,7 @@
             <a:r>
               <a:rPr lang="en-US" sz="1300" dirty="0">
                 <a:solidFill>
-                  <a:schemeClr val="tx1"/>
+                  <a:srgbClr val="1B2430"/>
                 </a:solidFill>
               </a:rPr>
               <a:t>Saltelli A et al. Global Sensitivity Analysis: The Primer. Wiley 2008</a:t>
@@ -24240,7 +24225,7 @@
             <a:r>
               <a:rPr lang="en-US" sz="1300" dirty="0">
                 <a:solidFill>
-                  <a:schemeClr val="tx1"/>
+                  <a:srgbClr val="1B2430"/>
                 </a:solidFill>
               </a:rPr>
               <a:t>Smith RC. Uncertainty Quantification. SIAM 2014</a:t>
@@ -24258,7 +24243,7 @@
             <a:r>
               <a:rPr lang="en-US" sz="1300" dirty="0">
                 <a:solidFill>
-                  <a:schemeClr val="tx1"/>
+                  <a:srgbClr val="1B2430"/>
                 </a:solidFill>
               </a:rPr>
               <a:t>Rasmussen CE, Williams CKI. Gaussian Processes for ML. MIT Press 2006</a:t>
@@ -24276,7 +24261,7 @@
             <a:r>
               <a:rPr lang="en-US" sz="1300" dirty="0">
                 <a:solidFill>
-                  <a:schemeClr val="tx1"/>
+                  <a:srgbClr val="1B2430"/>
                 </a:solidFill>
               </a:rPr>
               <a:t>Allen RJ et al. Efficient generation of virtual populations. CPT:PSP 2016</a:t>
@@ -24294,7 +24279,7 @@
             <a:r>
               <a:rPr lang="en-US" sz="1300" dirty="0">
                 <a:solidFill>
-                  <a:schemeClr val="tx1"/>
+                  <a:srgbClr val="1B2430"/>
                 </a:solidFill>
               </a:rPr>
               <a:t>Berry SM et al. Bayesian Adaptive Methods for Clinical Trials. CRC 2010</a:t>
@@ -24312,7 +24297,7 @@
             <a:r>
               <a:rPr lang="en-US" sz="1300" dirty="0">
                 <a:solidFill>
-                  <a:schemeClr val="tx1"/>
+                  <a:srgbClr val="1B2430"/>
                 </a:solidFill>
               </a:rPr>
               <a:t>Schuler A et al. Prognostic covariate adjustment (PROCOVA). Int J Biostat 2022</a:t>
@@ -24330,7 +24315,7 @@
             <a:r>
               <a:rPr lang="en-US" sz="1300" dirty="0">
                 <a:solidFill>
-                  <a:schemeClr val="tx1"/>
+                  <a:srgbClr val="1B2430"/>
                 </a:solidFill>
               </a:rPr>
               <a:t>Badano A et al. VICTRE in silico imaging trial. JAMA Netw Open 2018</a:t>
@@ -24348,7 +24333,7 @@
             <a:r>
               <a:rPr lang="en-US" sz="1300" dirty="0">
                 <a:solidFill>
-                  <a:schemeClr val="tx1"/>
+                  <a:srgbClr val="1B2430"/>
                 </a:solidFill>
               </a:rPr>
               <a:t>ASME V&amp;V 40-2018; FDA guidance on computational model credibility 2023</a:t>
@@ -24366,7 +24351,7 @@
             <a:r>
               <a:rPr lang="en-US" sz="1300" dirty="0">
                 <a:solidFill>
-                  <a:schemeClr val="tx1"/>
+                  <a:srgbClr val="1B2430"/>
                 </a:solidFill>
               </a:rPr>
               <a:t>NASEM. Foundational Research Gaps for Digital Twins. 2024</a:t>
@@ -24402,7 +24387,7 @@
             <a:r>
               <a:rPr lang="en-US" sz="1100" i="1" dirty="0">
                 <a:solidFill>
-                  <a:schemeClr val="accent6"/>
+                  <a:srgbClr val="5F6B76"/>
                 </a:solidFill>
               </a:rPr>
               <a:t>Compiled from memory; verify editions and page numbers before formal citation.</a:t>
@@ -24441,7 +24426,7 @@
             <a:lvl1pPr>
               <a:defRPr sz="1000">
                 <a:solidFill>
-                  <a:schemeClr val="accent6"/>
+                  <a:srgbClr val="5F6B76"/>
                 </a:solidFill>
               </a:defRPr>
             </a:lvl1pPr>
@@ -24510,7 +24495,7 @@
             <a:r>
               <a:rPr lang="en-US" sz="1600" b="1" dirty="0">
                 <a:solidFill>
-                  <a:schemeClr val="accent1"/>
+                  <a:srgbClr val="F2A541"/>
                 </a:solidFill>
               </a:rPr>
               <a:t>PART I</a:t>
@@ -24548,7 +24533,7 @@
             <a:r>
               <a:rPr lang="en-US" sz="4000" b="1" dirty="0">
                 <a:solidFill>
-                  <a:schemeClr val="bg1"/>
+                  <a:srgbClr val="FFFFFF"/>
                 </a:solidFill>
               </a:rPr>
               <a:t>Models of how the system behaves</a:t>
@@ -24586,7 +24571,7 @@
             <a:r>
               <a:rPr lang="en-US" sz="1800" dirty="0">
                 <a:solidFill>
-                  <a:schemeClr val="bg2"/>
+                  <a:srgbClr val="EEF4F5"/>
                 </a:solidFill>
               </a:rPr>
               <a:t>Families 1–6: dynamical formalism, pharmacology, disease, organ physiology and continuum physics</a:t>
@@ -24625,7 +24610,7 @@
             <a:lvl1pPr>
               <a:defRPr sz="1000">
                 <a:solidFill>
-                  <a:schemeClr val="bg2"/>
+                  <a:srgbClr val="EEF4F5"/>
                 </a:solidFill>
               </a:defRPr>
             </a:lvl1pPr>
@@ -24694,7 +24679,7 @@
             <a:r>
               <a:rPr lang="en-US" sz="1300" b="1" dirty="0">
                 <a:solidFill>
-                  <a:schemeClr val="accent2"/>
+                  <a:srgbClr val="1F7A70"/>
                 </a:solidFill>
               </a:rPr>
               <a:t>FAMILY 1 · DIGITAL-TWIN FORMALISM</a:t>
@@ -24732,7 +24717,7 @@
             <a:r>
               <a:rPr lang="en-US" sz="3600" b="1" dirty="0">
                 <a:solidFill>
-                  <a:schemeClr val="tx2"/>
+                  <a:srgbClr val="0B3C49"/>
                 </a:solidFill>
               </a:rPr>
               <a:t>Every twin is a state-space model</a:t>
@@ -24752,17 +24737,17 @@
             <a:off x="548640" y="1554480"/>
             <a:ext cx="5394960" cy="2240280"/>
           </a:xfrm>
-          <a:prstGeom prst="roundRect">
+          <a:prstGeom prst="rect">
             <a:avLst>
               <a:gd name="adj" fmla="val 3265"/>
             </a:avLst>
           </a:prstGeom>
           <a:solidFill>
-            <a:schemeClr val="bg2"/>
+            <a:srgbClr val="EEF4F5"/>
           </a:solidFill>
           <a:ln w="12700">
             <a:solidFill>
-              <a:schemeClr val="bg2"/>
+              <a:srgbClr val="EEF4F5"/>
             </a:solidFill>
             <a:prstDash val="solid"/>
           </a:ln>
@@ -24795,7 +24780,7 @@
             <a:r>
               <a:rPr lang="en-US" sz="1600" b="1" dirty="0">
                 <a:solidFill>
-                  <a:schemeClr val="tx2"/>
+                  <a:srgbClr val="0B3C49"/>
                 </a:solidFill>
               </a:rPr>
               <a:t>Discrete state-space model</a:t>
@@ -24819,7 +24804,7 @@
             <a:avLst/>
           </a:prstGeom>
           <a:solidFill>
-            <a:schemeClr val="bg1"/>
+            <a:srgbClr val="FFFFFF"/>
           </a:solidFill>
           <a:ln/>
         </p:spPr>
@@ -24833,7 +24818,7 @@
             <a:r>
               <a:rPr lang="en-US" sz="1600" dirty="0">
                 <a:solidFill>
-                  <a:schemeClr val="accent4"/>
+                  <a:srgbClr val="264653"/>
                 </a:solidFill>
                 <a:latin typeface="+mj-lt" pitchFamily="34" charset="0"/>
                 <a:ea typeface="+mj-lt" pitchFamily="34" charset="-122"/>
@@ -24850,7 +24835,7 @@
             <a:r>
               <a:rPr lang="en-US" sz="1600" dirty="0">
                 <a:solidFill>
-                  <a:schemeClr val="accent4"/>
+                  <a:srgbClr val="264653"/>
                 </a:solidFill>
                 <a:latin typeface="+mj-lt" pitchFamily="34" charset="0"/>
                 <a:ea typeface="+mj-lt" pitchFamily="34" charset="-122"/>
@@ -24889,7 +24874,7 @@
             <a:r>
               <a:rPr lang="en-US" sz="1400" dirty="0">
                 <a:solidFill>
-                  <a:schemeClr val="tx1"/>
+                  <a:srgbClr val="1B2430"/>
                 </a:solidFill>
               </a:rPr>
               <a:t>State x, control u, parameters θ, observations y; process noise w, measurement noise v. The general DT definition.</a:t>
@@ -24909,17 +24894,17 @@
             <a:off x="6217920" y="1554480"/>
             <a:ext cx="5394960" cy="2240280"/>
           </a:xfrm>
-          <a:prstGeom prst="roundRect">
+          <a:prstGeom prst="rect">
             <a:avLst>
               <a:gd name="adj" fmla="val 3265"/>
             </a:avLst>
           </a:prstGeom>
           <a:solidFill>
-            <a:schemeClr val="bg2"/>
+            <a:srgbClr val="EEF4F5"/>
           </a:solidFill>
           <a:ln w="12700">
             <a:solidFill>
-              <a:schemeClr val="bg2"/>
+              <a:srgbClr val="EEF4F5"/>
             </a:solidFill>
             <a:prstDash val="solid"/>
           </a:ln>
@@ -24952,7 +24937,7 @@
             <a:r>
               <a:rPr lang="en-US" sz="1600" b="1" dirty="0">
                 <a:solidFill>
-                  <a:schemeClr val="tx2"/>
+                  <a:srgbClr val="0B3C49"/>
                 </a:solidFill>
               </a:rPr>
               <a:t>Ordinary differential equations</a:t>
@@ -24976,7 +24961,7 @@
             <a:avLst/>
           </a:prstGeom>
           <a:solidFill>
-            <a:schemeClr val="bg1"/>
+            <a:srgbClr val="FFFFFF"/>
           </a:solidFill>
           <a:ln/>
         </p:spPr>
@@ -24990,7 +24975,7 @@
             <a:r>
               <a:rPr lang="en-US" sz="1600" dirty="0">
                 <a:solidFill>
-                  <a:schemeClr val="accent4"/>
+                  <a:srgbClr val="264653"/>
                 </a:solidFill>
                 <a:latin typeface="+mj-lt" pitchFamily="34" charset="0"/>
                 <a:ea typeface="+mj-lt" pitchFamily="34" charset="-122"/>
@@ -25029,7 +25014,7 @@
             <a:r>
               <a:rPr lang="en-US" sz="1400" dirty="0">
                 <a:solidFill>
-                  <a:schemeClr val="tx1"/>
+                  <a:srgbClr val="1B2430"/>
                 </a:solidFill>
               </a:rPr>
               <a:t>Well-mixed systems: compartments, kinetics, organ function. Solved with Runge–Kutta or stiff (BDF) solvers.</a:t>
@@ -25049,17 +25034,17 @@
             <a:off x="548640" y="4023360"/>
             <a:ext cx="5394960" cy="2240280"/>
           </a:xfrm>
-          <a:prstGeom prst="roundRect">
+          <a:prstGeom prst="rect">
             <a:avLst>
               <a:gd name="adj" fmla="val 3265"/>
             </a:avLst>
           </a:prstGeom>
           <a:solidFill>
-            <a:schemeClr val="bg2"/>
+            <a:srgbClr val="EEF4F5"/>
           </a:solidFill>
           <a:ln w="12700">
             <a:solidFill>
-              <a:schemeClr val="bg2"/>
+              <a:srgbClr val="EEF4F5"/>
             </a:solidFill>
             <a:prstDash val="solid"/>
           </a:ln>
@@ -25092,7 +25077,7 @@
             <a:r>
               <a:rPr lang="en-US" sz="1600" b="1" dirty="0">
                 <a:solidFill>
-                  <a:schemeClr val="tx2"/>
+                  <a:srgbClr val="0B3C49"/>
                 </a:solidFill>
               </a:rPr>
               <a:t>Stochastic differential equations</a:t>
@@ -25116,7 +25101,7 @@
             <a:avLst/>
           </a:prstGeom>
           <a:solidFill>
-            <a:schemeClr val="bg1"/>
+            <a:srgbClr val="FFFFFF"/>
           </a:solidFill>
           <a:ln/>
         </p:spPr>
@@ -25130,7 +25115,7 @@
             <a:r>
               <a:rPr lang="en-US" sz="1600" dirty="0">
                 <a:solidFill>
-                  <a:schemeClr val="accent4"/>
+                  <a:srgbClr val="264653"/>
                 </a:solidFill>
                 <a:latin typeface="+mj-lt" pitchFamily="34" charset="0"/>
                 <a:ea typeface="+mj-lt" pitchFamily="34" charset="-122"/>
@@ -25169,7 +25154,7 @@
             <a:r>
               <a:rPr lang="en-US" sz="1400" dirty="0">
                 <a:solidFill>
-                  <a:schemeClr val="tx1"/>
+                  <a:srgbClr val="1B2430"/>
                 </a:solidFill>
               </a:rPr>
               <a:t>Adds intrinsic noise via Brownian motion W. Use when variability within an individual matters (e.g. cell counts, glucose).</a:t>
@@ -25189,17 +25174,17 @@
             <a:off x="6217920" y="4023360"/>
             <a:ext cx="5394960" cy="2240280"/>
           </a:xfrm>
-          <a:prstGeom prst="roundRect">
+          <a:prstGeom prst="rect">
             <a:avLst>
               <a:gd name="adj" fmla="val 3265"/>
             </a:avLst>
           </a:prstGeom>
           <a:solidFill>
-            <a:schemeClr val="bg2"/>
+            <a:srgbClr val="EEF4F5"/>
           </a:solidFill>
           <a:ln w="12700">
             <a:solidFill>
-              <a:schemeClr val="bg2"/>
+              <a:srgbClr val="EEF4F5"/>
             </a:solidFill>
             <a:prstDash val="solid"/>
           </a:ln>
@@ -25232,7 +25217,7 @@
             <a:r>
               <a:rPr lang="en-US" sz="1600" b="1" dirty="0">
                 <a:solidFill>
-                  <a:schemeClr val="tx2"/>
+                  <a:srgbClr val="0B3C49"/>
                 </a:solidFill>
               </a:rPr>
               <a:t>Partial differential equations</a:t>
@@ -25256,7 +25241,7 @@
             <a:avLst/>
           </a:prstGeom>
           <a:solidFill>
-            <a:schemeClr val="bg1"/>
+            <a:srgbClr val="FFFFFF"/>
           </a:solidFill>
           <a:ln/>
         </p:spPr>
@@ -25270,7 +25255,7 @@
             <a:r>
               <a:rPr lang="en-US" sz="1500" dirty="0">
                 <a:solidFill>
-                  <a:schemeClr val="accent4"/>
+                  <a:srgbClr val="264653"/>
                 </a:solidFill>
                 <a:latin typeface="+mj-lt" pitchFamily="34" charset="0"/>
                 <a:ea typeface="+mj-lt" pitchFamily="34" charset="-122"/>
@@ -25309,7 +25294,7 @@
             <a:r>
               <a:rPr lang="en-US" sz="1400" dirty="0">
                 <a:solidFill>
-                  <a:schemeClr val="tx1"/>
+                  <a:srgbClr val="1B2430"/>
                 </a:solidFill>
               </a:rPr>
               <a:t>Spatially resolved systems: tissue, flow, transport. Solved with finite elements, volumes or differences.</a:t>
@@ -25348,7 +25333,7 @@
             <a:lvl1pPr>
               <a:defRPr sz="1000">
                 <a:solidFill>
-                  <a:schemeClr val="accent6"/>
+                  <a:srgbClr val="5F6B76"/>
                 </a:solidFill>
               </a:defRPr>
             </a:lvl1pPr>
@@ -25417,7 +25402,7 @@
             <a:r>
               <a:rPr lang="en-US" sz="1300" b="1" dirty="0">
                 <a:solidFill>
-                  <a:schemeClr val="accent2"/>
+                  <a:srgbClr val="1F7A70"/>
                 </a:solidFill>
               </a:rPr>
               <a:t>FAMILY 1 · DISCRETE AND RULE-BASED MODELS</a:t>
@@ -25455,7 +25440,7 @@
             <a:r>
               <a:rPr lang="en-US" sz="3600" b="1" dirty="0">
                 <a:solidFill>
-                  <a:schemeClr val="tx2"/>
+                  <a:srgbClr val="0B3C49"/>
                 </a:solidFill>
               </a:rPr>
               <a:t>When states are discrete or agents interact</a:t>
@@ -25475,17 +25460,17 @@
             <a:off x="548640" y="1554480"/>
             <a:ext cx="5394960" cy="2240280"/>
           </a:xfrm>
-          <a:prstGeom prst="roundRect">
+          <a:prstGeom prst="rect">
             <a:avLst>
               <a:gd name="adj" fmla="val 3265"/>
             </a:avLst>
           </a:prstGeom>
           <a:solidFill>
-            <a:schemeClr val="bg2"/>
+            <a:srgbClr val="EEF4F5"/>
           </a:solidFill>
           <a:ln w="12700">
             <a:solidFill>
-              <a:schemeClr val="bg2"/>
+              <a:srgbClr val="EEF4F5"/>
             </a:solidFill>
             <a:prstDash val="solid"/>
           </a:ln>
@@ -25518,7 +25503,7 @@
             <a:r>
               <a:rPr lang="en-US" sz="1600" b="1" dirty="0">
                 <a:solidFill>
-                  <a:schemeClr val="tx2"/>
+                  <a:srgbClr val="0B3C49"/>
                 </a:solidFill>
               </a:rPr>
               <a:t>Markov chain</a:t>
@@ -25542,7 +25527,7 @@
             <a:avLst/>
           </a:prstGeom>
           <a:solidFill>
-            <a:schemeClr val="bg1"/>
+            <a:srgbClr val="FFFFFF"/>
           </a:solidFill>
           <a:ln/>
         </p:spPr>
@@ -25556,7 +25541,7 @@
             <a:r>
               <a:rPr lang="en-US" sz="1600" dirty="0">
                 <a:solidFill>
-                  <a:schemeClr val="accent4"/>
+                  <a:srgbClr val="264653"/>
                 </a:solidFill>
                 <a:latin typeface="+mj-lt" pitchFamily="34" charset="0"/>
                 <a:ea typeface="+mj-lt" pitchFamily="34" charset="-122"/>
@@ -25573,7 +25558,7 @@
             <a:r>
               <a:rPr lang="en-US" sz="1600" dirty="0">
                 <a:solidFill>
-                  <a:schemeClr val="accent4"/>
+                  <a:srgbClr val="264653"/>
                 </a:solidFill>
                 <a:latin typeface="+mj-lt" pitchFamily="34" charset="0"/>
                 <a:ea typeface="+mj-lt" pitchFamily="34" charset="-122"/>
@@ -25612,7 +25597,7 @@
             <a:r>
               <a:rPr lang="en-US" sz="1400" dirty="0">
                 <a:solidFill>
-                  <a:schemeClr val="tx1"/>
+                  <a:srgbClr val="1B2430"/>
                 </a:solidFill>
               </a:rPr>
               <a:t>Health states and transition probabilities. Basis of disease-progression and cost-effectiveness models.</a:t>
@@ -25632,17 +25617,17 @@
             <a:off x="6217920" y="1554480"/>
             <a:ext cx="5394960" cy="2240280"/>
           </a:xfrm>
-          <a:prstGeom prst="roundRect">
+          <a:prstGeom prst="rect">
             <a:avLst>
               <a:gd name="adj" fmla="val 3265"/>
             </a:avLst>
           </a:prstGeom>
           <a:solidFill>
-            <a:schemeClr val="bg2"/>
+            <a:srgbClr val="EEF4F5"/>
           </a:solidFill>
           <a:ln w="12700">
             <a:solidFill>
-              <a:schemeClr val="bg2"/>
+              <a:srgbClr val="EEF4F5"/>
             </a:solidFill>
             <a:prstDash val="solid"/>
           </a:ln>
@@ -25675,7 +25660,7 @@
             <a:r>
               <a:rPr lang="en-US" sz="1600" b="1" dirty="0">
                 <a:solidFill>
-                  <a:schemeClr val="tx2"/>
+                  <a:srgbClr val="0B3C49"/>
                 </a:solidFill>
               </a:rPr>
               <a:t>Hidden Markov model</a:t>
@@ -25699,7 +25684,7 @@
             <a:avLst/>
           </a:prstGeom>
           <a:solidFill>
-            <a:schemeClr val="bg1"/>
+            <a:srgbClr val="FFFFFF"/>
           </a:solidFill>
           <a:ln/>
         </p:spPr>
@@ -25713,7 +25698,7 @@
             <a:r>
               <a:rPr lang="en-US" sz="1500" dirty="0">
                 <a:solidFill>
-                  <a:schemeClr val="accent4"/>
+                  <a:srgbClr val="264653"/>
                 </a:solidFill>
                 <a:latin typeface="+mj-lt" pitchFamily="34" charset="0"/>
                 <a:ea typeface="+mj-lt" pitchFamily="34" charset="-122"/>
@@ -25752,7 +25737,7 @@
             <a:r>
               <a:rPr lang="en-US" sz="1400" dirty="0">
                 <a:solidFill>
-                  <a:schemeClr val="tx1"/>
+                  <a:srgbClr val="1B2430"/>
                 </a:solidFill>
               </a:rPr>
               <a:t>Unobserved disease stage z inferred from noisy observations y (forward–backward, Viterbi).</a:t>
@@ -25772,17 +25757,17 @@
             <a:off x="548640" y="4023360"/>
             <a:ext cx="5394960" cy="2240280"/>
           </a:xfrm>
-          <a:prstGeom prst="roundRect">
+          <a:prstGeom prst="rect">
             <a:avLst>
               <a:gd name="adj" fmla="val 3265"/>
             </a:avLst>
           </a:prstGeom>
           <a:solidFill>
-            <a:schemeClr val="bg2"/>
+            <a:srgbClr val="EEF4F5"/>
           </a:solidFill>
           <a:ln w="12700">
             <a:solidFill>
-              <a:schemeClr val="bg2"/>
+              <a:srgbClr val="EEF4F5"/>
             </a:solidFill>
             <a:prstDash val="solid"/>
           </a:ln>
@@ -25815,7 +25800,7 @@
             <a:r>
               <a:rPr lang="en-US" sz="1600" b="1" dirty="0">
                 <a:solidFill>
-                  <a:schemeClr val="tx2"/>
+                  <a:srgbClr val="0B3C49"/>
                 </a:solidFill>
               </a:rPr>
               <a:t>Agent-based model</a:t>
@@ -25839,7 +25824,7 @@
             <a:avLst/>
           </a:prstGeom>
           <a:solidFill>
-            <a:schemeClr val="bg1"/>
+            <a:srgbClr val="FFFFFF"/>
           </a:solidFill>
           <a:ln/>
         </p:spPr>
@@ -25853,7 +25838,7 @@
             <a:r>
               <a:rPr lang="en-US" sz="1500" dirty="0">
                 <a:solidFill>
-                  <a:schemeClr val="accent4"/>
+                  <a:srgbClr val="264653"/>
                 </a:solidFill>
                 <a:latin typeface="+mj-lt" pitchFamily="34" charset="0"/>
                 <a:ea typeface="+mj-lt" pitchFamily="34" charset="-122"/>
@@ -25892,7 +25877,7 @@
             <a:r>
               <a:rPr lang="en-US" sz="1400" dirty="0">
                 <a:solidFill>
-                  <a:schemeClr val="tx1"/>
+                  <a:srgbClr val="1B2430"/>
                 </a:solidFill>
               </a:rPr>
               <a:t>Individual cells, patients or devices follow rules; population behaviour emerges. Calibrate on summary statistics.</a:t>
@@ -25912,17 +25897,17 @@
             <a:off x="6217920" y="4023360"/>
             <a:ext cx="5394960" cy="2240280"/>
           </a:xfrm>
-          <a:prstGeom prst="roundRect">
+          <a:prstGeom prst="rect">
             <a:avLst>
               <a:gd name="adj" fmla="val 3265"/>
             </a:avLst>
           </a:prstGeom>
           <a:solidFill>
-            <a:schemeClr val="bg2"/>
+            <a:srgbClr val="EEF4F5"/>
           </a:solidFill>
           <a:ln w="12700">
             <a:solidFill>
-              <a:schemeClr val="bg2"/>
+              <a:srgbClr val="EEF4F5"/>
             </a:solidFill>
             <a:prstDash val="solid"/>
           </a:ln>
@@ -25955,7 +25940,7 @@
             <a:r>
               <a:rPr lang="en-US" sz="1600" b="1" dirty="0">
                 <a:solidFill>
-                  <a:schemeClr val="tx2"/>
+                  <a:srgbClr val="0B3C49"/>
                 </a:solidFill>
               </a:rPr>
               <a:t>Cellular automata and hybrid systems</a:t>
@@ -25979,7 +25964,7 @@
             <a:avLst/>
           </a:prstGeom>
           <a:solidFill>
-            <a:schemeClr val="bg1"/>
+            <a:srgbClr val="FFFFFF"/>
           </a:solidFill>
           <a:ln/>
         </p:spPr>
@@ -25993,7 +25978,7 @@
             <a:r>
               <a:rPr lang="en-US" sz="1500" dirty="0">
                 <a:solidFill>
-                  <a:schemeClr val="accent4"/>
+                  <a:srgbClr val="264653"/>
                 </a:solidFill>
                 <a:latin typeface="+mj-lt" pitchFamily="34" charset="0"/>
                 <a:ea typeface="+mj-lt" pitchFamily="34" charset="-122"/>
@@ -26010,7 +25995,7 @@
             <a:r>
               <a:rPr lang="en-US" sz="1500" dirty="0">
                 <a:solidFill>
-                  <a:schemeClr val="accent4"/>
+                  <a:srgbClr val="264653"/>
                 </a:solidFill>
                 <a:latin typeface="+mj-lt" pitchFamily="34" charset="0"/>
                 <a:ea typeface="+mj-lt" pitchFamily="34" charset="-122"/>
@@ -26049,7 +26034,7 @@
             <a:r>
               <a:rPr lang="en-US" sz="1400" dirty="0">
                 <a:solidFill>
-                  <a:schemeClr val="tx1"/>
+                  <a:srgbClr val="1B2430"/>
                 </a:solidFill>
               </a:rPr>
               <a:t>Lattice rules for tissue; hybrid models mix continuous flow with discrete events (e.g. dosing).</a:t>
@@ -26088,7 +26073,7 @@
             <a:lvl1pPr>
               <a:defRPr sz="1000">
                 <a:solidFill>
-                  <a:schemeClr val="accent6"/>
+                  <a:srgbClr val="5F6B76"/>
                 </a:solidFill>
               </a:defRPr>
             </a:lvl1pPr>
@@ -26157,7 +26142,7 @@
             <a:r>
               <a:rPr lang="en-US" sz="1300" b="1" dirty="0">
                 <a:solidFill>
-                  <a:schemeClr val="accent2"/>
+                  <a:srgbClr val="1F7A70"/>
                 </a:solidFill>
               </a:rPr>
               <a:t>FAMILY 2 · PHARMACOKINETICS</a:t>
@@ -26195,7 +26180,7 @@
             <a:r>
               <a:rPr lang="en-US" sz="3600" b="1" dirty="0">
                 <a:solidFill>
-                  <a:schemeClr val="tx2"/>
+                  <a:srgbClr val="0B3C49"/>
                 </a:solidFill>
               </a:rPr>
               <a:t>What the body does to a drug</a:t>
@@ -26215,17 +26200,17 @@
             <a:off x="548640" y="1554480"/>
             <a:ext cx="5394960" cy="2240280"/>
           </a:xfrm>
-          <a:prstGeom prst="roundRect">
+          <a:prstGeom prst="rect">
             <a:avLst>
               <a:gd name="adj" fmla="val 3265"/>
             </a:avLst>
           </a:prstGeom>
           <a:solidFill>
-            <a:schemeClr val="bg2"/>
+            <a:srgbClr val="EEF4F5"/>
           </a:solidFill>
           <a:ln w="12700">
             <a:solidFill>
-              <a:schemeClr val="bg2"/>
+              <a:srgbClr val="EEF4F5"/>
             </a:solidFill>
             <a:prstDash val="solid"/>
           </a:ln>
@@ -26258,7 +26243,7 @@
             <a:r>
               <a:rPr lang="en-US" sz="1600" b="1" dirty="0">
                 <a:solidFill>
-                  <a:schemeClr val="tx2"/>
+                  <a:srgbClr val="0B3C49"/>
                 </a:solidFill>
               </a:rPr>
               <a:t>One compartment, IV bolus</a:t>
@@ -26282,7 +26267,7 @@
             <a:avLst/>
           </a:prstGeom>
           <a:solidFill>
-            <a:schemeClr val="bg1"/>
+            <a:srgbClr val="FFFFFF"/>
           </a:solidFill>
           <a:ln/>
         </p:spPr>
@@ -26296,7 +26281,7 @@
             <a:r>
               <a:rPr lang="en-US" sz="1600" dirty="0">
                 <a:solidFill>
-                  <a:schemeClr val="accent4"/>
+                  <a:srgbClr val="264653"/>
                 </a:solidFill>
                 <a:latin typeface="+mj-lt" pitchFamily="34" charset="0"/>
                 <a:ea typeface="+mj-lt" pitchFamily="34" charset="-122"/>
@@ -26313,7 +26298,7 @@
             <a:r>
               <a:rPr lang="en-US" sz="1600" dirty="0">
                 <a:solidFill>
-                  <a:schemeClr val="accent4"/>
+                  <a:srgbClr val="264653"/>
                 </a:solidFill>
                 <a:latin typeface="+mj-lt" pitchFamily="34" charset="0"/>
                 <a:ea typeface="+mj-lt" pitchFamily="34" charset="-122"/>
@@ -26352,7 +26337,7 @@
             <a:r>
               <a:rPr lang="en-US" sz="1400" dirty="0">
                 <a:solidFill>
-                  <a:schemeClr val="tx1"/>
+                  <a:srgbClr val="1B2430"/>
                 </a:solidFill>
               </a:rPr>
               <a:t>Volume V and clearance CL summarise distribution and elimination.</a:t>
@@ -26372,17 +26357,17 @@
             <a:off x="6217920" y="1554480"/>
             <a:ext cx="5394960" cy="2240280"/>
           </a:xfrm>
-          <a:prstGeom prst="roundRect">
+          <a:prstGeom prst="rect">
             <a:avLst>
               <a:gd name="adj" fmla="val 3265"/>
             </a:avLst>
           </a:prstGeom>
           <a:solidFill>
-            <a:schemeClr val="bg2"/>
+            <a:srgbClr val="EEF4F5"/>
           </a:solidFill>
           <a:ln w="12700">
             <a:solidFill>
-              <a:schemeClr val="bg2"/>
+              <a:srgbClr val="EEF4F5"/>
             </a:solidFill>
             <a:prstDash val="solid"/>
           </a:ln>
@@ -26415,7 +26400,7 @@
             <a:r>
               <a:rPr lang="en-US" sz="1600" b="1" dirty="0">
                 <a:solidFill>
-                  <a:schemeClr val="tx2"/>
+                  <a:srgbClr val="0B3C49"/>
                 </a:solidFill>
               </a:rPr>
               <a:t>First-order absorption (Bateman)</a:t>
@@ -26439,7 +26424,7 @@
             <a:avLst/>
           </a:prstGeom>
           <a:solidFill>
-            <a:schemeClr val="bg1"/>
+            <a:srgbClr val="FFFFFF"/>
           </a:solidFill>
           <a:ln/>
         </p:spPr>
@@ -26453,7 +26438,7 @@
             <a:r>
               <a:rPr lang="en-US" sz="1500" dirty="0">
                 <a:solidFill>
-                  <a:schemeClr val="accent4"/>
+                  <a:srgbClr val="264653"/>
                 </a:solidFill>
                 <a:latin typeface="+mj-lt" pitchFamily="34" charset="0"/>
                 <a:ea typeface="+mj-lt" pitchFamily="34" charset="-122"/>
@@ -26492,7 +26477,7 @@
             <a:r>
               <a:rPr lang="en-US" sz="1400" dirty="0">
                 <a:solidFill>
-                  <a:schemeClr val="tx1"/>
+                  <a:srgbClr val="1B2430"/>
                 </a:solidFill>
               </a:rPr>
               <a:t>Oral dosing with bioavailability F and absorption rate kₐ. Gives Cmax and Tmax.</a:t>
@@ -26512,17 +26497,17 @@
             <a:off x="548640" y="4023360"/>
             <a:ext cx="5394960" cy="2240280"/>
           </a:xfrm>
-          <a:prstGeom prst="roundRect">
+          <a:prstGeom prst="rect">
             <a:avLst>
               <a:gd name="adj" fmla="val 3265"/>
             </a:avLst>
           </a:prstGeom>
           <a:solidFill>
-            <a:schemeClr val="bg2"/>
+            <a:srgbClr val="EEF4F5"/>
           </a:solidFill>
           <a:ln w="12700">
             <a:solidFill>
-              <a:schemeClr val="bg2"/>
+              <a:srgbClr val="EEF4F5"/>
             </a:solidFill>
             <a:prstDash val="solid"/>
           </a:ln>
@@ -26555,7 +26540,7 @@
             <a:r>
               <a:rPr lang="en-US" sz="1600" b="1" dirty="0">
                 <a:solidFill>
-                  <a:schemeClr val="tx2"/>
+                  <a:srgbClr val="0B3C49"/>
                 </a:solidFill>
               </a:rPr>
               <a:t>Two compartments</a:t>
@@ -26579,7 +26564,7 @@
             <a:avLst/>
           </a:prstGeom>
           <a:solidFill>
-            <a:schemeClr val="bg1"/>
+            <a:srgbClr val="FFFFFF"/>
           </a:solidFill>
           <a:ln/>
         </p:spPr>
@@ -26593,7 +26578,7 @@
             <a:r>
               <a:rPr lang="en-US" sz="1600" dirty="0">
                 <a:solidFill>
-                  <a:schemeClr val="accent4"/>
+                  <a:srgbClr val="264653"/>
                 </a:solidFill>
                 <a:latin typeface="+mj-lt" pitchFamily="34" charset="0"/>
                 <a:ea typeface="+mj-lt" pitchFamily="34" charset="-122"/>
@@ -26610,7 +26595,7 @@
             <a:r>
               <a:rPr lang="en-US" sz="1600" dirty="0">
                 <a:solidFill>
-                  <a:schemeClr val="accent4"/>
+                  <a:srgbClr val="264653"/>
                 </a:solidFill>
                 <a:latin typeface="+mj-lt" pitchFamily="34" charset="0"/>
                 <a:ea typeface="+mj-lt" pitchFamily="34" charset="-122"/>
@@ -26649,7 +26634,7 @@
             <a:r>
               <a:rPr lang="en-US" sz="1400" dirty="0">
                 <a:solidFill>
-                  <a:schemeClr val="tx1"/>
+                  <a:srgbClr val="1B2430"/>
                 </a:solidFill>
               </a:rPr>
               <a:t>Central and peripheral compartments; bi-exponential decline. Extends to n compartments.</a:t>
@@ -26669,17 +26654,17 @@
             <a:off x="6217920" y="4023360"/>
             <a:ext cx="5394960" cy="2240280"/>
           </a:xfrm>
-          <a:prstGeom prst="roundRect">
+          <a:prstGeom prst="rect">
             <a:avLst>
               <a:gd name="adj" fmla="val 3265"/>
             </a:avLst>
           </a:prstGeom>
           <a:solidFill>
-            <a:schemeClr val="bg2"/>
+            <a:srgbClr val="EEF4F5"/>
           </a:solidFill>
           <a:ln w="12700">
             <a:solidFill>
-              <a:schemeClr val="bg2"/>
+              <a:srgbClr val="EEF4F5"/>
             </a:solidFill>
             <a:prstDash val="solid"/>
           </a:ln>
@@ -26712,7 +26697,7 @@
             <a:r>
               <a:rPr lang="en-US" sz="1600" b="1" dirty="0">
                 <a:solidFill>
-                  <a:schemeClr val="tx2"/>
+                  <a:srgbClr val="0B3C49"/>
                 </a:solidFill>
               </a:rPr>
               <a:t>PBPK (general)</a:t>
@@ -26736,7 +26721,7 @@
             <a:avLst/>
           </a:prstGeom>
           <a:solidFill>
-            <a:schemeClr val="bg1"/>
+            <a:srgbClr val="FFFFFF"/>
           </a:solidFill>
           <a:ln/>
         </p:spPr>
@@ -26750,7 +26735,7 @@
             <a:r>
               <a:rPr lang="en-US" sz="1500" dirty="0">
                 <a:solidFill>
-                  <a:schemeClr val="accent4"/>
+                  <a:srgbClr val="264653"/>
                 </a:solidFill>
                 <a:latin typeface="+mj-lt" pitchFamily="34" charset="0"/>
                 <a:ea typeface="+mj-lt" pitchFamily="34" charset="-122"/>
@@ -26767,7 +26752,7 @@
             <a:r>
               <a:rPr lang="en-US" sz="1500" dirty="0">
                 <a:solidFill>
-                  <a:schemeClr val="accent4"/>
+                  <a:srgbClr val="264653"/>
                 </a:solidFill>
                 <a:latin typeface="+mj-lt" pitchFamily="34" charset="0"/>
                 <a:ea typeface="+mj-lt" pitchFamily="34" charset="-122"/>
@@ -26806,7 +26791,7 @@
             <a:r>
               <a:rPr lang="en-US" sz="1400" dirty="0">
                 <a:solidFill>
-                  <a:schemeClr val="tx1"/>
+                  <a:srgbClr val="1B2430"/>
                 </a:solidFill>
               </a:rPr>
               <a:t>Organs linked by blood flow Q with partition coefficients K_p. Scales across species and populations.</a:t>
@@ -26845,7 +26830,7 @@
             <a:lvl1pPr>
               <a:defRPr sz="1000">
                 <a:solidFill>
-                  <a:schemeClr val="accent6"/>
+                  <a:srgbClr val="5F6B76"/>
                 </a:solidFill>
               </a:defRPr>
             </a:lvl1pPr>
@@ -26914,7 +26899,7 @@
             <a:r>
               <a:rPr lang="en-US" sz="1300" b="1" dirty="0">
                 <a:solidFill>
-                  <a:schemeClr val="accent2"/>
+                  <a:srgbClr val="1F7A70"/>
                 </a:solidFill>
               </a:rPr>
               <a:t>FAMILY 3 · PHARMACODYNAMICS</a:t>
@@ -26952,7 +26937,7 @@
             <a:r>
               <a:rPr lang="en-US" sz="3600" b="1" dirty="0">
                 <a:solidFill>
-                  <a:schemeClr val="tx2"/>
+                  <a:srgbClr val="0B3C49"/>
                 </a:solidFill>
               </a:rPr>
               <a:t>What the drug does to the body</a:t>
@@ -26972,17 +26957,17 @@
             <a:off x="548640" y="1554480"/>
             <a:ext cx="5394960" cy="2240280"/>
           </a:xfrm>
-          <a:prstGeom prst="roundRect">
+          <a:prstGeom prst="rect">
             <a:avLst>
               <a:gd name="adj" fmla="val 3265"/>
             </a:avLst>
           </a:prstGeom>
           <a:solidFill>
-            <a:schemeClr val="bg2"/>
+            <a:srgbClr val="EEF4F5"/>
           </a:solidFill>
           <a:ln w="12700">
             <a:solidFill>
-              <a:schemeClr val="bg2"/>
+              <a:srgbClr val="EEF4F5"/>
             </a:solidFill>
             <a:prstDash val="solid"/>
           </a:ln>
@@ -27015,7 +27000,7 @@
             <a:r>
               <a:rPr lang="en-US" sz="1600" b="1" dirty="0">
                 <a:solidFill>
-                  <a:schemeClr val="tx2"/>
+                  <a:srgbClr val="0B3C49"/>
                 </a:solidFill>
               </a:rPr>
               <a:t>Emax / Hill model</a:t>
@@ -27039,7 +27024,7 @@
             <a:avLst/>
           </a:prstGeom>
           <a:solidFill>
-            <a:schemeClr val="bg1"/>
+            <a:srgbClr val="FFFFFF"/>
           </a:solidFill>
           <a:ln/>
         </p:spPr>
@@ -27053,7 +27038,7 @@
             <a:r>
               <a:rPr lang="en-US" sz="1600" dirty="0">
                 <a:solidFill>
-                  <a:schemeClr val="accent4"/>
+                  <a:srgbClr val="264653"/>
                 </a:solidFill>
                 <a:latin typeface="+mj-lt" pitchFamily="34" charset="0"/>
                 <a:ea typeface="+mj-lt" pitchFamily="34" charset="-122"/>
@@ -27092,7 +27077,7 @@
             <a:r>
               <a:rPr lang="en-US" sz="1400" dirty="0">
                 <a:solidFill>
-                  <a:schemeClr val="tx1"/>
+                  <a:srgbClr val="1B2430"/>
                 </a:solidFill>
               </a:rPr>
               <a:t>Saturating concentration–effect curve. Hill coefficient n sets steepness; EC₅₀ the potency. n = 1 is the classic Emax model.</a:t>
@@ -27112,17 +27097,17 @@
             <a:off x="548640" y="3977640"/>
             <a:ext cx="5394960" cy="2148840"/>
           </a:xfrm>
-          <a:prstGeom prst="roundRect">
+          <a:prstGeom prst="rect">
             <a:avLst>
               <a:gd name="adj" fmla="val 3404"/>
             </a:avLst>
           </a:prstGeom>
           <a:solidFill>
-            <a:schemeClr val="bg2"/>
+            <a:srgbClr val="EEF4F5"/>
           </a:solidFill>
           <a:ln w="12700">
             <a:solidFill>
-              <a:schemeClr val="bg2"/>
+              <a:srgbClr val="EEF4F5"/>
             </a:solidFill>
             <a:prstDash val="solid"/>
           </a:ln>
@@ -27155,7 +27140,7 @@
             <a:r>
               <a:rPr lang="en-US" sz="1600" b="1" dirty="0">
                 <a:solidFill>
-                  <a:schemeClr val="tx2"/>
+                  <a:srgbClr val="0B3C49"/>
                 </a:solidFill>
               </a:rPr>
               <a:t>Indirect response and effect site</a:t>
@@ -27179,7 +27164,7 @@
             <a:avLst/>
           </a:prstGeom>
           <a:solidFill>
-            <a:schemeClr val="bg1"/>
+            <a:srgbClr val="FFFFFF"/>
           </a:solidFill>
           <a:ln/>
         </p:spPr>
@@ -27193,7 +27178,7 @@
             <a:r>
               <a:rPr lang="en-US" sz="1600" dirty="0">
                 <a:solidFill>
-                  <a:schemeClr val="accent4"/>
+                  <a:srgbClr val="264653"/>
                 </a:solidFill>
                 <a:latin typeface="+mj-lt" pitchFamily="34" charset="0"/>
                 <a:ea typeface="+mj-lt" pitchFamily="34" charset="-122"/>
@@ -27210,7 +27195,7 @@
             <a:r>
               <a:rPr lang="en-US" sz="1600" dirty="0">
                 <a:solidFill>
-                  <a:schemeClr val="accent4"/>
+                  <a:srgbClr val="264653"/>
                 </a:solidFill>
                 <a:latin typeface="+mj-lt" pitchFamily="34" charset="0"/>
                 <a:ea typeface="+mj-lt" pitchFamily="34" charset="-122"/>
@@ -27249,7 +27234,7 @@
             <a:r>
               <a:rPr lang="en-US" sz="1400" dirty="0">
                 <a:solidFill>
-                  <a:schemeClr val="tx1"/>
+                  <a:srgbClr val="1B2430"/>
                 </a:solidFill>
               </a:rPr>
               <a:t>Drug alters production or loss of a response R; effect compartment C_e explains hysteresis.</a:t>
@@ -27301,7 +27286,7 @@
             <a:r>
               <a:rPr lang="en-US" sz="1200" i="1" dirty="0">
                 <a:solidFill>
-                  <a:schemeClr val="accent6"/>
+                  <a:srgbClr val="5F6B76"/>
                 </a:solidFill>
               </a:rPr>
               <a:t>All curves cross 50 % at C = EC₅₀; larger n gives a sharper switch.</a:t>
@@ -27340,7 +27325,7 @@
             <a:lvl1pPr>
               <a:defRPr sz="1000">
                 <a:solidFill>
-                  <a:schemeClr val="accent6"/>
+                  <a:srgbClr val="5F6B76"/>
                 </a:solidFill>
               </a:defRPr>
             </a:lvl1pPr>
@@ -27409,7 +27394,7 @@
             <a:r>
               <a:rPr lang="en-US" sz="1300" b="1" dirty="0">
                 <a:solidFill>
-                  <a:schemeClr val="accent2"/>
+                  <a:srgbClr val="1F7A70"/>
                 </a:solidFill>
               </a:rPr>
               <a:t>FAMILY 3 · QUANTITATIVE SYSTEMS PHARMACOLOGY</a:t>
@@ -27447,7 +27432,7 @@
             <a:r>
               <a:rPr lang="en-US" sz="3600" b="1" dirty="0">
                 <a:solidFill>
-                  <a:schemeClr val="tx2"/>
+                  <a:srgbClr val="0B3C49"/>
                 </a:solidFill>
               </a:rPr>
               <a:t>Biochemical networks as equations</a:t>
@@ -27467,17 +27452,17 @@
             <a:off x="548640" y="1554480"/>
             <a:ext cx="5394960" cy="2240280"/>
           </a:xfrm>
-          <a:prstGeom prst="roundRect">
+          <a:prstGeom prst="rect">
             <a:avLst>
               <a:gd name="adj" fmla="val 3265"/>
             </a:avLst>
           </a:prstGeom>
           <a:solidFill>
-            <a:schemeClr val="bg2"/>
+            <a:srgbClr val="EEF4F5"/>
           </a:solidFill>
           <a:ln w="12700">
             <a:solidFill>
-              <a:schemeClr val="bg2"/>
+              <a:srgbClr val="EEF4F5"/>
             </a:solidFill>
             <a:prstDash val="solid"/>
           </a:ln>
@@ -27510,7 +27495,7 @@
             <a:r>
               <a:rPr lang="en-US" sz="1600" b="1" dirty="0">
                 <a:solidFill>
-                  <a:schemeClr val="tx2"/>
+                  <a:srgbClr val="0B3C49"/>
                 </a:solidFill>
               </a:rPr>
               <a:t>Mass-action kinetics</a:t>
@@ -27534,7 +27519,7 @@
             <a:avLst/>
           </a:prstGeom>
           <a:solidFill>
-            <a:schemeClr val="bg1"/>
+            <a:srgbClr val="FFFFFF"/>
           </a:solidFill>
           <a:ln/>
         </p:spPr>
@@ -27548,7 +27533,7 @@
             <a:r>
               <a:rPr lang="en-US" sz="1600" dirty="0">
                 <a:solidFill>
-                  <a:schemeClr val="accent4"/>
+                  <a:srgbClr val="264653"/>
                 </a:solidFill>
                 <a:latin typeface="+mj-lt" pitchFamily="34" charset="0"/>
                 <a:ea typeface="+mj-lt" pitchFamily="34" charset="-122"/>
@@ -27565,7 +27550,7 @@
             <a:r>
               <a:rPr lang="en-US" sz="1600" dirty="0">
                 <a:solidFill>
-                  <a:schemeClr val="accent4"/>
+                  <a:srgbClr val="264653"/>
                 </a:solidFill>
                 <a:latin typeface="+mj-lt" pitchFamily="34" charset="0"/>
                 <a:ea typeface="+mj-lt" pitchFamily="34" charset="-122"/>
@@ -27604,7 +27589,7 @@
             <a:r>
               <a:rPr lang="en-US" sz="1400" dirty="0">
                 <a:solidFill>
-                  <a:schemeClr val="tx1"/>
+                  <a:srgbClr val="1B2430"/>
                 </a:solidFill>
               </a:rPr>
               <a:t>Stoichiometry matrix S times reaction rates v. The general QSP and systems-biology form.</a:t>
@@ -27624,17 +27609,17 @@
             <a:off x="6217920" y="1554480"/>
             <a:ext cx="5394960" cy="2240280"/>
           </a:xfrm>
-          <a:prstGeom prst="roundRect">
+          <a:prstGeom prst="rect">
             <a:avLst>
               <a:gd name="adj" fmla="val 3265"/>
             </a:avLst>
           </a:prstGeom>
           <a:solidFill>
-            <a:schemeClr val="bg2"/>
+            <a:srgbClr val="EEF4F5"/>
           </a:solidFill>
           <a:ln w="12700">
             <a:solidFill>
-              <a:schemeClr val="bg2"/>
+              <a:srgbClr val="EEF4F5"/>
             </a:solidFill>
             <a:prstDash val="solid"/>
           </a:ln>
@@ -27667,7 +27652,7 @@
             <a:r>
               <a:rPr lang="en-US" sz="1600" b="1" dirty="0">
                 <a:solidFill>
-                  <a:schemeClr val="tx2"/>
+                  <a:srgbClr val="0B3C49"/>
                 </a:solidFill>
               </a:rPr>
               <a:t>Michaelis–Menten</a:t>
@@ -27691,7 +27676,7 @@
             <a:avLst/>
           </a:prstGeom>
           <a:solidFill>
-            <a:schemeClr val="bg1"/>
+            <a:srgbClr val="FFFFFF"/>
           </a:solidFill>
           <a:ln/>
         </p:spPr>
@@ -27705,7 +27690,7 @@
             <a:r>
               <a:rPr lang="en-US" sz="1600" dirty="0">
                 <a:solidFill>
-                  <a:schemeClr val="accent4"/>
+                  <a:srgbClr val="264653"/>
                 </a:solidFill>
                 <a:latin typeface="+mj-lt" pitchFamily="34" charset="0"/>
                 <a:ea typeface="+mj-lt" pitchFamily="34" charset="-122"/>
@@ -27744,7 +27729,7 @@
             <a:r>
               <a:rPr lang="en-US" sz="1400" dirty="0">
                 <a:solidFill>
-                  <a:schemeClr val="tx1"/>
+                  <a:srgbClr val="1B2430"/>
                 </a:solidFill>
               </a:rPr>
               <a:t>Saturable enzyme kinetics or transport; also saturable (nonlinear) drug elimination.</a:t>
@@ -27764,17 +27749,17 @@
             <a:off x="548640" y="4023360"/>
             <a:ext cx="5394960" cy="2240280"/>
           </a:xfrm>
-          <a:prstGeom prst="roundRect">
+          <a:prstGeom prst="rect">
             <a:avLst>
               <a:gd name="adj" fmla="val 3265"/>
             </a:avLst>
           </a:prstGeom>
           <a:solidFill>
-            <a:schemeClr val="bg2"/>
+            <a:srgbClr val="EEF4F5"/>
           </a:solidFill>
           <a:ln w="12700">
             <a:solidFill>
-              <a:schemeClr val="bg2"/>
+              <a:srgbClr val="EEF4F5"/>
             </a:solidFill>
             <a:prstDash val="solid"/>
           </a:ln>
@@ -27807,7 +27792,7 @@
             <a:r>
               <a:rPr lang="en-US" sz="1600" b="1" dirty="0">
                 <a:solidFill>
-                  <a:schemeClr val="tx2"/>
+                  <a:srgbClr val="0B3C49"/>
                 </a:solidFill>
               </a:rPr>
               <a:t>Receptor occupancy</a:t>
@@ -27831,7 +27816,7 @@
             <a:avLst/>
           </a:prstGeom>
           <a:solidFill>
-            <a:schemeClr val="bg1"/>
+            <a:srgbClr val="FFFFFF"/>
           </a:solidFill>
           <a:ln/>
         </p:spPr>
@@ -27845,7 +27830,7 @@
             <a:r>
               <a:rPr lang="en-US" sz="1600" dirty="0">
                 <a:solidFill>
-                  <a:schemeClr val="accent4"/>
+                  <a:srgbClr val="264653"/>
                 </a:solidFill>
                 <a:latin typeface="+mj-lt" pitchFamily="34" charset="0"/>
                 <a:ea typeface="+mj-lt" pitchFamily="34" charset="-122"/>
@@ -27862,7 +27847,7 @@
             <a:r>
               <a:rPr lang="en-US" sz="1600" dirty="0">
                 <a:solidFill>
-                  <a:schemeClr val="accent4"/>
+                  <a:srgbClr val="264653"/>
                 </a:solidFill>
                 <a:latin typeface="+mj-lt" pitchFamily="34" charset="0"/>
                 <a:ea typeface="+mj-lt" pitchFamily="34" charset="-122"/>
@@ -27901,7 +27886,7 @@
             <a:r>
               <a:rPr lang="en-US" sz="1400" dirty="0">
                 <a:solidFill>
-                  <a:schemeClr val="tx1"/>
+                  <a:srgbClr val="1B2430"/>
                 </a:solidFill>
               </a:rPr>
               <a:t>Binding drives effect; target-mediated drug disposition extends this to drug loss by binding.</a:t>
@@ -27921,17 +27906,17 @@
             <a:off x="6217920" y="4023360"/>
             <a:ext cx="5394960" cy="2240280"/>
           </a:xfrm>
-          <a:prstGeom prst="roundRect">
+          <a:prstGeom prst="rect">
             <a:avLst>
               <a:gd name="adj" fmla="val 3265"/>
             </a:avLst>
           </a:prstGeom>
           <a:solidFill>
-            <a:schemeClr val="bg2"/>
+            <a:srgbClr val="EEF4F5"/>
           </a:solidFill>
           <a:ln w="12700">
             <a:solidFill>
-              <a:schemeClr val="bg2"/>
+              <a:srgbClr val="EEF4F5"/>
             </a:solidFill>
             <a:prstDash val="solid"/>
           </a:ln>
@@ -27964,7 +27949,7 @@
             <a:r>
               <a:rPr lang="en-US" sz="1600" b="1" dirty="0">
                 <a:solidFill>
-                  <a:schemeClr val="tx2"/>
+                  <a:srgbClr val="0B3C49"/>
                 </a:solidFill>
               </a:rPr>
               <a:t>Logical (Boolean) networks</a:t>
@@ -27988,7 +27973,7 @@
             <a:avLst/>
           </a:prstGeom>
           <a:solidFill>
-            <a:schemeClr val="bg1"/>
+            <a:srgbClr val="FFFFFF"/>
           </a:solidFill>
           <a:ln/>
         </p:spPr>
@@ -28002,7 +27987,7 @@
             <a:r>
               <a:rPr lang="en-US" sz="1600" dirty="0">
                 <a:solidFill>
-                  <a:schemeClr val="accent4"/>
+                  <a:srgbClr val="264653"/>
                 </a:solidFill>
                 <a:latin typeface="+mj-lt" pitchFamily="34" charset="0"/>
                 <a:ea typeface="+mj-lt" pitchFamily="34" charset="-122"/>
@@ -28041,7 +28026,7 @@
             <a:r>
               <a:rPr lang="en-US" sz="1400" dirty="0">
                 <a:solidFill>
-                  <a:schemeClr val="tx1"/>
+                  <a:srgbClr val="1B2430"/>
                 </a:solidFill>
               </a:rPr>
               <a:t>Signalling pathways when rate constants are unknown; finds attractors (cell fates) and drug targets.</a:t>
@@ -28080,7 +28065,7 @@
             <a:lvl1pPr>
               <a:defRPr sz="1000">
                 <a:solidFill>
-                  <a:schemeClr val="accent6"/>
+                  <a:srgbClr val="5F6B76"/>
                 </a:solidFill>
               </a:defRPr>
             </a:lvl1pPr>
